--- a/block digram.pptx
+++ b/block digram.pptx
@@ -5,7 +5,7 @@
     <p:sldMasterId id="2147483660" r:id="rId1"/>
   </p:sldMasterIdLst>
   <p:notesMasterIdLst>
-    <p:notesMasterId r:id="rId18"/>
+    <p:notesMasterId r:id="rId17"/>
   </p:notesMasterIdLst>
   <p:sldIdLst>
     <p:sldId id="263" r:id="rId2"/>
@@ -16,14 +16,13 @@
     <p:sldId id="262" r:id="rId7"/>
     <p:sldId id="259" r:id="rId8"/>
     <p:sldId id="264" r:id="rId9"/>
-    <p:sldId id="265" r:id="rId10"/>
-    <p:sldId id="272" r:id="rId11"/>
-    <p:sldId id="266" r:id="rId12"/>
-    <p:sldId id="267" r:id="rId13"/>
-    <p:sldId id="268" r:id="rId14"/>
-    <p:sldId id="269" r:id="rId15"/>
-    <p:sldId id="270" r:id="rId16"/>
-    <p:sldId id="271" r:id="rId17"/>
+    <p:sldId id="266" r:id="rId10"/>
+    <p:sldId id="265" r:id="rId11"/>
+    <p:sldId id="272" r:id="rId12"/>
+    <p:sldId id="273" r:id="rId13"/>
+    <p:sldId id="274" r:id="rId14"/>
+    <p:sldId id="267" r:id="rId15"/>
+    <p:sldId id="268" r:id="rId16"/>
   </p:sldIdLst>
   <p:sldSz cx="12192000" cy="6858000"/>
   <p:notesSz cx="6858000" cy="9144000"/>
@@ -212,7 +211,7 @@
           <a:p>
             <a:fld id="{D9DC8440-7A2E-4222-9B6A-0DD1C564546D}" type="datetimeFigureOut">
               <a:rPr lang="en-US" smtClean="0"/>
-              <a:t>3/23/2026</a:t>
+              <a:t>3/29/2026</a:t>
             </a:fld>
             <a:endParaRPr lang="en-US"/>
           </a:p>
@@ -602,7 +601,7 @@
         <p:cNvPr id="1" name="">
           <a:extLst>
             <a:ext uri="{FF2B5EF4-FFF2-40B4-BE49-F238E27FC236}">
-              <a16:creationId xmlns:a16="http://schemas.microsoft.com/office/drawing/2014/main" id="{1186E9D3-B28F-F918-1F2B-1EBD1A691CFD}"/>
+              <a16:creationId xmlns:a16="http://schemas.microsoft.com/office/drawing/2014/main" id="{D0BE1C44-51BC-4938-862C-9DA53363573B}"/>
             </a:ext>
           </a:extLst>
         </p:cNvPr>
@@ -622,7 +621,7 @@
           <p:cNvPr id="2" name="Slide Image Placeholder 1">
             <a:extLst>
               <a:ext uri="{FF2B5EF4-FFF2-40B4-BE49-F238E27FC236}">
-                <a16:creationId xmlns:a16="http://schemas.microsoft.com/office/drawing/2014/main" id="{744808FC-EBCA-77B9-0215-BF0E817E1AC4}"/>
+                <a16:creationId xmlns:a16="http://schemas.microsoft.com/office/drawing/2014/main" id="{1915CEE8-50F4-001D-E03C-EE37B5E021DF}"/>
               </a:ext>
             </a:extLst>
           </p:cNvPr>
@@ -647,7 +646,7 @@
           <p:cNvPr id="3" name="Notes Placeholder 2">
             <a:extLst>
               <a:ext uri="{FF2B5EF4-FFF2-40B4-BE49-F238E27FC236}">
-                <a16:creationId xmlns:a16="http://schemas.microsoft.com/office/drawing/2014/main" id="{1D2C0DFD-3896-C7A3-80D7-2E9118FFF44B}"/>
+                <a16:creationId xmlns:a16="http://schemas.microsoft.com/office/drawing/2014/main" id="{BE049217-8E96-2467-51AC-55A6827601D1}"/>
               </a:ext>
             </a:extLst>
           </p:cNvPr>
@@ -672,7 +671,7 @@
           <p:cNvPr id="4" name="Slide Number Placeholder 3">
             <a:extLst>
               <a:ext uri="{FF2B5EF4-FFF2-40B4-BE49-F238E27FC236}">
-                <a16:creationId xmlns:a16="http://schemas.microsoft.com/office/drawing/2014/main" id="{916F92BD-AF91-93C1-28BC-E73DAD397F6A}"/>
+                <a16:creationId xmlns:a16="http://schemas.microsoft.com/office/drawing/2014/main" id="{7262B210-203E-65E0-6C6C-F7BA2D364CC2}"/>
               </a:ext>
             </a:extLst>
           </p:cNvPr>
@@ -699,122 +698,7 @@
     </p:spTree>
     <p:extLst>
       <p:ext uri="{BB962C8B-B14F-4D97-AF65-F5344CB8AC3E}">
-        <p14:creationId xmlns:p14="http://schemas.microsoft.com/office/powerpoint/2010/main" val="2555585258"/>
-      </p:ext>
-    </p:extLst>
-  </p:cSld>
-  <p:clrMapOvr>
-    <a:masterClrMapping/>
-  </p:clrMapOvr>
-</p:notes>
-</file>
-
-<file path=ppt/notesSlides/notesSlide11.xml><?xml version="1.0" encoding="utf-8"?>
-<p:notes xmlns:a="http://schemas.openxmlformats.org/drawingml/2006/main" xmlns:r="http://schemas.openxmlformats.org/officeDocument/2006/relationships" xmlns:p="http://schemas.openxmlformats.org/presentationml/2006/main">
-  <p:cSld>
-    <p:spTree>
-      <p:nvGrpSpPr>
-        <p:cNvPr id="1" name="">
-          <a:extLst>
-            <a:ext uri="{FF2B5EF4-FFF2-40B4-BE49-F238E27FC236}">
-              <a16:creationId xmlns:a16="http://schemas.microsoft.com/office/drawing/2014/main" id="{5D86C2F2-F0CC-A4CA-5D39-88508FAB8ADD}"/>
-            </a:ext>
-          </a:extLst>
-        </p:cNvPr>
-        <p:cNvGrpSpPr/>
-        <p:nvPr/>
-      </p:nvGrpSpPr>
-      <p:grpSpPr>
-        <a:xfrm>
-          <a:off x="0" y="0"/>
-          <a:ext cx="0" cy="0"/>
-          <a:chOff x="0" y="0"/>
-          <a:chExt cx="0" cy="0"/>
-        </a:xfrm>
-      </p:grpSpPr>
-      <p:sp>
-        <p:nvSpPr>
-          <p:cNvPr id="2" name="Slide Image Placeholder 1">
-            <a:extLst>
-              <a:ext uri="{FF2B5EF4-FFF2-40B4-BE49-F238E27FC236}">
-                <a16:creationId xmlns:a16="http://schemas.microsoft.com/office/drawing/2014/main" id="{39D56CDF-7912-BAD5-2917-97419F1BCEE4}"/>
-              </a:ext>
-            </a:extLst>
-          </p:cNvPr>
-          <p:cNvSpPr>
-            <a:spLocks noGrp="1" noRot="1" noChangeAspect="1"/>
-          </p:cNvSpPr>
-          <p:nvPr>
-            <p:ph type="sldImg"/>
-          </p:nvPr>
-        </p:nvSpPr>
-        <p:spPr/>
-        <p:txBody>
-          <a:bodyPr/>
-          <a:lstStyle/>
-          <a:p>
-            <a:endParaRPr lang="en-US"/>
-          </a:p>
-        </p:txBody>
-      </p:sp>
-      <p:sp>
-        <p:nvSpPr>
-          <p:cNvPr id="3" name="Notes Placeholder 2">
-            <a:extLst>
-              <a:ext uri="{FF2B5EF4-FFF2-40B4-BE49-F238E27FC236}">
-                <a16:creationId xmlns:a16="http://schemas.microsoft.com/office/drawing/2014/main" id="{35CFA96B-119A-607A-A444-82B57BD793C2}"/>
-              </a:ext>
-            </a:extLst>
-          </p:cNvPr>
-          <p:cNvSpPr>
-            <a:spLocks noGrp="1"/>
-          </p:cNvSpPr>
-          <p:nvPr>
-            <p:ph type="body" idx="1"/>
-          </p:nvPr>
-        </p:nvSpPr>
-        <p:spPr/>
-        <p:txBody>
-          <a:bodyPr/>
-          <a:lstStyle/>
-          <a:p>
-            <a:endParaRPr lang="en-US" dirty="0"/>
-          </a:p>
-        </p:txBody>
-      </p:sp>
-      <p:sp>
-        <p:nvSpPr>
-          <p:cNvPr id="4" name="Slide Number Placeholder 3">
-            <a:extLst>
-              <a:ext uri="{FF2B5EF4-FFF2-40B4-BE49-F238E27FC236}">
-                <a16:creationId xmlns:a16="http://schemas.microsoft.com/office/drawing/2014/main" id="{F073E9EA-72C9-FB9C-B4DD-20708674E84C}"/>
-              </a:ext>
-            </a:extLst>
-          </p:cNvPr>
-          <p:cNvSpPr>
-            <a:spLocks noGrp="1"/>
-          </p:cNvSpPr>
-          <p:nvPr>
-            <p:ph type="sldNum" sz="quarter" idx="5"/>
-          </p:nvPr>
-        </p:nvSpPr>
-        <p:spPr/>
-        <p:txBody>
-          <a:bodyPr/>
-          <a:lstStyle/>
-          <a:p>
-            <a:fld id="{10F892FD-D3D1-4262-97B2-43B9C3115A49}" type="slidenum">
-              <a:rPr lang="en-US" smtClean="0"/>
-              <a:t>16</a:t>
-            </a:fld>
-            <a:endParaRPr lang="en-US"/>
-          </a:p>
-        </p:txBody>
-      </p:sp>
-    </p:spTree>
-    <p:extLst>
-      <p:ext uri="{BB962C8B-B14F-4D97-AF65-F5344CB8AC3E}">
-        <p14:creationId xmlns:p14="http://schemas.microsoft.com/office/powerpoint/2010/main" val="3734785755"/>
+        <p14:creationId xmlns:p14="http://schemas.microsoft.com/office/powerpoint/2010/main" val="3516815043"/>
       </p:ext>
     </p:extLst>
   </p:cSld>
@@ -1038,6 +922,121 @@
         <p:cNvPr id="1" name="">
           <a:extLst>
             <a:ext uri="{FF2B5EF4-FFF2-40B4-BE49-F238E27FC236}">
+              <a16:creationId xmlns:a16="http://schemas.microsoft.com/office/drawing/2014/main" id="{77FD6CD7-367C-6084-53E4-E0C069FB51BD}"/>
+            </a:ext>
+          </a:extLst>
+        </p:cNvPr>
+        <p:cNvGrpSpPr/>
+        <p:nvPr/>
+      </p:nvGrpSpPr>
+      <p:grpSpPr>
+        <a:xfrm>
+          <a:off x="0" y="0"/>
+          <a:ext cx="0" cy="0"/>
+          <a:chOff x="0" y="0"/>
+          <a:chExt cx="0" cy="0"/>
+        </a:xfrm>
+      </p:grpSpPr>
+      <p:sp>
+        <p:nvSpPr>
+          <p:cNvPr id="2" name="Slide Image Placeholder 1">
+            <a:extLst>
+              <a:ext uri="{FF2B5EF4-FFF2-40B4-BE49-F238E27FC236}">
+                <a16:creationId xmlns:a16="http://schemas.microsoft.com/office/drawing/2014/main" id="{0B772D17-BB99-E2AC-055E-B33E4FFE81EA}"/>
+              </a:ext>
+            </a:extLst>
+          </p:cNvPr>
+          <p:cNvSpPr>
+            <a:spLocks noGrp="1" noRot="1" noChangeAspect="1"/>
+          </p:cNvSpPr>
+          <p:nvPr>
+            <p:ph type="sldImg"/>
+          </p:nvPr>
+        </p:nvSpPr>
+        <p:spPr/>
+        <p:txBody>
+          <a:bodyPr/>
+          <a:lstStyle/>
+          <a:p>
+            <a:endParaRPr lang="en-US"/>
+          </a:p>
+        </p:txBody>
+      </p:sp>
+      <p:sp>
+        <p:nvSpPr>
+          <p:cNvPr id="3" name="Notes Placeholder 2">
+            <a:extLst>
+              <a:ext uri="{FF2B5EF4-FFF2-40B4-BE49-F238E27FC236}">
+                <a16:creationId xmlns:a16="http://schemas.microsoft.com/office/drawing/2014/main" id="{FA2DC3E3-1755-1FCC-75F5-AB656F2A00A5}"/>
+              </a:ext>
+            </a:extLst>
+          </p:cNvPr>
+          <p:cNvSpPr>
+            <a:spLocks noGrp="1"/>
+          </p:cNvSpPr>
+          <p:nvPr>
+            <p:ph type="body" idx="1"/>
+          </p:nvPr>
+        </p:nvSpPr>
+        <p:spPr/>
+        <p:txBody>
+          <a:bodyPr/>
+          <a:lstStyle/>
+          <a:p>
+            <a:endParaRPr lang="en-US" dirty="0"/>
+          </a:p>
+        </p:txBody>
+      </p:sp>
+      <p:sp>
+        <p:nvSpPr>
+          <p:cNvPr id="4" name="Slide Number Placeholder 3">
+            <a:extLst>
+              <a:ext uri="{FF2B5EF4-FFF2-40B4-BE49-F238E27FC236}">
+                <a16:creationId xmlns:a16="http://schemas.microsoft.com/office/drawing/2014/main" id="{88378365-C9BF-66E7-F164-AA45B5BE9E93}"/>
+              </a:ext>
+            </a:extLst>
+          </p:cNvPr>
+          <p:cNvSpPr>
+            <a:spLocks noGrp="1"/>
+          </p:cNvSpPr>
+          <p:nvPr>
+            <p:ph type="sldNum" sz="quarter" idx="5"/>
+          </p:nvPr>
+        </p:nvSpPr>
+        <p:spPr/>
+        <p:txBody>
+          <a:bodyPr/>
+          <a:lstStyle/>
+          <a:p>
+            <a:fld id="{10F892FD-D3D1-4262-97B2-43B9C3115A49}" type="slidenum">
+              <a:rPr lang="en-US" smtClean="0"/>
+              <a:t>9</a:t>
+            </a:fld>
+            <a:endParaRPr lang="en-US"/>
+          </a:p>
+        </p:txBody>
+      </p:sp>
+    </p:spTree>
+    <p:extLst>
+      <p:ext uri="{BB962C8B-B14F-4D97-AF65-F5344CB8AC3E}">
+        <p14:creationId xmlns:p14="http://schemas.microsoft.com/office/powerpoint/2010/main" val="936504692"/>
+      </p:ext>
+    </p:extLst>
+  </p:cSld>
+  <p:clrMapOvr>
+    <a:masterClrMapping/>
+  </p:clrMapOvr>
+</p:notes>
+</file>
+
+<file path=ppt/notesSlides/notesSlide5.xml><?xml version="1.0" encoding="utf-8"?>
+<p:notes xmlns:a="http://schemas.openxmlformats.org/drawingml/2006/main" xmlns:r="http://schemas.openxmlformats.org/officeDocument/2006/relationships" xmlns:p="http://schemas.openxmlformats.org/presentationml/2006/main">
+  <p:cSld>
+    <p:spTree>
+      <p:nvGrpSpPr>
+        <p:cNvPr id="1" name="">
+          <a:extLst>
+            <a:ext uri="{FF2B5EF4-FFF2-40B4-BE49-F238E27FC236}">
               <a16:creationId xmlns:a16="http://schemas.microsoft.com/office/drawing/2014/main" id="{AF606E62-A5BF-703F-2311-A41B41244DE7}"/>
             </a:ext>
           </a:extLst>
@@ -1126,7 +1125,7 @@
           <a:p>
             <a:fld id="{10F892FD-D3D1-4262-97B2-43B9C3115A49}" type="slidenum">
               <a:rPr lang="en-US" smtClean="0"/>
-              <a:t>9</a:t>
+              <a:t>10</a:t>
             </a:fld>
             <a:endParaRPr lang="en-US"/>
           </a:p>
@@ -1145,7 +1144,7 @@
 </p:notes>
 </file>
 
-<file path=ppt/notesSlides/notesSlide5.xml><?xml version="1.0" encoding="utf-8"?>
+<file path=ppt/notesSlides/notesSlide6.xml><?xml version="1.0" encoding="utf-8"?>
 <p:notes xmlns:a="http://schemas.openxmlformats.org/drawingml/2006/main" xmlns:r="http://schemas.openxmlformats.org/officeDocument/2006/relationships" xmlns:p="http://schemas.openxmlformats.org/presentationml/2006/main">
   <p:cSld>
     <p:spTree>
@@ -1241,7 +1240,7 @@
           <a:p>
             <a:fld id="{10F892FD-D3D1-4262-97B2-43B9C3115A49}" type="slidenum">
               <a:rPr lang="en-US" smtClean="0"/>
-              <a:t>10</a:t>
+              <a:t>11</a:t>
             </a:fld>
             <a:endParaRPr lang="en-US"/>
           </a:p>
@@ -1260,7 +1259,7 @@
 </p:notes>
 </file>
 
-<file path=ppt/notesSlides/notesSlide6.xml><?xml version="1.0" encoding="utf-8"?>
+<file path=ppt/notesSlides/notesSlide7.xml><?xml version="1.0" encoding="utf-8"?>
 <p:notes xmlns:a="http://schemas.openxmlformats.org/drawingml/2006/main" xmlns:r="http://schemas.openxmlformats.org/officeDocument/2006/relationships" xmlns:p="http://schemas.openxmlformats.org/presentationml/2006/main">
   <p:cSld>
     <p:spTree>
@@ -1268,7 +1267,7 @@
         <p:cNvPr id="1" name="">
           <a:extLst>
             <a:ext uri="{FF2B5EF4-FFF2-40B4-BE49-F238E27FC236}">
-              <a16:creationId xmlns:a16="http://schemas.microsoft.com/office/drawing/2014/main" id="{77FD6CD7-367C-6084-53E4-E0C069FB51BD}"/>
+              <a16:creationId xmlns:a16="http://schemas.microsoft.com/office/drawing/2014/main" id="{CF826981-6D10-800F-3009-F43DB5FE2847}"/>
             </a:ext>
           </a:extLst>
         </p:cNvPr>
@@ -1288,7 +1287,7 @@
           <p:cNvPr id="2" name="Slide Image Placeholder 1">
             <a:extLst>
               <a:ext uri="{FF2B5EF4-FFF2-40B4-BE49-F238E27FC236}">
-                <a16:creationId xmlns:a16="http://schemas.microsoft.com/office/drawing/2014/main" id="{0B772D17-BB99-E2AC-055E-B33E4FFE81EA}"/>
+                <a16:creationId xmlns:a16="http://schemas.microsoft.com/office/drawing/2014/main" id="{6E486AC6-4786-1ACC-5750-7E3321D30174}"/>
               </a:ext>
             </a:extLst>
           </p:cNvPr>
@@ -1313,7 +1312,7 @@
           <p:cNvPr id="3" name="Notes Placeholder 2">
             <a:extLst>
               <a:ext uri="{FF2B5EF4-FFF2-40B4-BE49-F238E27FC236}">
-                <a16:creationId xmlns:a16="http://schemas.microsoft.com/office/drawing/2014/main" id="{FA2DC3E3-1755-1FCC-75F5-AB656F2A00A5}"/>
+                <a16:creationId xmlns:a16="http://schemas.microsoft.com/office/drawing/2014/main" id="{AFC3E7AD-59DA-E308-516E-AA99217AD4B7}"/>
               </a:ext>
             </a:extLst>
           </p:cNvPr>
@@ -1338,7 +1337,7 @@
           <p:cNvPr id="4" name="Slide Number Placeholder 3">
             <a:extLst>
               <a:ext uri="{FF2B5EF4-FFF2-40B4-BE49-F238E27FC236}">
-                <a16:creationId xmlns:a16="http://schemas.microsoft.com/office/drawing/2014/main" id="{88378365-C9BF-66E7-F164-AA45B5BE9E93}"/>
+                <a16:creationId xmlns:a16="http://schemas.microsoft.com/office/drawing/2014/main" id="{D2EBDCAD-7ACB-CA5A-8A40-3354644DF344}"/>
               </a:ext>
             </a:extLst>
           </p:cNvPr>
@@ -1356,7 +1355,7 @@
           <a:p>
             <a:fld id="{10F892FD-D3D1-4262-97B2-43B9C3115A49}" type="slidenum">
               <a:rPr lang="en-US" smtClean="0"/>
-              <a:t>11</a:t>
+              <a:t>12</a:t>
             </a:fld>
             <a:endParaRPr lang="en-US"/>
           </a:p>
@@ -1365,7 +1364,7 @@
     </p:spTree>
     <p:extLst>
       <p:ext uri="{BB962C8B-B14F-4D97-AF65-F5344CB8AC3E}">
-        <p14:creationId xmlns:p14="http://schemas.microsoft.com/office/powerpoint/2010/main" val="936504692"/>
+        <p14:creationId xmlns:p14="http://schemas.microsoft.com/office/powerpoint/2010/main" val="1666471833"/>
       </p:ext>
     </p:extLst>
   </p:cSld>
@@ -1375,7 +1374,122 @@
 </p:notes>
 </file>
 
-<file path=ppt/notesSlides/notesSlide7.xml><?xml version="1.0" encoding="utf-8"?>
+<file path=ppt/notesSlides/notesSlide8.xml><?xml version="1.0" encoding="utf-8"?>
+<p:notes xmlns:a="http://schemas.openxmlformats.org/drawingml/2006/main" xmlns:r="http://schemas.openxmlformats.org/officeDocument/2006/relationships" xmlns:p="http://schemas.openxmlformats.org/presentationml/2006/main">
+  <p:cSld>
+    <p:spTree>
+      <p:nvGrpSpPr>
+        <p:cNvPr id="1" name="">
+          <a:extLst>
+            <a:ext uri="{FF2B5EF4-FFF2-40B4-BE49-F238E27FC236}">
+              <a16:creationId xmlns:a16="http://schemas.microsoft.com/office/drawing/2014/main" id="{1046B764-CE25-8987-F809-B14449C5FDF0}"/>
+            </a:ext>
+          </a:extLst>
+        </p:cNvPr>
+        <p:cNvGrpSpPr/>
+        <p:nvPr/>
+      </p:nvGrpSpPr>
+      <p:grpSpPr>
+        <a:xfrm>
+          <a:off x="0" y="0"/>
+          <a:ext cx="0" cy="0"/>
+          <a:chOff x="0" y="0"/>
+          <a:chExt cx="0" cy="0"/>
+        </a:xfrm>
+      </p:grpSpPr>
+      <p:sp>
+        <p:nvSpPr>
+          <p:cNvPr id="2" name="Slide Image Placeholder 1">
+            <a:extLst>
+              <a:ext uri="{FF2B5EF4-FFF2-40B4-BE49-F238E27FC236}">
+                <a16:creationId xmlns:a16="http://schemas.microsoft.com/office/drawing/2014/main" id="{B367DF2C-7765-3994-4DB4-4902531EA419}"/>
+              </a:ext>
+            </a:extLst>
+          </p:cNvPr>
+          <p:cNvSpPr>
+            <a:spLocks noGrp="1" noRot="1" noChangeAspect="1"/>
+          </p:cNvSpPr>
+          <p:nvPr>
+            <p:ph type="sldImg"/>
+          </p:nvPr>
+        </p:nvSpPr>
+        <p:spPr/>
+        <p:txBody>
+          <a:bodyPr/>
+          <a:lstStyle/>
+          <a:p>
+            <a:endParaRPr lang="en-US"/>
+          </a:p>
+        </p:txBody>
+      </p:sp>
+      <p:sp>
+        <p:nvSpPr>
+          <p:cNvPr id="3" name="Notes Placeholder 2">
+            <a:extLst>
+              <a:ext uri="{FF2B5EF4-FFF2-40B4-BE49-F238E27FC236}">
+                <a16:creationId xmlns:a16="http://schemas.microsoft.com/office/drawing/2014/main" id="{3DCEE974-FA08-3A4B-C533-61AA759DA6DD}"/>
+              </a:ext>
+            </a:extLst>
+          </p:cNvPr>
+          <p:cNvSpPr>
+            <a:spLocks noGrp="1"/>
+          </p:cNvSpPr>
+          <p:nvPr>
+            <p:ph type="body" idx="1"/>
+          </p:nvPr>
+        </p:nvSpPr>
+        <p:spPr/>
+        <p:txBody>
+          <a:bodyPr/>
+          <a:lstStyle/>
+          <a:p>
+            <a:endParaRPr lang="en-US" dirty="0"/>
+          </a:p>
+        </p:txBody>
+      </p:sp>
+      <p:sp>
+        <p:nvSpPr>
+          <p:cNvPr id="4" name="Slide Number Placeholder 3">
+            <a:extLst>
+              <a:ext uri="{FF2B5EF4-FFF2-40B4-BE49-F238E27FC236}">
+                <a16:creationId xmlns:a16="http://schemas.microsoft.com/office/drawing/2014/main" id="{6E7D9200-BA96-7A89-A425-557DEDE5875F}"/>
+              </a:ext>
+            </a:extLst>
+          </p:cNvPr>
+          <p:cNvSpPr>
+            <a:spLocks noGrp="1"/>
+          </p:cNvSpPr>
+          <p:nvPr>
+            <p:ph type="sldNum" sz="quarter" idx="5"/>
+          </p:nvPr>
+        </p:nvSpPr>
+        <p:spPr/>
+        <p:txBody>
+          <a:bodyPr/>
+          <a:lstStyle/>
+          <a:p>
+            <a:fld id="{10F892FD-D3D1-4262-97B2-43B9C3115A49}" type="slidenum">
+              <a:rPr lang="en-US" smtClean="0"/>
+              <a:t>13</a:t>
+            </a:fld>
+            <a:endParaRPr lang="en-US"/>
+          </a:p>
+        </p:txBody>
+      </p:sp>
+    </p:spTree>
+    <p:extLst>
+      <p:ext uri="{BB962C8B-B14F-4D97-AF65-F5344CB8AC3E}">
+        <p14:creationId xmlns:p14="http://schemas.microsoft.com/office/powerpoint/2010/main" val="1117952416"/>
+      </p:ext>
+    </p:extLst>
+  </p:cSld>
+  <p:clrMapOvr>
+    <a:masterClrMapping/>
+  </p:clrMapOvr>
+</p:notes>
+</file>
+
+<file path=ppt/notesSlides/notesSlide9.xml><?xml version="1.0" encoding="utf-8"?>
 <p:notes xmlns:a="http://schemas.openxmlformats.org/drawingml/2006/main" xmlns:r="http://schemas.openxmlformats.org/officeDocument/2006/relationships" xmlns:p="http://schemas.openxmlformats.org/presentationml/2006/main">
   <p:cSld>
     <p:spTree>
@@ -1471,7 +1585,7 @@
           <a:p>
             <a:fld id="{10F892FD-D3D1-4262-97B2-43B9C3115A49}" type="slidenum">
               <a:rPr lang="en-US" smtClean="0"/>
-              <a:t>12</a:t>
+              <a:t>14</a:t>
             </a:fld>
             <a:endParaRPr lang="en-US"/>
           </a:p>
@@ -1481,236 +1595,6 @@
     <p:extLst>
       <p:ext uri="{BB962C8B-B14F-4D97-AF65-F5344CB8AC3E}">
         <p14:creationId xmlns:p14="http://schemas.microsoft.com/office/powerpoint/2010/main" val="3116601912"/>
-      </p:ext>
-    </p:extLst>
-  </p:cSld>
-  <p:clrMapOvr>
-    <a:masterClrMapping/>
-  </p:clrMapOvr>
-</p:notes>
-</file>
-
-<file path=ppt/notesSlides/notesSlide8.xml><?xml version="1.0" encoding="utf-8"?>
-<p:notes xmlns:a="http://schemas.openxmlformats.org/drawingml/2006/main" xmlns:r="http://schemas.openxmlformats.org/officeDocument/2006/relationships" xmlns:p="http://schemas.openxmlformats.org/presentationml/2006/main">
-  <p:cSld>
-    <p:spTree>
-      <p:nvGrpSpPr>
-        <p:cNvPr id="1" name="">
-          <a:extLst>
-            <a:ext uri="{FF2B5EF4-FFF2-40B4-BE49-F238E27FC236}">
-              <a16:creationId xmlns:a16="http://schemas.microsoft.com/office/drawing/2014/main" id="{D0BE1C44-51BC-4938-862C-9DA53363573B}"/>
-            </a:ext>
-          </a:extLst>
-        </p:cNvPr>
-        <p:cNvGrpSpPr/>
-        <p:nvPr/>
-      </p:nvGrpSpPr>
-      <p:grpSpPr>
-        <a:xfrm>
-          <a:off x="0" y="0"/>
-          <a:ext cx="0" cy="0"/>
-          <a:chOff x="0" y="0"/>
-          <a:chExt cx="0" cy="0"/>
-        </a:xfrm>
-      </p:grpSpPr>
-      <p:sp>
-        <p:nvSpPr>
-          <p:cNvPr id="2" name="Slide Image Placeholder 1">
-            <a:extLst>
-              <a:ext uri="{FF2B5EF4-FFF2-40B4-BE49-F238E27FC236}">
-                <a16:creationId xmlns:a16="http://schemas.microsoft.com/office/drawing/2014/main" id="{1915CEE8-50F4-001D-E03C-EE37B5E021DF}"/>
-              </a:ext>
-            </a:extLst>
-          </p:cNvPr>
-          <p:cNvSpPr>
-            <a:spLocks noGrp="1" noRot="1" noChangeAspect="1"/>
-          </p:cNvSpPr>
-          <p:nvPr>
-            <p:ph type="sldImg"/>
-          </p:nvPr>
-        </p:nvSpPr>
-        <p:spPr/>
-        <p:txBody>
-          <a:bodyPr/>
-          <a:lstStyle/>
-          <a:p>
-            <a:endParaRPr lang="en-US"/>
-          </a:p>
-        </p:txBody>
-      </p:sp>
-      <p:sp>
-        <p:nvSpPr>
-          <p:cNvPr id="3" name="Notes Placeholder 2">
-            <a:extLst>
-              <a:ext uri="{FF2B5EF4-FFF2-40B4-BE49-F238E27FC236}">
-                <a16:creationId xmlns:a16="http://schemas.microsoft.com/office/drawing/2014/main" id="{BE049217-8E96-2467-51AC-55A6827601D1}"/>
-              </a:ext>
-            </a:extLst>
-          </p:cNvPr>
-          <p:cNvSpPr>
-            <a:spLocks noGrp="1"/>
-          </p:cNvSpPr>
-          <p:nvPr>
-            <p:ph type="body" idx="1"/>
-          </p:nvPr>
-        </p:nvSpPr>
-        <p:spPr/>
-        <p:txBody>
-          <a:bodyPr/>
-          <a:lstStyle/>
-          <a:p>
-            <a:endParaRPr lang="en-US" dirty="0"/>
-          </a:p>
-        </p:txBody>
-      </p:sp>
-      <p:sp>
-        <p:nvSpPr>
-          <p:cNvPr id="4" name="Slide Number Placeholder 3">
-            <a:extLst>
-              <a:ext uri="{FF2B5EF4-FFF2-40B4-BE49-F238E27FC236}">
-                <a16:creationId xmlns:a16="http://schemas.microsoft.com/office/drawing/2014/main" id="{7262B210-203E-65E0-6C6C-F7BA2D364CC2}"/>
-              </a:ext>
-            </a:extLst>
-          </p:cNvPr>
-          <p:cNvSpPr>
-            <a:spLocks noGrp="1"/>
-          </p:cNvSpPr>
-          <p:nvPr>
-            <p:ph type="sldNum" sz="quarter" idx="5"/>
-          </p:nvPr>
-        </p:nvSpPr>
-        <p:spPr/>
-        <p:txBody>
-          <a:bodyPr/>
-          <a:lstStyle/>
-          <a:p>
-            <a:fld id="{10F892FD-D3D1-4262-97B2-43B9C3115A49}" type="slidenum">
-              <a:rPr lang="en-US" smtClean="0"/>
-              <a:t>13</a:t>
-            </a:fld>
-            <a:endParaRPr lang="en-US"/>
-          </a:p>
-        </p:txBody>
-      </p:sp>
-    </p:spTree>
-    <p:extLst>
-      <p:ext uri="{BB962C8B-B14F-4D97-AF65-F5344CB8AC3E}">
-        <p14:creationId xmlns:p14="http://schemas.microsoft.com/office/powerpoint/2010/main" val="3516815043"/>
-      </p:ext>
-    </p:extLst>
-  </p:cSld>
-  <p:clrMapOvr>
-    <a:masterClrMapping/>
-  </p:clrMapOvr>
-</p:notes>
-</file>
-
-<file path=ppt/notesSlides/notesSlide9.xml><?xml version="1.0" encoding="utf-8"?>
-<p:notes xmlns:a="http://schemas.openxmlformats.org/drawingml/2006/main" xmlns:r="http://schemas.openxmlformats.org/officeDocument/2006/relationships" xmlns:p="http://schemas.openxmlformats.org/presentationml/2006/main">
-  <p:cSld>
-    <p:spTree>
-      <p:nvGrpSpPr>
-        <p:cNvPr id="1" name="">
-          <a:extLst>
-            <a:ext uri="{FF2B5EF4-FFF2-40B4-BE49-F238E27FC236}">
-              <a16:creationId xmlns:a16="http://schemas.microsoft.com/office/drawing/2014/main" id="{C3798122-2CD8-2818-8E67-674354D40781}"/>
-            </a:ext>
-          </a:extLst>
-        </p:cNvPr>
-        <p:cNvGrpSpPr/>
-        <p:nvPr/>
-      </p:nvGrpSpPr>
-      <p:grpSpPr>
-        <a:xfrm>
-          <a:off x="0" y="0"/>
-          <a:ext cx="0" cy="0"/>
-          <a:chOff x="0" y="0"/>
-          <a:chExt cx="0" cy="0"/>
-        </a:xfrm>
-      </p:grpSpPr>
-      <p:sp>
-        <p:nvSpPr>
-          <p:cNvPr id="2" name="Slide Image Placeholder 1">
-            <a:extLst>
-              <a:ext uri="{FF2B5EF4-FFF2-40B4-BE49-F238E27FC236}">
-                <a16:creationId xmlns:a16="http://schemas.microsoft.com/office/drawing/2014/main" id="{B894899E-0CC9-68C1-EA75-9112C73E8A61}"/>
-              </a:ext>
-            </a:extLst>
-          </p:cNvPr>
-          <p:cNvSpPr>
-            <a:spLocks noGrp="1" noRot="1" noChangeAspect="1"/>
-          </p:cNvSpPr>
-          <p:nvPr>
-            <p:ph type="sldImg"/>
-          </p:nvPr>
-        </p:nvSpPr>
-        <p:spPr/>
-        <p:txBody>
-          <a:bodyPr/>
-          <a:lstStyle/>
-          <a:p>
-            <a:endParaRPr lang="en-US"/>
-          </a:p>
-        </p:txBody>
-      </p:sp>
-      <p:sp>
-        <p:nvSpPr>
-          <p:cNvPr id="3" name="Notes Placeholder 2">
-            <a:extLst>
-              <a:ext uri="{FF2B5EF4-FFF2-40B4-BE49-F238E27FC236}">
-                <a16:creationId xmlns:a16="http://schemas.microsoft.com/office/drawing/2014/main" id="{5016607D-0E62-91AD-4A98-045DCC4FF123}"/>
-              </a:ext>
-            </a:extLst>
-          </p:cNvPr>
-          <p:cNvSpPr>
-            <a:spLocks noGrp="1"/>
-          </p:cNvSpPr>
-          <p:nvPr>
-            <p:ph type="body" idx="1"/>
-          </p:nvPr>
-        </p:nvSpPr>
-        <p:spPr/>
-        <p:txBody>
-          <a:bodyPr/>
-          <a:lstStyle/>
-          <a:p>
-            <a:endParaRPr lang="en-US" dirty="0"/>
-          </a:p>
-        </p:txBody>
-      </p:sp>
-      <p:sp>
-        <p:nvSpPr>
-          <p:cNvPr id="4" name="Slide Number Placeholder 3">
-            <a:extLst>
-              <a:ext uri="{FF2B5EF4-FFF2-40B4-BE49-F238E27FC236}">
-                <a16:creationId xmlns:a16="http://schemas.microsoft.com/office/drawing/2014/main" id="{584B5270-3BBF-16FE-7140-749358325E16}"/>
-              </a:ext>
-            </a:extLst>
-          </p:cNvPr>
-          <p:cNvSpPr>
-            <a:spLocks noGrp="1"/>
-          </p:cNvSpPr>
-          <p:nvPr>
-            <p:ph type="sldNum" sz="quarter" idx="5"/>
-          </p:nvPr>
-        </p:nvSpPr>
-        <p:spPr/>
-        <p:txBody>
-          <a:bodyPr/>
-          <a:lstStyle/>
-          <a:p>
-            <a:fld id="{10F892FD-D3D1-4262-97B2-43B9C3115A49}" type="slidenum">
-              <a:rPr lang="en-US" smtClean="0"/>
-              <a:t>14</a:t>
-            </a:fld>
-            <a:endParaRPr lang="en-US"/>
-          </a:p>
-        </p:txBody>
-      </p:sp>
-    </p:spTree>
-    <p:extLst>
-      <p:ext uri="{BB962C8B-B14F-4D97-AF65-F5344CB8AC3E}">
-        <p14:creationId xmlns:p14="http://schemas.microsoft.com/office/powerpoint/2010/main" val="844232919"/>
       </p:ext>
     </p:extLst>
   </p:cSld>
@@ -1851,7 +1735,7 @@
           <a:p>
             <a:fld id="{024F79D3-17D5-46B1-9DE8-D2B97F7F667D}" type="datetimeFigureOut">
               <a:rPr lang="en-US" smtClean="0"/>
-              <a:t>3/23/2026</a:t>
+              <a:t>3/29/2026</a:t>
             </a:fld>
             <a:endParaRPr lang="en-US"/>
           </a:p>
@@ -2021,7 +1905,7 @@
           <a:p>
             <a:fld id="{024F79D3-17D5-46B1-9DE8-D2B97F7F667D}" type="datetimeFigureOut">
               <a:rPr lang="en-US" smtClean="0"/>
-              <a:t>3/23/2026</a:t>
+              <a:t>3/29/2026</a:t>
             </a:fld>
             <a:endParaRPr lang="en-US"/>
           </a:p>
@@ -2201,7 +2085,7 @@
           <a:p>
             <a:fld id="{024F79D3-17D5-46B1-9DE8-D2B97F7F667D}" type="datetimeFigureOut">
               <a:rPr lang="en-US" smtClean="0"/>
-              <a:t>3/23/2026</a:t>
+              <a:t>3/29/2026</a:t>
             </a:fld>
             <a:endParaRPr lang="en-US"/>
           </a:p>
@@ -2371,7 +2255,7 @@
           <a:p>
             <a:fld id="{024F79D3-17D5-46B1-9DE8-D2B97F7F667D}" type="datetimeFigureOut">
               <a:rPr lang="en-US" smtClean="0"/>
-              <a:t>3/23/2026</a:t>
+              <a:t>3/29/2026</a:t>
             </a:fld>
             <a:endParaRPr lang="en-US"/>
           </a:p>
@@ -2617,7 +2501,7 @@
           <a:p>
             <a:fld id="{024F79D3-17D5-46B1-9DE8-D2B97F7F667D}" type="datetimeFigureOut">
               <a:rPr lang="en-US" smtClean="0"/>
-              <a:t>3/23/2026</a:t>
+              <a:t>3/29/2026</a:t>
             </a:fld>
             <a:endParaRPr lang="en-US"/>
           </a:p>
@@ -2849,7 +2733,7 @@
           <a:p>
             <a:fld id="{024F79D3-17D5-46B1-9DE8-D2B97F7F667D}" type="datetimeFigureOut">
               <a:rPr lang="en-US" smtClean="0"/>
-              <a:t>3/23/2026</a:t>
+              <a:t>3/29/2026</a:t>
             </a:fld>
             <a:endParaRPr lang="en-US"/>
           </a:p>
@@ -3216,7 +3100,7 @@
           <a:p>
             <a:fld id="{024F79D3-17D5-46B1-9DE8-D2B97F7F667D}" type="datetimeFigureOut">
               <a:rPr lang="en-US" smtClean="0"/>
-              <a:t>3/23/2026</a:t>
+              <a:t>3/29/2026</a:t>
             </a:fld>
             <a:endParaRPr lang="en-US"/>
           </a:p>
@@ -3334,7 +3218,7 @@
           <a:p>
             <a:fld id="{024F79D3-17D5-46B1-9DE8-D2B97F7F667D}" type="datetimeFigureOut">
               <a:rPr lang="en-US" smtClean="0"/>
-              <a:t>3/23/2026</a:t>
+              <a:t>3/29/2026</a:t>
             </a:fld>
             <a:endParaRPr lang="en-US"/>
           </a:p>
@@ -3429,7 +3313,7 @@
           <a:p>
             <a:fld id="{024F79D3-17D5-46B1-9DE8-D2B97F7F667D}" type="datetimeFigureOut">
               <a:rPr lang="en-US" smtClean="0"/>
-              <a:t>3/23/2026</a:t>
+              <a:t>3/29/2026</a:t>
             </a:fld>
             <a:endParaRPr lang="en-US"/>
           </a:p>
@@ -3706,7 +3590,7 @@
           <a:p>
             <a:fld id="{024F79D3-17D5-46B1-9DE8-D2B97F7F667D}" type="datetimeFigureOut">
               <a:rPr lang="en-US" smtClean="0"/>
-              <a:t>3/23/2026</a:t>
+              <a:t>3/29/2026</a:t>
             </a:fld>
             <a:endParaRPr lang="en-US"/>
           </a:p>
@@ -3963,7 +3847,7 @@
           <a:p>
             <a:fld id="{024F79D3-17D5-46B1-9DE8-D2B97F7F667D}" type="datetimeFigureOut">
               <a:rPr lang="en-US" smtClean="0"/>
-              <a:t>3/23/2026</a:t>
+              <a:t>3/29/2026</a:t>
             </a:fld>
             <a:endParaRPr lang="en-US"/>
           </a:p>
@@ -4176,7 +4060,7 @@
           <a:p>
             <a:fld id="{024F79D3-17D5-46B1-9DE8-D2B97F7F667D}" type="datetimeFigureOut">
               <a:rPr lang="en-US" smtClean="0"/>
-              <a:t>3/23/2026</a:t>
+              <a:t>3/29/2026</a:t>
             </a:fld>
             <a:endParaRPr lang="en-US"/>
           </a:p>
@@ -4895,6 +4779,7 @@
       <p:sp>
         <p:nvSpPr>
           <p:cNvPr id="13" name="Rectangle 12">
+            <a:hlinkClick r:id="rId5" action="ppaction://hlinksldjump"/>
             <a:extLst>
               <a:ext uri="{FF2B5EF4-FFF2-40B4-BE49-F238E27FC236}">
                 <a16:creationId xmlns:a16="http://schemas.microsoft.com/office/drawing/2014/main" id="{F5DDE1A3-EF08-2011-D637-6A73CD3DD29F}"/>
@@ -5028,7 +4913,7 @@
       <p:sp>
         <p:nvSpPr>
           <p:cNvPr id="16" name="Rectangle 15">
-            <a:hlinkClick r:id="rId5" action="ppaction://hlinksldjump"/>
+            <a:hlinkClick r:id="rId6" action="ppaction://hlinksldjump"/>
             <a:extLst>
               <a:ext uri="{FF2B5EF4-FFF2-40B4-BE49-F238E27FC236}">
                 <a16:creationId xmlns:a16="http://schemas.microsoft.com/office/drawing/2014/main" id="{10047B47-B4A6-8183-F477-B7230AD88706}"/>
@@ -5162,6 +5047,7 @@
       <p:sp>
         <p:nvSpPr>
           <p:cNvPr id="26" name="Rectangle 25">
+            <a:hlinkClick r:id="rId7" action="ppaction://hlinksldjump"/>
             <a:extLst>
               <a:ext uri="{FF2B5EF4-FFF2-40B4-BE49-F238E27FC236}">
                 <a16:creationId xmlns:a16="http://schemas.microsoft.com/office/drawing/2014/main" id="{D4E98B86-1AF8-7B20-305E-BA04B1CC31EE}"/>
@@ -8917,13 +8803,13 @@
   <p:clrMapOvr>
     <a:masterClrMapping/>
   </p:clrMapOvr>
-  <mc:AlternateContent xmlns:mc="http://schemas.openxmlformats.org/markup-compatibility/2006">
-    <mc:Choice xmlns:p159="http://schemas.microsoft.com/office/powerpoint/2015/09/main" Requires="p159">
+  <mc:AlternateContent xmlns:mc="http://schemas.openxmlformats.org/markup-compatibility/2006" xmlns:p159="http://schemas.microsoft.com/office/powerpoint/2015/09/main">
+    <mc:Choice Requires="p159">
       <p:transition spd="slow">
         <p159:morph option="byObject"/>
       </p:transition>
     </mc:Choice>
-    <mc:Fallback>
+    <mc:Fallback xmlns="">
       <p:transition spd="slow">
         <p:fade/>
       </p:transition>
@@ -8933,6 +8819,433 @@
 </file>
 
 <file path=ppt/slides/slide10.xml><?xml version="1.0" encoding="utf-8"?>
+<p:sld xmlns:a="http://schemas.openxmlformats.org/drawingml/2006/main" xmlns:r="http://schemas.openxmlformats.org/officeDocument/2006/relationships" xmlns:p="http://schemas.openxmlformats.org/presentationml/2006/main">
+  <p:cSld>
+    <p:spTree>
+      <p:nvGrpSpPr>
+        <p:cNvPr id="1" name="">
+          <a:extLst>
+            <a:ext uri="{FF2B5EF4-FFF2-40B4-BE49-F238E27FC236}">
+              <a16:creationId xmlns:a16="http://schemas.microsoft.com/office/drawing/2014/main" id="{1D29938C-1769-F57A-2575-ECFF0111FBF1}"/>
+            </a:ext>
+          </a:extLst>
+        </p:cNvPr>
+        <p:cNvGrpSpPr/>
+        <p:nvPr/>
+      </p:nvGrpSpPr>
+      <p:grpSpPr>
+        <a:xfrm>
+          <a:off x="0" y="0"/>
+          <a:ext cx="0" cy="0"/>
+          <a:chOff x="0" y="0"/>
+          <a:chExt cx="0" cy="0"/>
+        </a:xfrm>
+      </p:grpSpPr>
+      <p:sp>
+        <p:nvSpPr>
+          <p:cNvPr id="2" name="Title 1">
+            <a:extLst>
+              <a:ext uri="{FF2B5EF4-FFF2-40B4-BE49-F238E27FC236}">
+                <a16:creationId xmlns:a16="http://schemas.microsoft.com/office/drawing/2014/main" id="{79A152A7-384C-1C86-71F3-92F2EF0342B0}"/>
+              </a:ext>
+            </a:extLst>
+          </p:cNvPr>
+          <p:cNvSpPr txBox="1">
+            <a:spLocks/>
+          </p:cNvSpPr>
+          <p:nvPr/>
+        </p:nvSpPr>
+        <p:spPr>
+          <a:xfrm>
+            <a:off x="4637461" y="246049"/>
+            <a:ext cx="2917078" cy="371219"/>
+          </a:xfrm>
+          <a:prstGeom prst="rect">
+            <a:avLst/>
+          </a:prstGeom>
+        </p:spPr>
+        <p:txBody>
+          <a:bodyPr vert="horz" lIns="91440" tIns="45720" rIns="91440" bIns="45720" rtlCol="0" anchor="b">
+            <a:normAutofit fontScale="75000" lnSpcReduction="20000"/>
+          </a:bodyPr>
+          <a:lstStyle>
+            <a:lvl1pPr algn="ctr" defTabSz="914400" rtl="0" eaLnBrk="1" latinLnBrk="0" hangingPunct="1">
+              <a:lnSpc>
+                <a:spcPct val="90000"/>
+              </a:lnSpc>
+              <a:spcBef>
+                <a:spcPct val="0"/>
+              </a:spcBef>
+              <a:buNone/>
+              <a:defRPr sz="6000" kern="1200">
+                <a:solidFill>
+                  <a:schemeClr val="tx1"/>
+                </a:solidFill>
+                <a:latin typeface="+mj-lt"/>
+                <a:ea typeface="+mj-ea"/>
+                <a:cs typeface="+mj-cs"/>
+              </a:defRPr>
+            </a:lvl1pPr>
+          </a:lstStyle>
+          <a:p>
+            <a:r>
+              <a:rPr lang="en-US" sz="3200" dirty="0"/>
+              <a:t>Modulation</a:t>
+            </a:r>
+          </a:p>
+        </p:txBody>
+      </p:sp>
+      <p:sp>
+        <p:nvSpPr>
+          <p:cNvPr id="3" name="Rectangle 2">
+            <a:hlinkClick r:id="rId3" action="ppaction://hlinksldjump"/>
+            <a:extLst>
+              <a:ext uri="{FF2B5EF4-FFF2-40B4-BE49-F238E27FC236}">
+                <a16:creationId xmlns:a16="http://schemas.microsoft.com/office/drawing/2014/main" id="{58C432C4-71B5-111F-58F0-E474CC3302D5}"/>
+              </a:ext>
+            </a:extLst>
+          </p:cNvPr>
+          <p:cNvSpPr/>
+          <p:nvPr/>
+        </p:nvSpPr>
+        <p:spPr>
+          <a:xfrm>
+            <a:off x="2208032" y="1935678"/>
+            <a:ext cx="1760288" cy="1764860"/>
+          </a:xfrm>
+          <a:prstGeom prst="rect">
+            <a:avLst/>
+          </a:prstGeom>
+          <a:noFill/>
+          <a:ln w="38100">
+            <a:solidFill>
+              <a:schemeClr val="tx1"/>
+            </a:solidFill>
+          </a:ln>
+        </p:spPr>
+        <p:style>
+          <a:lnRef idx="2">
+            <a:schemeClr val="accent1">
+              <a:shade val="15000"/>
+            </a:schemeClr>
+          </a:lnRef>
+          <a:fillRef idx="1">
+            <a:schemeClr val="accent1"/>
+          </a:fillRef>
+          <a:effectRef idx="0">
+            <a:schemeClr val="accent1"/>
+          </a:effectRef>
+          <a:fontRef idx="minor">
+            <a:schemeClr val="lt1"/>
+          </a:fontRef>
+        </p:style>
+        <p:txBody>
+          <a:bodyPr rtlCol="0" anchor="ctr"/>
+          <a:lstStyle/>
+          <a:p>
+            <a:pPr algn="ctr"/>
+            <a:endParaRPr lang="en-US"/>
+          </a:p>
+        </p:txBody>
+      </p:sp>
+      <p:sp>
+        <p:nvSpPr>
+          <p:cNvPr id="5" name="TextBox 4">
+            <a:extLst>
+              <a:ext uri="{FF2B5EF4-FFF2-40B4-BE49-F238E27FC236}">
+                <a16:creationId xmlns:a16="http://schemas.microsoft.com/office/drawing/2014/main" id="{9A3904CC-B386-6306-35C8-C6AE2AEC2007}"/>
+              </a:ext>
+            </a:extLst>
+          </p:cNvPr>
+          <p:cNvSpPr txBox="1"/>
+          <p:nvPr/>
+        </p:nvSpPr>
+        <p:spPr>
+          <a:xfrm>
+            <a:off x="2208032" y="2587275"/>
+            <a:ext cx="1760289" cy="461665"/>
+          </a:xfrm>
+          <a:prstGeom prst="rect">
+            <a:avLst/>
+          </a:prstGeom>
+          <a:noFill/>
+        </p:spPr>
+        <p:txBody>
+          <a:bodyPr wrap="square" rtlCol="0">
+            <a:spAutoFit/>
+          </a:bodyPr>
+          <a:lstStyle/>
+          <a:p>
+            <a:pPr algn="ctr"/>
+            <a:r>
+              <a:rPr lang="en-US" sz="2400" dirty="0"/>
+              <a:t>BPSK</a:t>
+            </a:r>
+            <a:endParaRPr lang="en-US" dirty="0"/>
+          </a:p>
+        </p:txBody>
+      </p:sp>
+      <p:sp>
+        <p:nvSpPr>
+          <p:cNvPr id="6" name="Rectangle 5">
+            <a:hlinkClick r:id="rId4" action="ppaction://hlinksldjump"/>
+            <a:extLst>
+              <a:ext uri="{FF2B5EF4-FFF2-40B4-BE49-F238E27FC236}">
+                <a16:creationId xmlns:a16="http://schemas.microsoft.com/office/drawing/2014/main" id="{8DA3DEFC-C7F2-2465-95CB-843F0EBABF52}"/>
+              </a:ext>
+            </a:extLst>
+          </p:cNvPr>
+          <p:cNvSpPr/>
+          <p:nvPr/>
+        </p:nvSpPr>
+        <p:spPr>
+          <a:xfrm>
+            <a:off x="8081175" y="1947602"/>
+            <a:ext cx="1760288" cy="1764860"/>
+          </a:xfrm>
+          <a:prstGeom prst="rect">
+            <a:avLst/>
+          </a:prstGeom>
+          <a:noFill/>
+          <a:ln w="38100">
+            <a:solidFill>
+              <a:schemeClr val="tx1"/>
+            </a:solidFill>
+          </a:ln>
+        </p:spPr>
+        <p:style>
+          <a:lnRef idx="2">
+            <a:schemeClr val="accent1">
+              <a:shade val="15000"/>
+            </a:schemeClr>
+          </a:lnRef>
+          <a:fillRef idx="1">
+            <a:schemeClr val="accent1"/>
+          </a:fillRef>
+          <a:effectRef idx="0">
+            <a:schemeClr val="accent1"/>
+          </a:effectRef>
+          <a:fontRef idx="minor">
+            <a:schemeClr val="lt1"/>
+          </a:fontRef>
+        </p:style>
+        <p:txBody>
+          <a:bodyPr rtlCol="0" anchor="ctr"/>
+          <a:lstStyle/>
+          <a:p>
+            <a:pPr algn="ctr"/>
+            <a:endParaRPr lang="en-US"/>
+          </a:p>
+        </p:txBody>
+      </p:sp>
+      <p:sp>
+        <p:nvSpPr>
+          <p:cNvPr id="7" name="TextBox 6">
+            <a:extLst>
+              <a:ext uri="{FF2B5EF4-FFF2-40B4-BE49-F238E27FC236}">
+                <a16:creationId xmlns:a16="http://schemas.microsoft.com/office/drawing/2014/main" id="{328EE5AA-E4AB-27C8-8354-644C04B62972}"/>
+              </a:ext>
+            </a:extLst>
+          </p:cNvPr>
+          <p:cNvSpPr txBox="1"/>
+          <p:nvPr/>
+        </p:nvSpPr>
+        <p:spPr>
+          <a:xfrm>
+            <a:off x="8081175" y="2599199"/>
+            <a:ext cx="1760289" cy="461665"/>
+          </a:xfrm>
+          <a:prstGeom prst="rect">
+            <a:avLst/>
+          </a:prstGeom>
+          <a:noFill/>
+        </p:spPr>
+        <p:txBody>
+          <a:bodyPr wrap="square" rtlCol="0">
+            <a:spAutoFit/>
+          </a:bodyPr>
+          <a:lstStyle/>
+          <a:p>
+            <a:pPr algn="ctr"/>
+            <a:r>
+              <a:rPr lang="en-US" sz="2400" dirty="0"/>
+              <a:t>8-PSK</a:t>
+            </a:r>
+            <a:endParaRPr lang="en-US" dirty="0"/>
+          </a:p>
+        </p:txBody>
+      </p:sp>
+      <p:cxnSp>
+        <p:nvCxnSpPr>
+          <p:cNvPr id="9" name="Straight Connector 8">
+            <a:extLst>
+              <a:ext uri="{FF2B5EF4-FFF2-40B4-BE49-F238E27FC236}">
+                <a16:creationId xmlns:a16="http://schemas.microsoft.com/office/drawing/2014/main" id="{2787B9EA-858B-0296-B215-01AC94DECCF1}"/>
+              </a:ext>
+            </a:extLst>
+          </p:cNvPr>
+          <p:cNvCxnSpPr>
+            <a:cxnSpLocks/>
+          </p:cNvCxnSpPr>
+          <p:nvPr/>
+        </p:nvCxnSpPr>
+        <p:spPr>
+          <a:xfrm>
+            <a:off x="6096000" y="1686296"/>
+            <a:ext cx="0" cy="3289465"/>
+          </a:xfrm>
+          <a:prstGeom prst="line">
+            <a:avLst/>
+          </a:prstGeom>
+          <a:ln>
+            <a:solidFill>
+              <a:schemeClr val="tx1"/>
+            </a:solidFill>
+          </a:ln>
+        </p:spPr>
+        <p:style>
+          <a:lnRef idx="2">
+            <a:schemeClr val="accent1"/>
+          </a:lnRef>
+          <a:fillRef idx="0">
+            <a:schemeClr val="accent1"/>
+          </a:fillRef>
+          <a:effectRef idx="1">
+            <a:schemeClr val="accent1"/>
+          </a:effectRef>
+          <a:fontRef idx="minor">
+            <a:schemeClr val="tx1"/>
+          </a:fontRef>
+        </p:style>
+      </p:cxnSp>
+      <p:sp>
+        <p:nvSpPr>
+          <p:cNvPr id="12" name="TextBox 11">
+            <a:extLst>
+              <a:ext uri="{FF2B5EF4-FFF2-40B4-BE49-F238E27FC236}">
+                <a16:creationId xmlns:a16="http://schemas.microsoft.com/office/drawing/2014/main" id="{F6771E52-258E-1DFE-F3EF-F5D59BEFEC1A}"/>
+              </a:ext>
+            </a:extLst>
+          </p:cNvPr>
+          <p:cNvSpPr txBox="1"/>
+          <p:nvPr/>
+        </p:nvSpPr>
+        <p:spPr>
+          <a:xfrm>
+            <a:off x="1905601" y="4352135"/>
+            <a:ext cx="2365150" cy="1200329"/>
+          </a:xfrm>
+          <a:prstGeom prst="rect">
+            <a:avLst/>
+          </a:prstGeom>
+          <a:noFill/>
+        </p:spPr>
+        <p:txBody>
+          <a:bodyPr wrap="square" rtlCol="0">
+            <a:spAutoFit/>
+          </a:bodyPr>
+          <a:lstStyle/>
+          <a:p>
+            <a:pPr algn="ctr"/>
+            <a:r>
+              <a:rPr lang="en-US" sz="2400" dirty="0"/>
+              <a:t>For pulse train</a:t>
+            </a:r>
+          </a:p>
+          <a:p>
+            <a:pPr algn="ctr"/>
+            <a:r>
+              <a:rPr lang="en-US" sz="2400" dirty="0"/>
+              <a:t> and </a:t>
+            </a:r>
+          </a:p>
+          <a:p>
+            <a:pPr algn="ctr"/>
+            <a:r>
+              <a:rPr lang="en-US" sz="2400" dirty="0"/>
+              <a:t>control signal </a:t>
+            </a:r>
+            <a:endParaRPr lang="en-US" dirty="0"/>
+          </a:p>
+        </p:txBody>
+      </p:sp>
+      <p:sp>
+        <p:nvSpPr>
+          <p:cNvPr id="13" name="TextBox 12">
+            <a:extLst>
+              <a:ext uri="{FF2B5EF4-FFF2-40B4-BE49-F238E27FC236}">
+                <a16:creationId xmlns:a16="http://schemas.microsoft.com/office/drawing/2014/main" id="{A2ABE84F-2C52-C6B0-51CF-977E4CE40535}"/>
+              </a:ext>
+            </a:extLst>
+          </p:cNvPr>
+          <p:cNvSpPr txBox="1"/>
+          <p:nvPr/>
+        </p:nvSpPr>
+        <p:spPr>
+          <a:xfrm>
+            <a:off x="7778744" y="4361641"/>
+            <a:ext cx="2365150" cy="1200329"/>
+          </a:xfrm>
+          <a:prstGeom prst="rect">
+            <a:avLst/>
+          </a:prstGeom>
+          <a:noFill/>
+        </p:spPr>
+        <p:txBody>
+          <a:bodyPr wrap="square" rtlCol="0">
+            <a:spAutoFit/>
+          </a:bodyPr>
+          <a:lstStyle/>
+          <a:p>
+            <a:pPr algn="ctr"/>
+            <a:r>
+              <a:rPr lang="en-US" sz="2400" dirty="0"/>
+              <a:t>For data</a:t>
+            </a:r>
+          </a:p>
+          <a:p>
+            <a:pPr algn="ctr"/>
+            <a:r>
+              <a:rPr lang="en-US" sz="2400" dirty="0"/>
+              <a:t> and </a:t>
+            </a:r>
+          </a:p>
+          <a:p>
+            <a:pPr algn="ctr"/>
+            <a:r>
+              <a:rPr lang="en-US" sz="2400" dirty="0"/>
+              <a:t>CRC </a:t>
+            </a:r>
+            <a:endParaRPr lang="en-US" dirty="0"/>
+          </a:p>
+        </p:txBody>
+      </p:sp>
+    </p:spTree>
+    <p:extLst>
+      <p:ext uri="{BB962C8B-B14F-4D97-AF65-F5344CB8AC3E}">
+        <p14:creationId xmlns:p14="http://schemas.microsoft.com/office/powerpoint/2010/main" val="5132717"/>
+      </p:ext>
+    </p:extLst>
+  </p:cSld>
+  <p:clrMapOvr>
+    <a:masterClrMapping/>
+  </p:clrMapOvr>
+  <mc:AlternateContent xmlns:mc="http://schemas.openxmlformats.org/markup-compatibility/2006" xmlns:p159="http://schemas.microsoft.com/office/powerpoint/2015/09/main">
+    <mc:Choice Requires="p159">
+      <p:transition spd="slow">
+        <p159:morph option="byObject"/>
+      </p:transition>
+    </mc:Choice>
+    <mc:Fallback xmlns="">
+      <p:transition spd="slow">
+        <p:fade/>
+      </p:transition>
+    </mc:Fallback>
+  </mc:AlternateContent>
+</p:sld>
+</file>
+
+<file path=ppt/slides/slide11.xml><?xml version="1.0" encoding="utf-8"?>
 <p:sld xmlns:a="http://schemas.openxmlformats.org/drawingml/2006/main" xmlns:r="http://schemas.openxmlformats.org/officeDocument/2006/relationships" xmlns:p="http://schemas.openxmlformats.org/presentationml/2006/main">
   <p:cSld>
     <p:spTree>
@@ -8958,7 +9271,6 @@
       <p:sp>
         <p:nvSpPr>
           <p:cNvPr id="4" name="Rectangle 3">
-            <a:hlinkClick r:id="rId3" action="ppaction://hlinksldjump"/>
             <a:extLst>
               <a:ext uri="{FF2B5EF4-FFF2-40B4-BE49-F238E27FC236}">
                 <a16:creationId xmlns:a16="http://schemas.microsoft.com/office/drawing/2014/main" id="{AB115D28-3120-358F-4185-7DDDF183A41B}"/>
@@ -9131,7 +9443,6 @@
       <p:sp>
         <p:nvSpPr>
           <p:cNvPr id="10" name="Rectangle 9">
-            <a:hlinkClick r:id="rId4" action="ppaction://hlinksldjump"/>
             <a:extLst>
               <a:ext uri="{FF2B5EF4-FFF2-40B4-BE49-F238E27FC236}">
                 <a16:creationId xmlns:a16="http://schemas.microsoft.com/office/drawing/2014/main" id="{599D7B24-552C-1FF6-1FE8-B9F70C8E3A19}"/>
@@ -9376,8 +9687,8 @@
         </p:nvSpPr>
         <p:spPr>
           <a:xfrm>
-            <a:off x="7432444" y="3275111"/>
-            <a:ext cx="1117721" cy="307777"/>
+            <a:off x="7432444" y="3070909"/>
+            <a:ext cx="1117721" cy="738664"/>
           </a:xfrm>
           <a:prstGeom prst="rect">
             <a:avLst/>
@@ -9393,7 +9704,14 @@
             <a:pPr algn="ctr"/>
             <a:r>
               <a:rPr lang="en-US" sz="1400" dirty="0"/>
-              <a:t>FIR filter</a:t>
+              <a:t>Pulse shaping</a:t>
+            </a:r>
+          </a:p>
+          <a:p>
+            <a:pPr algn="ctr"/>
+            <a:r>
+              <a:rPr lang="en-US" sz="1400" dirty="0"/>
+              <a:t>(FIR filter)</a:t>
             </a:r>
             <a:endParaRPr lang="en-US" dirty="0"/>
           </a:p>
@@ -9402,7 +9720,6 @@
       <p:sp>
         <p:nvSpPr>
           <p:cNvPr id="2" name="Rectangle 1">
-            <a:hlinkClick r:id="rId3" action="ppaction://hlinksldjump"/>
             <a:extLst>
               <a:ext uri="{FF2B5EF4-FFF2-40B4-BE49-F238E27FC236}">
                 <a16:creationId xmlns:a16="http://schemas.microsoft.com/office/drawing/2014/main" id="{1BFC5040-C61F-36CA-28AF-F4035C16F0F3}"/>
@@ -9602,7 +9919,7 @@
         <p:spPr>
           <a:xfrm>
             <a:off x="3834166" y="2868688"/>
-            <a:ext cx="793411" cy="1169551"/>
+            <a:ext cx="408259" cy="1169551"/>
           </a:xfrm>
           <a:prstGeom prst="rect">
             <a:avLst/>
@@ -9618,7 +9935,7 @@
             <a:pPr algn="ctr"/>
             <a:r>
               <a:rPr lang="en-US" sz="1400" dirty="0"/>
-              <a:t>16384</a:t>
+              <a:t>1</a:t>
             </a:r>
           </a:p>
           <a:p>
@@ -9637,7 +9954,7 @@
             <a:pPr algn="ctr"/>
             <a:r>
               <a:rPr lang="en-US" sz="1400" dirty="0"/>
-              <a:t>-16384</a:t>
+              <a:t>-1</a:t>
             </a:r>
           </a:p>
         </p:txBody>
@@ -9962,10 +10279,10 @@
       </p:cxnSp>
       <p:sp>
         <p:nvSpPr>
-          <p:cNvPr id="45" name="TextBox 44">
-            <a:extLst>
-              <a:ext uri="{FF2B5EF4-FFF2-40B4-BE49-F238E27FC236}">
-                <a16:creationId xmlns:a16="http://schemas.microsoft.com/office/drawing/2014/main" id="{676FAE83-0373-7935-95AE-89BF11F282C5}"/>
+          <p:cNvPr id="16" name="TextBox 15">
+            <a:extLst>
+              <a:ext uri="{FF2B5EF4-FFF2-40B4-BE49-F238E27FC236}">
+                <a16:creationId xmlns:a16="http://schemas.microsoft.com/office/drawing/2014/main" id="{8BB2E7BD-DD20-FE09-5209-C16460C2B6BE}"/>
               </a:ext>
             </a:extLst>
           </p:cNvPr>
@@ -9974,8 +10291,8 @@
         </p:nvSpPr>
         <p:spPr>
           <a:xfrm>
-            <a:off x="6169880" y="2866809"/>
-            <a:ext cx="1115295" cy="1107996"/>
+            <a:off x="8828439" y="3817383"/>
+            <a:ext cx="1117721" cy="307777"/>
           </a:xfrm>
           <a:prstGeom prst="rect">
             <a:avLst/>
@@ -9990,32 +10307,67 @@
           <a:p>
             <a:pPr algn="ctr"/>
             <a:r>
-              <a:rPr lang="en-US" sz="1100" dirty="0"/>
-              <a:t>16384, 0, 0, 0</a:t>
+              <a:rPr lang="en-US" sz="1400" dirty="0"/>
+              <a:t>Cos(2</a:t>
             </a:r>
-          </a:p>
-          <a:p>
-            <a:pPr algn="ctr"/>
-            <a:endParaRPr lang="en-US" sz="1100" dirty="0"/>
-          </a:p>
-          <a:p>
-            <a:pPr algn="ctr"/>
-            <a:endParaRPr lang="en-US" sz="1100" dirty="0"/>
-          </a:p>
-          <a:p>
-            <a:pPr algn="ctr"/>
-            <a:endParaRPr lang="en-US" sz="1100" dirty="0"/>
-          </a:p>
-          <a:p>
-            <a:pPr algn="ctr"/>
-            <a:endParaRPr lang="en-US" sz="1100" dirty="0"/>
-          </a:p>
+            <a:r>
+              <a:rPr lang="el-GR" sz="1400" dirty="0"/>
+              <a:t>π</a:t>
+            </a:r>
+            <a:r>
+              <a:rPr lang="en-US" sz="1400" dirty="0" err="1"/>
+              <a:t>F</a:t>
+            </a:r>
+            <a:r>
+              <a:rPr lang="en-US" sz="1400" baseline="-25000" dirty="0" err="1"/>
+              <a:t>c</a:t>
+            </a:r>
+            <a:r>
+              <a:rPr lang="en-US" sz="1400" dirty="0" err="1"/>
+              <a:t>t</a:t>
+            </a:r>
+            <a:r>
+              <a:rPr lang="en-US" sz="1400" dirty="0"/>
+              <a:t>)</a:t>
+            </a:r>
+            <a:endParaRPr lang="en-US" dirty="0"/>
+          </a:p>
+        </p:txBody>
+      </p:sp>
+      <p:sp>
+        <p:nvSpPr>
+          <p:cNvPr id="17" name="TextBox 16">
+            <a:extLst>
+              <a:ext uri="{FF2B5EF4-FFF2-40B4-BE49-F238E27FC236}">
+                <a16:creationId xmlns:a16="http://schemas.microsoft.com/office/drawing/2014/main" id="{DE29781C-D12A-E53C-BF69-28A099B39E2F}"/>
+              </a:ext>
+            </a:extLst>
+          </p:cNvPr>
+          <p:cNvSpPr txBox="1"/>
+          <p:nvPr/>
+        </p:nvSpPr>
+        <p:spPr>
+          <a:xfrm>
+            <a:off x="10457565" y="3328974"/>
+            <a:ext cx="1117721" cy="307777"/>
+          </a:xfrm>
+          <a:prstGeom prst="rect">
+            <a:avLst/>
+          </a:prstGeom>
+          <a:noFill/>
+        </p:spPr>
+        <p:txBody>
+          <a:bodyPr wrap="square" rtlCol="0">
+            <a:spAutoFit/>
+          </a:bodyPr>
+          <a:lstStyle/>
           <a:p>
             <a:pPr algn="ctr"/>
             <a:r>
-              <a:rPr lang="en-US" sz="1100" dirty="0"/>
-              <a:t>-16384, 0, 0, 0</a:t>
+              <a:rPr lang="en-US" sz="1400" dirty="0"/>
+              <a:t>S(t)</a:t>
             </a:r>
+            <a:endParaRPr lang="en-US" dirty="0"/>
           </a:p>
         </p:txBody>
       </p:sp>
@@ -10029,61 +10381,13 @@
   <p:clrMapOvr>
     <a:masterClrMapping/>
   </p:clrMapOvr>
-  <mc:AlternateContent xmlns:mc="http://schemas.openxmlformats.org/markup-compatibility/2006">
-    <mc:Choice xmlns:p159="http://schemas.microsoft.com/office/powerpoint/2015/09/main" Requires="p159">
+  <mc:AlternateContent xmlns:mc="http://schemas.openxmlformats.org/markup-compatibility/2006" xmlns:p159="http://schemas.microsoft.com/office/powerpoint/2015/09/main">
+    <mc:Choice Requires="p159">
       <p:transition spd="slow">
         <p159:morph option="byObject"/>
       </p:transition>
     </mc:Choice>
-    <mc:Fallback>
-      <p:transition spd="slow">
-        <p:fade/>
-      </p:transition>
-    </mc:Fallback>
-  </mc:AlternateContent>
-</p:sld>
-</file>
-
-<file path=ppt/slides/slide11.xml><?xml version="1.0" encoding="utf-8"?>
-<p:sld xmlns:a="http://schemas.openxmlformats.org/drawingml/2006/main" xmlns:r="http://schemas.openxmlformats.org/officeDocument/2006/relationships" xmlns:p="http://schemas.openxmlformats.org/presentationml/2006/main">
-  <p:cSld>
-    <p:spTree>
-      <p:nvGrpSpPr>
-        <p:cNvPr id="1" name="">
-          <a:extLst>
-            <a:ext uri="{FF2B5EF4-FFF2-40B4-BE49-F238E27FC236}">
-              <a16:creationId xmlns:a16="http://schemas.microsoft.com/office/drawing/2014/main" id="{5A67FFF3-96CA-EBD6-E7FD-DF68D526535F}"/>
-            </a:ext>
-          </a:extLst>
-        </p:cNvPr>
-        <p:cNvGrpSpPr/>
-        <p:nvPr/>
-      </p:nvGrpSpPr>
-      <p:grpSpPr>
-        <a:xfrm>
-          <a:off x="0" y="0"/>
-          <a:ext cx="0" cy="0"/>
-          <a:chOff x="0" y="0"/>
-          <a:chExt cx="0" cy="0"/>
-        </a:xfrm>
-      </p:grpSpPr>
-    </p:spTree>
-    <p:extLst>
-      <p:ext uri="{BB962C8B-B14F-4D97-AF65-F5344CB8AC3E}">
-        <p14:creationId xmlns:p14="http://schemas.microsoft.com/office/powerpoint/2010/main" val="3466501264"/>
-      </p:ext>
-    </p:extLst>
-  </p:cSld>
-  <p:clrMapOvr>
-    <a:masterClrMapping/>
-  </p:clrMapOvr>
-  <mc:AlternateContent xmlns:mc="http://schemas.openxmlformats.org/markup-compatibility/2006">
-    <mc:Choice xmlns:p159="http://schemas.microsoft.com/office/powerpoint/2015/09/main" Requires="p159">
-      <p:transition spd="slow">
-        <p159:morph option="byObject"/>
-      </p:transition>
-    </mc:Choice>
-    <mc:Fallback>
+    <mc:Fallback xmlns="">
       <p:transition spd="slow">
         <p:fade/>
       </p:transition>
@@ -10100,7 +10404,7 @@
         <p:cNvPr id="1" name="">
           <a:extLst>
             <a:ext uri="{FF2B5EF4-FFF2-40B4-BE49-F238E27FC236}">
-              <a16:creationId xmlns:a16="http://schemas.microsoft.com/office/drawing/2014/main" id="{8BC827D4-E54E-4F2B-5A16-F97CEDD2C349}"/>
+              <a16:creationId xmlns:a16="http://schemas.microsoft.com/office/drawing/2014/main" id="{C7A3AE86-0256-B3F0-BAD0-AA4CB122DAEF}"/>
             </a:ext>
           </a:extLst>
         </p:cNvPr>
@@ -10115,10 +10419,2190 @@
           <a:chExt cx="0" cy="0"/>
         </a:xfrm>
       </p:grpSpPr>
+      <p:sp>
+        <p:nvSpPr>
+          <p:cNvPr id="4" name="Rectangle 3">
+            <a:extLst>
+              <a:ext uri="{FF2B5EF4-FFF2-40B4-BE49-F238E27FC236}">
+                <a16:creationId xmlns:a16="http://schemas.microsoft.com/office/drawing/2014/main" id="{8D90B092-9B5A-E576-9BDF-B2E85ACDD3E8}"/>
+              </a:ext>
+            </a:extLst>
+          </p:cNvPr>
+          <p:cNvSpPr/>
+          <p:nvPr/>
+        </p:nvSpPr>
+        <p:spPr>
+          <a:xfrm>
+            <a:off x="1685974" y="2869322"/>
+            <a:ext cx="1117721" cy="1120624"/>
+          </a:xfrm>
+          <a:prstGeom prst="rect">
+            <a:avLst/>
+          </a:prstGeom>
+          <a:noFill/>
+          <a:ln w="38100">
+            <a:solidFill>
+              <a:schemeClr val="tx1"/>
+            </a:solidFill>
+          </a:ln>
+        </p:spPr>
+        <p:style>
+          <a:lnRef idx="2">
+            <a:schemeClr val="accent1">
+              <a:shade val="15000"/>
+            </a:schemeClr>
+          </a:lnRef>
+          <a:fillRef idx="1">
+            <a:schemeClr val="accent1"/>
+          </a:fillRef>
+          <a:effectRef idx="0">
+            <a:schemeClr val="accent1"/>
+          </a:effectRef>
+          <a:fontRef idx="minor">
+            <a:schemeClr val="lt1"/>
+          </a:fontRef>
+        </p:style>
+        <p:txBody>
+          <a:bodyPr rtlCol="0" anchor="ctr"/>
+          <a:lstStyle/>
+          <a:p>
+            <a:pPr algn="ctr"/>
+            <a:endParaRPr lang="en-US"/>
+          </a:p>
+        </p:txBody>
+      </p:sp>
+      <p:cxnSp>
+        <p:nvCxnSpPr>
+          <p:cNvPr id="5" name="Straight Arrow Connector 4">
+            <a:extLst>
+              <a:ext uri="{FF2B5EF4-FFF2-40B4-BE49-F238E27FC236}">
+                <a16:creationId xmlns:a16="http://schemas.microsoft.com/office/drawing/2014/main" id="{7FB31127-1A9D-0411-5B34-C5BC949CCDDA}"/>
+              </a:ext>
+            </a:extLst>
+          </p:cNvPr>
+          <p:cNvCxnSpPr>
+            <a:cxnSpLocks/>
+            <a:stCxn id="4" idx="3"/>
+            <a:endCxn id="29" idx="1"/>
+          </p:cNvCxnSpPr>
+          <p:nvPr/>
+        </p:nvCxnSpPr>
+        <p:spPr>
+          <a:xfrm flipV="1">
+            <a:off x="2803695" y="3429000"/>
+            <a:ext cx="683605" cy="634"/>
+          </a:xfrm>
+          <a:prstGeom prst="straightConnector1">
+            <a:avLst/>
+          </a:prstGeom>
+          <a:ln>
+            <a:solidFill>
+              <a:schemeClr val="tx1"/>
+            </a:solidFill>
+            <a:tailEnd type="triangle"/>
+          </a:ln>
+        </p:spPr>
+        <p:style>
+          <a:lnRef idx="2">
+            <a:schemeClr val="accent1"/>
+          </a:lnRef>
+          <a:fillRef idx="0">
+            <a:schemeClr val="accent1"/>
+          </a:fillRef>
+          <a:effectRef idx="1">
+            <a:schemeClr val="accent1"/>
+          </a:effectRef>
+          <a:fontRef idx="minor">
+            <a:schemeClr val="tx1"/>
+          </a:fontRef>
+        </p:style>
+      </p:cxnSp>
+      <p:sp>
+        <p:nvSpPr>
+          <p:cNvPr id="6" name="TextBox 5">
+            <a:extLst>
+              <a:ext uri="{FF2B5EF4-FFF2-40B4-BE49-F238E27FC236}">
+                <a16:creationId xmlns:a16="http://schemas.microsoft.com/office/drawing/2014/main" id="{C3C20EED-5E7D-0EFF-DD3F-842B2809D7C4}"/>
+              </a:ext>
+            </a:extLst>
+          </p:cNvPr>
+          <p:cNvSpPr txBox="1"/>
+          <p:nvPr/>
+        </p:nvSpPr>
+        <p:spPr>
+          <a:xfrm>
+            <a:off x="5524419" y="125030"/>
+            <a:ext cx="1112805" cy="523220"/>
+          </a:xfrm>
+          <a:prstGeom prst="rect">
+            <a:avLst/>
+          </a:prstGeom>
+          <a:noFill/>
+        </p:spPr>
+        <p:txBody>
+          <a:bodyPr wrap="none" rtlCol="0">
+            <a:spAutoFit/>
+          </a:bodyPr>
+          <a:lstStyle/>
+          <a:p>
+            <a:pPr algn="ctr"/>
+            <a:r>
+              <a:rPr lang="en-US" sz="2800" dirty="0"/>
+              <a:t>8-PSK</a:t>
+            </a:r>
+            <a:endParaRPr lang="en-US" dirty="0"/>
+          </a:p>
+        </p:txBody>
+      </p:sp>
+      <p:sp>
+        <p:nvSpPr>
+          <p:cNvPr id="9" name="TextBox 8">
+            <a:extLst>
+              <a:ext uri="{FF2B5EF4-FFF2-40B4-BE49-F238E27FC236}">
+                <a16:creationId xmlns:a16="http://schemas.microsoft.com/office/drawing/2014/main" id="{FCA3B55E-7342-0D38-3EA0-802936655E8C}"/>
+              </a:ext>
+            </a:extLst>
+          </p:cNvPr>
+          <p:cNvSpPr txBox="1"/>
+          <p:nvPr/>
+        </p:nvSpPr>
+        <p:spPr>
+          <a:xfrm>
+            <a:off x="1713760" y="3091773"/>
+            <a:ext cx="1117721" cy="738664"/>
+          </a:xfrm>
+          <a:prstGeom prst="rect">
+            <a:avLst/>
+          </a:prstGeom>
+          <a:noFill/>
+        </p:spPr>
+        <p:txBody>
+          <a:bodyPr wrap="square" rtlCol="0">
+            <a:spAutoFit/>
+          </a:bodyPr>
+          <a:lstStyle/>
+          <a:p>
+            <a:pPr algn="ctr"/>
+            <a:r>
+              <a:rPr lang="en-US" sz="1400" dirty="0"/>
+              <a:t>Serial </a:t>
+            </a:r>
+          </a:p>
+          <a:p>
+            <a:pPr algn="ctr"/>
+            <a:r>
+              <a:rPr lang="en-US" sz="1400" dirty="0"/>
+              <a:t>to </a:t>
+            </a:r>
+          </a:p>
+          <a:p>
+            <a:pPr algn="ctr"/>
+            <a:r>
+              <a:rPr lang="en-US" sz="1400" dirty="0"/>
+              <a:t>parallel</a:t>
+            </a:r>
+          </a:p>
+        </p:txBody>
+      </p:sp>
+      <p:sp>
+        <p:nvSpPr>
+          <p:cNvPr id="10" name="Rectangle 9">
+            <a:extLst>
+              <a:ext uri="{FF2B5EF4-FFF2-40B4-BE49-F238E27FC236}">
+                <a16:creationId xmlns:a16="http://schemas.microsoft.com/office/drawing/2014/main" id="{B750A180-083A-91B9-E1BE-FF0737AF430E}"/>
+              </a:ext>
+            </a:extLst>
+          </p:cNvPr>
+          <p:cNvSpPr/>
+          <p:nvPr/>
+        </p:nvSpPr>
+        <p:spPr>
+          <a:xfrm>
+            <a:off x="5524419" y="951354"/>
+            <a:ext cx="1117721" cy="1120624"/>
+          </a:xfrm>
+          <a:prstGeom prst="rect">
+            <a:avLst/>
+          </a:prstGeom>
+          <a:noFill/>
+          <a:ln w="38100">
+            <a:solidFill>
+              <a:schemeClr val="tx1"/>
+            </a:solidFill>
+          </a:ln>
+        </p:spPr>
+        <p:style>
+          <a:lnRef idx="2">
+            <a:schemeClr val="accent1">
+              <a:shade val="15000"/>
+            </a:schemeClr>
+          </a:lnRef>
+          <a:fillRef idx="1">
+            <a:schemeClr val="accent1"/>
+          </a:fillRef>
+          <a:effectRef idx="0">
+            <a:schemeClr val="accent1"/>
+          </a:effectRef>
+          <a:fontRef idx="minor">
+            <a:schemeClr val="lt1"/>
+          </a:fontRef>
+        </p:style>
+        <p:txBody>
+          <a:bodyPr rtlCol="0" anchor="ctr"/>
+          <a:lstStyle/>
+          <a:p>
+            <a:pPr algn="ctr"/>
+            <a:endParaRPr lang="en-US"/>
+          </a:p>
+        </p:txBody>
+      </p:sp>
+      <p:cxnSp>
+        <p:nvCxnSpPr>
+          <p:cNvPr id="11" name="Straight Arrow Connector 10">
+            <a:extLst>
+              <a:ext uri="{FF2B5EF4-FFF2-40B4-BE49-F238E27FC236}">
+                <a16:creationId xmlns:a16="http://schemas.microsoft.com/office/drawing/2014/main" id="{F3114FB4-4C72-1F4B-459D-01FB6FD24746}"/>
+              </a:ext>
+            </a:extLst>
+          </p:cNvPr>
+          <p:cNvCxnSpPr>
+            <a:cxnSpLocks/>
+            <a:stCxn id="10" idx="3"/>
+            <a:endCxn id="13" idx="1"/>
+          </p:cNvCxnSpPr>
+          <p:nvPr/>
+        </p:nvCxnSpPr>
+        <p:spPr>
+          <a:xfrm>
+            <a:off x="6642140" y="1511666"/>
+            <a:ext cx="806732" cy="11877"/>
+          </a:xfrm>
+          <a:prstGeom prst="straightConnector1">
+            <a:avLst/>
+          </a:prstGeom>
+          <a:ln>
+            <a:solidFill>
+              <a:schemeClr val="tx1"/>
+            </a:solidFill>
+            <a:tailEnd type="triangle"/>
+          </a:ln>
+        </p:spPr>
+        <p:style>
+          <a:lnRef idx="2">
+            <a:schemeClr val="accent1"/>
+          </a:lnRef>
+          <a:fillRef idx="0">
+            <a:schemeClr val="accent1"/>
+          </a:fillRef>
+          <a:effectRef idx="1">
+            <a:schemeClr val="accent1"/>
+          </a:effectRef>
+          <a:fontRef idx="minor">
+            <a:schemeClr val="tx1"/>
+          </a:fontRef>
+        </p:style>
+      </p:cxnSp>
+      <p:sp>
+        <p:nvSpPr>
+          <p:cNvPr id="12" name="TextBox 11">
+            <a:extLst>
+              <a:ext uri="{FF2B5EF4-FFF2-40B4-BE49-F238E27FC236}">
+                <a16:creationId xmlns:a16="http://schemas.microsoft.com/office/drawing/2014/main" id="{3CA0632B-7378-1229-F046-B6C349E6E7C1}"/>
+              </a:ext>
+            </a:extLst>
+          </p:cNvPr>
+          <p:cNvSpPr txBox="1"/>
+          <p:nvPr/>
+        </p:nvSpPr>
+        <p:spPr>
+          <a:xfrm>
+            <a:off x="5560829" y="1357777"/>
+            <a:ext cx="1044900" cy="307777"/>
+          </a:xfrm>
+          <a:prstGeom prst="rect">
+            <a:avLst/>
+          </a:prstGeom>
+          <a:noFill/>
+        </p:spPr>
+        <p:txBody>
+          <a:bodyPr wrap="square" rtlCol="0">
+            <a:spAutoFit/>
+          </a:bodyPr>
+          <a:lstStyle/>
+          <a:p>
+            <a:pPr algn="ctr"/>
+            <a:r>
+              <a:rPr lang="en-US" sz="1400" dirty="0"/>
+              <a:t>Upsampler</a:t>
+            </a:r>
+            <a:endParaRPr lang="en-US" dirty="0"/>
+          </a:p>
+        </p:txBody>
+      </p:sp>
+      <p:sp>
+        <p:nvSpPr>
+          <p:cNvPr id="13" name="Rectangle 12">
+            <a:extLst>
+              <a:ext uri="{FF2B5EF4-FFF2-40B4-BE49-F238E27FC236}">
+                <a16:creationId xmlns:a16="http://schemas.microsoft.com/office/drawing/2014/main" id="{937DCF24-8D86-4FCF-5E35-8F3EED172E6C}"/>
+              </a:ext>
+            </a:extLst>
+          </p:cNvPr>
+          <p:cNvSpPr/>
+          <p:nvPr/>
+        </p:nvSpPr>
+        <p:spPr>
+          <a:xfrm>
+            <a:off x="7448872" y="963231"/>
+            <a:ext cx="1117721" cy="1120624"/>
+          </a:xfrm>
+          <a:prstGeom prst="rect">
+            <a:avLst/>
+          </a:prstGeom>
+          <a:noFill/>
+          <a:ln w="38100">
+            <a:solidFill>
+              <a:schemeClr val="tx1"/>
+            </a:solidFill>
+          </a:ln>
+        </p:spPr>
+        <p:style>
+          <a:lnRef idx="2">
+            <a:schemeClr val="accent1">
+              <a:shade val="15000"/>
+            </a:schemeClr>
+          </a:lnRef>
+          <a:fillRef idx="1">
+            <a:schemeClr val="accent1"/>
+          </a:fillRef>
+          <a:effectRef idx="0">
+            <a:schemeClr val="accent1"/>
+          </a:effectRef>
+          <a:fontRef idx="minor">
+            <a:schemeClr val="lt1"/>
+          </a:fontRef>
+        </p:style>
+        <p:txBody>
+          <a:bodyPr rtlCol="0" anchor="ctr"/>
+          <a:lstStyle/>
+          <a:p>
+            <a:pPr algn="ctr"/>
+            <a:endParaRPr lang="en-US"/>
+          </a:p>
+        </p:txBody>
+      </p:sp>
+      <p:cxnSp>
+        <p:nvCxnSpPr>
+          <p:cNvPr id="14" name="Straight Arrow Connector 13">
+            <a:extLst>
+              <a:ext uri="{FF2B5EF4-FFF2-40B4-BE49-F238E27FC236}">
+                <a16:creationId xmlns:a16="http://schemas.microsoft.com/office/drawing/2014/main" id="{70D6BF20-0E7E-B7EF-FE80-10DA6AE9F2FC}"/>
+              </a:ext>
+            </a:extLst>
+          </p:cNvPr>
+          <p:cNvCxnSpPr>
+            <a:cxnSpLocks/>
+            <a:stCxn id="13" idx="3"/>
+            <a:endCxn id="33" idx="5"/>
+          </p:cNvCxnSpPr>
+          <p:nvPr/>
+        </p:nvCxnSpPr>
+        <p:spPr>
+          <a:xfrm>
+            <a:off x="8566593" y="1523543"/>
+            <a:ext cx="1102485" cy="14762"/>
+          </a:xfrm>
+          <a:prstGeom prst="straightConnector1">
+            <a:avLst/>
+          </a:prstGeom>
+          <a:ln>
+            <a:solidFill>
+              <a:schemeClr val="tx1"/>
+            </a:solidFill>
+            <a:tailEnd type="triangle"/>
+          </a:ln>
+        </p:spPr>
+        <p:style>
+          <a:lnRef idx="2">
+            <a:schemeClr val="accent1"/>
+          </a:lnRef>
+          <a:fillRef idx="0">
+            <a:schemeClr val="accent1"/>
+          </a:fillRef>
+          <a:effectRef idx="1">
+            <a:schemeClr val="accent1"/>
+          </a:effectRef>
+          <a:fontRef idx="minor">
+            <a:schemeClr val="tx1"/>
+          </a:fontRef>
+        </p:style>
+      </p:cxnSp>
+      <p:sp>
+        <p:nvSpPr>
+          <p:cNvPr id="15" name="TextBox 14">
+            <a:extLst>
+              <a:ext uri="{FF2B5EF4-FFF2-40B4-BE49-F238E27FC236}">
+                <a16:creationId xmlns:a16="http://schemas.microsoft.com/office/drawing/2014/main" id="{3176471B-1588-1387-4837-9DC2F6ECC4E7}"/>
+              </a:ext>
+            </a:extLst>
+          </p:cNvPr>
+          <p:cNvSpPr txBox="1"/>
+          <p:nvPr/>
+        </p:nvSpPr>
+        <p:spPr>
+          <a:xfrm>
+            <a:off x="7451293" y="1154211"/>
+            <a:ext cx="1117721" cy="738664"/>
+          </a:xfrm>
+          <a:prstGeom prst="rect">
+            <a:avLst/>
+          </a:prstGeom>
+          <a:noFill/>
+        </p:spPr>
+        <p:txBody>
+          <a:bodyPr wrap="square" rtlCol="0">
+            <a:spAutoFit/>
+          </a:bodyPr>
+          <a:lstStyle/>
+          <a:p>
+            <a:pPr algn="ctr"/>
+            <a:r>
+              <a:rPr lang="en-US" sz="1400" dirty="0"/>
+              <a:t>Pulse shaping</a:t>
+            </a:r>
+          </a:p>
+          <a:p>
+            <a:pPr algn="ctr"/>
+            <a:r>
+              <a:rPr lang="en-US" sz="1400" dirty="0"/>
+              <a:t>(FIR filter)</a:t>
+            </a:r>
+          </a:p>
+        </p:txBody>
+      </p:sp>
+      <p:sp>
+        <p:nvSpPr>
+          <p:cNvPr id="2" name="Rectangle 1">
+            <a:hlinkClick r:id="rId3" action="ppaction://hlinksldjump"/>
+            <a:extLst>
+              <a:ext uri="{FF2B5EF4-FFF2-40B4-BE49-F238E27FC236}">
+                <a16:creationId xmlns:a16="http://schemas.microsoft.com/office/drawing/2014/main" id="{8C8BE876-E0E7-37DC-24D1-930C3BCCE6C2}"/>
+              </a:ext>
+            </a:extLst>
+          </p:cNvPr>
+          <p:cNvSpPr/>
+          <p:nvPr/>
+        </p:nvSpPr>
+        <p:spPr>
+          <a:xfrm>
+            <a:off x="189203" y="2868688"/>
+            <a:ext cx="1117721" cy="1120624"/>
+          </a:xfrm>
+          <a:prstGeom prst="rect">
+            <a:avLst/>
+          </a:prstGeom>
+          <a:noFill/>
+          <a:ln w="38100">
+            <a:solidFill>
+              <a:schemeClr val="tx1"/>
+            </a:solidFill>
+          </a:ln>
+        </p:spPr>
+        <p:style>
+          <a:lnRef idx="2">
+            <a:schemeClr val="accent1">
+              <a:shade val="15000"/>
+            </a:schemeClr>
+          </a:lnRef>
+          <a:fillRef idx="1">
+            <a:schemeClr val="accent1"/>
+          </a:fillRef>
+          <a:effectRef idx="0">
+            <a:schemeClr val="accent1"/>
+          </a:effectRef>
+          <a:fontRef idx="minor">
+            <a:schemeClr val="lt1"/>
+          </a:fontRef>
+        </p:style>
+        <p:txBody>
+          <a:bodyPr rtlCol="0" anchor="ctr"/>
+          <a:lstStyle/>
+          <a:p>
+            <a:pPr algn="ctr"/>
+            <a:endParaRPr lang="en-US"/>
+          </a:p>
+        </p:txBody>
+      </p:sp>
+      <p:cxnSp>
+        <p:nvCxnSpPr>
+          <p:cNvPr id="3" name="Straight Arrow Connector 2">
+            <a:extLst>
+              <a:ext uri="{FF2B5EF4-FFF2-40B4-BE49-F238E27FC236}">
+                <a16:creationId xmlns:a16="http://schemas.microsoft.com/office/drawing/2014/main" id="{9995A366-37B9-19B5-CC1B-959D4D05F384}"/>
+              </a:ext>
+            </a:extLst>
+          </p:cNvPr>
+          <p:cNvCxnSpPr>
+            <a:cxnSpLocks/>
+            <a:stCxn id="2" idx="3"/>
+            <a:endCxn id="4" idx="1"/>
+          </p:cNvCxnSpPr>
+          <p:nvPr/>
+        </p:nvCxnSpPr>
+        <p:spPr>
+          <a:xfrm>
+            <a:off x="1306924" y="3429000"/>
+            <a:ext cx="379050" cy="634"/>
+          </a:xfrm>
+          <a:prstGeom prst="straightConnector1">
+            <a:avLst/>
+          </a:prstGeom>
+          <a:ln>
+            <a:solidFill>
+              <a:schemeClr val="tx1"/>
+            </a:solidFill>
+            <a:tailEnd type="triangle"/>
+          </a:ln>
+        </p:spPr>
+        <p:style>
+          <a:lnRef idx="2">
+            <a:schemeClr val="accent1"/>
+          </a:lnRef>
+          <a:fillRef idx="0">
+            <a:schemeClr val="accent1"/>
+          </a:fillRef>
+          <a:effectRef idx="1">
+            <a:schemeClr val="accent1"/>
+          </a:effectRef>
+          <a:fontRef idx="minor">
+            <a:schemeClr val="tx1"/>
+          </a:fontRef>
+        </p:style>
+      </p:cxnSp>
+      <p:sp>
+        <p:nvSpPr>
+          <p:cNvPr id="7" name="TextBox 6">
+            <a:extLst>
+              <a:ext uri="{FF2B5EF4-FFF2-40B4-BE49-F238E27FC236}">
+                <a16:creationId xmlns:a16="http://schemas.microsoft.com/office/drawing/2014/main" id="{B56929FD-6EB9-1172-5B49-BFD038E2C5BF}"/>
+              </a:ext>
+            </a:extLst>
+          </p:cNvPr>
+          <p:cNvSpPr txBox="1"/>
+          <p:nvPr/>
+        </p:nvSpPr>
+        <p:spPr>
+          <a:xfrm>
+            <a:off x="194135" y="3263868"/>
+            <a:ext cx="1117721" cy="307777"/>
+          </a:xfrm>
+          <a:prstGeom prst="rect">
+            <a:avLst/>
+          </a:prstGeom>
+          <a:noFill/>
+        </p:spPr>
+        <p:txBody>
+          <a:bodyPr wrap="square" rtlCol="0">
+            <a:spAutoFit/>
+          </a:bodyPr>
+          <a:lstStyle/>
+          <a:p>
+            <a:pPr algn="ctr"/>
+            <a:r>
+              <a:rPr lang="en-US" sz="1400" dirty="0"/>
+              <a:t>Data source</a:t>
+            </a:r>
+            <a:endParaRPr lang="en-US" dirty="0"/>
+          </a:p>
+        </p:txBody>
+      </p:sp>
+      <p:sp>
+        <p:nvSpPr>
+          <p:cNvPr id="8" name="TextBox 7">
+            <a:extLst>
+              <a:ext uri="{FF2B5EF4-FFF2-40B4-BE49-F238E27FC236}">
+                <a16:creationId xmlns:a16="http://schemas.microsoft.com/office/drawing/2014/main" id="{BBB44E99-B87C-1BCD-5B5A-7009E14DBED4}"/>
+              </a:ext>
+            </a:extLst>
+          </p:cNvPr>
+          <p:cNvSpPr txBox="1"/>
+          <p:nvPr/>
+        </p:nvSpPr>
+        <p:spPr>
+          <a:xfrm>
+            <a:off x="1384677" y="2987705"/>
+            <a:ext cx="220274" cy="954107"/>
+          </a:xfrm>
+          <a:prstGeom prst="rect">
+            <a:avLst/>
+          </a:prstGeom>
+          <a:noFill/>
+        </p:spPr>
+        <p:txBody>
+          <a:bodyPr wrap="square" rtlCol="0">
+            <a:spAutoFit/>
+          </a:bodyPr>
+          <a:lstStyle/>
+          <a:p>
+            <a:pPr algn="ctr"/>
+            <a:r>
+              <a:rPr lang="en-US" sz="1400" dirty="0"/>
+              <a:t>0</a:t>
+            </a:r>
+          </a:p>
+          <a:p>
+            <a:pPr algn="ctr"/>
+            <a:endParaRPr lang="en-US" sz="1400" dirty="0"/>
+          </a:p>
+          <a:p>
+            <a:pPr algn="ctr"/>
+            <a:endParaRPr lang="en-US" sz="1400" dirty="0"/>
+          </a:p>
+          <a:p>
+            <a:pPr algn="ctr"/>
+            <a:r>
+              <a:rPr lang="en-US" sz="1400" dirty="0"/>
+              <a:t>1</a:t>
+            </a:r>
+            <a:endParaRPr lang="en-US" dirty="0"/>
+          </a:p>
+        </p:txBody>
+      </p:sp>
+      <p:sp>
+        <p:nvSpPr>
+          <p:cNvPr id="19" name="TextBox 18">
+            <a:extLst>
+              <a:ext uri="{FF2B5EF4-FFF2-40B4-BE49-F238E27FC236}">
+                <a16:creationId xmlns:a16="http://schemas.microsoft.com/office/drawing/2014/main" id="{FDBB8CAA-D37F-0526-9755-FBA3956268DE}"/>
+              </a:ext>
+            </a:extLst>
+          </p:cNvPr>
+          <p:cNvSpPr txBox="1"/>
+          <p:nvPr/>
+        </p:nvSpPr>
+        <p:spPr>
+          <a:xfrm>
+            <a:off x="2912504" y="2973819"/>
+            <a:ext cx="574796" cy="307777"/>
+          </a:xfrm>
+          <a:prstGeom prst="rect">
+            <a:avLst/>
+          </a:prstGeom>
+          <a:noFill/>
+        </p:spPr>
+        <p:txBody>
+          <a:bodyPr wrap="square" rtlCol="0">
+            <a:spAutoFit/>
+          </a:bodyPr>
+          <a:lstStyle/>
+          <a:p>
+            <a:pPr algn="ctr"/>
+            <a:r>
+              <a:rPr lang="en-US" sz="1400" dirty="0"/>
+              <a:t>3-bit</a:t>
+            </a:r>
+          </a:p>
+        </p:txBody>
+      </p:sp>
+      <p:sp>
+        <p:nvSpPr>
+          <p:cNvPr id="24" name="Rectangle 23">
+            <a:extLst>
+              <a:ext uri="{FF2B5EF4-FFF2-40B4-BE49-F238E27FC236}">
+                <a16:creationId xmlns:a16="http://schemas.microsoft.com/office/drawing/2014/main" id="{886EE432-D947-D6F6-D531-0A4789234CD0}"/>
+              </a:ext>
+            </a:extLst>
+          </p:cNvPr>
+          <p:cNvSpPr/>
+          <p:nvPr/>
+        </p:nvSpPr>
+        <p:spPr>
+          <a:xfrm rot="10800000">
+            <a:off x="9616645" y="381199"/>
+            <a:ext cx="524900" cy="528361"/>
+          </a:xfrm>
+          <a:prstGeom prst="rect">
+            <a:avLst/>
+          </a:prstGeom>
+          <a:noFill/>
+          <a:ln w="38100">
+            <a:solidFill>
+              <a:schemeClr val="tx1"/>
+            </a:solidFill>
+          </a:ln>
+        </p:spPr>
+        <p:style>
+          <a:lnRef idx="2">
+            <a:schemeClr val="accent1">
+              <a:shade val="15000"/>
+            </a:schemeClr>
+          </a:lnRef>
+          <a:fillRef idx="1">
+            <a:schemeClr val="accent1"/>
+          </a:fillRef>
+          <a:effectRef idx="0">
+            <a:schemeClr val="accent1"/>
+          </a:effectRef>
+          <a:fontRef idx="minor">
+            <a:schemeClr val="lt1"/>
+          </a:fontRef>
+        </p:style>
+        <p:txBody>
+          <a:bodyPr rtlCol="0" anchor="ctr"/>
+          <a:lstStyle/>
+          <a:p>
+            <a:pPr algn="ctr"/>
+            <a:endParaRPr lang="en-US"/>
+          </a:p>
+        </p:txBody>
+      </p:sp>
+      <p:cxnSp>
+        <p:nvCxnSpPr>
+          <p:cNvPr id="25" name="Straight Arrow Connector 24">
+            <a:extLst>
+              <a:ext uri="{FF2B5EF4-FFF2-40B4-BE49-F238E27FC236}">
+                <a16:creationId xmlns:a16="http://schemas.microsoft.com/office/drawing/2014/main" id="{3B5AA19C-24A6-9253-47F4-43A7D959A9C9}"/>
+              </a:ext>
+            </a:extLst>
+          </p:cNvPr>
+          <p:cNvCxnSpPr>
+            <a:cxnSpLocks/>
+            <a:stCxn id="24" idx="0"/>
+            <a:endCxn id="33" idx="3"/>
+          </p:cNvCxnSpPr>
+          <p:nvPr/>
+        </p:nvCxnSpPr>
+        <p:spPr>
+          <a:xfrm flipH="1">
+            <a:off x="9877349" y="909560"/>
+            <a:ext cx="1746" cy="437183"/>
+          </a:xfrm>
+          <a:prstGeom prst="straightConnector1">
+            <a:avLst/>
+          </a:prstGeom>
+          <a:ln>
+            <a:solidFill>
+              <a:schemeClr val="tx1"/>
+            </a:solidFill>
+            <a:tailEnd type="triangle"/>
+          </a:ln>
+        </p:spPr>
+        <p:style>
+          <a:lnRef idx="2">
+            <a:schemeClr val="accent1"/>
+          </a:lnRef>
+          <a:fillRef idx="0">
+            <a:schemeClr val="accent1"/>
+          </a:fillRef>
+          <a:effectRef idx="1">
+            <a:schemeClr val="accent1"/>
+          </a:effectRef>
+          <a:fontRef idx="minor">
+            <a:schemeClr val="tx1"/>
+          </a:fontRef>
+        </p:style>
+      </p:cxnSp>
+      <p:sp>
+        <p:nvSpPr>
+          <p:cNvPr id="30" name="TextBox 29">
+            <a:extLst>
+              <a:ext uri="{FF2B5EF4-FFF2-40B4-BE49-F238E27FC236}">
+                <a16:creationId xmlns:a16="http://schemas.microsoft.com/office/drawing/2014/main" id="{B9AABA33-EF04-1E7D-8270-B0CD0B98EA89}"/>
+              </a:ext>
+            </a:extLst>
+          </p:cNvPr>
+          <p:cNvSpPr txBox="1"/>
+          <p:nvPr/>
+        </p:nvSpPr>
+        <p:spPr>
+          <a:xfrm>
+            <a:off x="9604725" y="491491"/>
+            <a:ext cx="565450" cy="307777"/>
+          </a:xfrm>
+          <a:prstGeom prst="rect">
+            <a:avLst/>
+          </a:prstGeom>
+          <a:noFill/>
+        </p:spPr>
+        <p:txBody>
+          <a:bodyPr wrap="square" rtlCol="0">
+            <a:spAutoFit/>
+          </a:bodyPr>
+          <a:lstStyle/>
+          <a:p>
+            <a:pPr algn="ctr"/>
+            <a:r>
+              <a:rPr lang="en-US" sz="1400" dirty="0"/>
+              <a:t>NCO</a:t>
+            </a:r>
+            <a:endParaRPr lang="en-US" dirty="0"/>
+          </a:p>
+        </p:txBody>
+      </p:sp>
+      <p:sp>
+        <p:nvSpPr>
+          <p:cNvPr id="33" name="Oval 32">
+            <a:extLst>
+              <a:ext uri="{FF2B5EF4-FFF2-40B4-BE49-F238E27FC236}">
+                <a16:creationId xmlns:a16="http://schemas.microsoft.com/office/drawing/2014/main" id="{AB842582-9996-282C-AC5D-F9265681DCFC}"/>
+              </a:ext>
+            </a:extLst>
+          </p:cNvPr>
+          <p:cNvSpPr/>
+          <p:nvPr/>
+        </p:nvSpPr>
+        <p:spPr>
+          <a:xfrm rot="8243572">
+            <a:off x="9668904" y="1346569"/>
+            <a:ext cx="400181" cy="400181"/>
+          </a:xfrm>
+          <a:prstGeom prst="ellipse">
+            <a:avLst/>
+          </a:prstGeom>
+          <a:noFill/>
+          <a:ln>
+            <a:solidFill>
+              <a:schemeClr val="tx1"/>
+            </a:solidFill>
+          </a:ln>
+        </p:spPr>
+        <p:style>
+          <a:lnRef idx="2">
+            <a:schemeClr val="accent1">
+              <a:shade val="15000"/>
+            </a:schemeClr>
+          </a:lnRef>
+          <a:fillRef idx="1">
+            <a:schemeClr val="accent1"/>
+          </a:fillRef>
+          <a:effectRef idx="0">
+            <a:schemeClr val="accent1"/>
+          </a:effectRef>
+          <a:fontRef idx="minor">
+            <a:schemeClr val="lt1"/>
+          </a:fontRef>
+        </p:style>
+        <p:txBody>
+          <a:bodyPr rtlCol="0" anchor="ctr"/>
+          <a:lstStyle/>
+          <a:p>
+            <a:pPr algn="ctr"/>
+            <a:endParaRPr lang="en-US"/>
+          </a:p>
+        </p:txBody>
+      </p:sp>
+      <p:cxnSp>
+        <p:nvCxnSpPr>
+          <p:cNvPr id="35" name="Straight Connector 34">
+            <a:extLst>
+              <a:ext uri="{FF2B5EF4-FFF2-40B4-BE49-F238E27FC236}">
+                <a16:creationId xmlns:a16="http://schemas.microsoft.com/office/drawing/2014/main" id="{BF1D3560-1E30-EC93-DB59-968857C2AD21}"/>
+              </a:ext>
+            </a:extLst>
+          </p:cNvPr>
+          <p:cNvCxnSpPr>
+            <a:cxnSpLocks/>
+          </p:cNvCxnSpPr>
+          <p:nvPr/>
+        </p:nvCxnSpPr>
+        <p:spPr>
+          <a:xfrm rot="8243572">
+            <a:off x="9868995" y="1346569"/>
+            <a:ext cx="0" cy="400181"/>
+          </a:xfrm>
+          <a:prstGeom prst="line">
+            <a:avLst/>
+          </a:prstGeom>
+          <a:ln>
+            <a:solidFill>
+              <a:schemeClr val="tx1"/>
+            </a:solidFill>
+          </a:ln>
+        </p:spPr>
+        <p:style>
+          <a:lnRef idx="2">
+            <a:schemeClr val="accent1"/>
+          </a:lnRef>
+          <a:fillRef idx="0">
+            <a:schemeClr val="accent1"/>
+          </a:fillRef>
+          <a:effectRef idx="1">
+            <a:schemeClr val="accent1"/>
+          </a:effectRef>
+          <a:fontRef idx="minor">
+            <a:schemeClr val="tx1"/>
+          </a:fontRef>
+        </p:style>
+      </p:cxnSp>
+      <p:cxnSp>
+        <p:nvCxnSpPr>
+          <p:cNvPr id="38" name="Straight Connector 37">
+            <a:extLst>
+              <a:ext uri="{FF2B5EF4-FFF2-40B4-BE49-F238E27FC236}">
+                <a16:creationId xmlns:a16="http://schemas.microsoft.com/office/drawing/2014/main" id="{6A7B74C1-E66D-C699-BA34-7D7693C734B6}"/>
+              </a:ext>
+            </a:extLst>
+          </p:cNvPr>
+          <p:cNvCxnSpPr>
+            <a:cxnSpLocks/>
+          </p:cNvCxnSpPr>
+          <p:nvPr/>
+        </p:nvCxnSpPr>
+        <p:spPr>
+          <a:xfrm rot="8243572" flipH="1">
+            <a:off x="9668904" y="1546660"/>
+            <a:ext cx="400181" cy="0"/>
+          </a:xfrm>
+          <a:prstGeom prst="line">
+            <a:avLst/>
+          </a:prstGeom>
+          <a:ln>
+            <a:solidFill>
+              <a:schemeClr val="tx1"/>
+            </a:solidFill>
+          </a:ln>
+        </p:spPr>
+        <p:style>
+          <a:lnRef idx="2">
+            <a:schemeClr val="accent1"/>
+          </a:lnRef>
+          <a:fillRef idx="0">
+            <a:schemeClr val="accent1"/>
+          </a:fillRef>
+          <a:effectRef idx="1">
+            <a:schemeClr val="accent1"/>
+          </a:effectRef>
+          <a:fontRef idx="minor">
+            <a:schemeClr val="tx1"/>
+          </a:fontRef>
+        </p:style>
+      </p:cxnSp>
+      <p:cxnSp>
+        <p:nvCxnSpPr>
+          <p:cNvPr id="42" name="Straight Arrow Connector 41">
+            <a:extLst>
+              <a:ext uri="{FF2B5EF4-FFF2-40B4-BE49-F238E27FC236}">
+                <a16:creationId xmlns:a16="http://schemas.microsoft.com/office/drawing/2014/main" id="{AADA6295-807C-7BD5-815D-90D17B44C432}"/>
+              </a:ext>
+            </a:extLst>
+          </p:cNvPr>
+          <p:cNvCxnSpPr>
+            <a:cxnSpLocks/>
+            <a:stCxn id="33" idx="1"/>
+            <a:endCxn id="96" idx="2"/>
+          </p:cNvCxnSpPr>
+          <p:nvPr/>
+        </p:nvCxnSpPr>
+        <p:spPr>
+          <a:xfrm rot="16200000" flipH="1">
+            <a:off x="9968271" y="1655654"/>
+            <a:ext cx="1548164" cy="1346884"/>
+          </a:xfrm>
+          <a:prstGeom prst="bentConnector3">
+            <a:avLst>
+              <a:gd name="adj1" fmla="val -860"/>
+            </a:avLst>
+          </a:prstGeom>
+          <a:ln>
+            <a:solidFill>
+              <a:schemeClr val="tx1"/>
+            </a:solidFill>
+            <a:tailEnd type="triangle"/>
+          </a:ln>
+        </p:spPr>
+        <p:style>
+          <a:lnRef idx="2">
+            <a:schemeClr val="accent1"/>
+          </a:lnRef>
+          <a:fillRef idx="0">
+            <a:schemeClr val="accent1"/>
+          </a:fillRef>
+          <a:effectRef idx="1">
+            <a:schemeClr val="accent1"/>
+          </a:effectRef>
+          <a:fontRef idx="minor">
+            <a:schemeClr val="tx1"/>
+          </a:fontRef>
+        </p:style>
+      </p:cxnSp>
+      <p:sp>
+        <p:nvSpPr>
+          <p:cNvPr id="29" name="Rectangle 28">
+            <a:extLst>
+              <a:ext uri="{FF2B5EF4-FFF2-40B4-BE49-F238E27FC236}">
+                <a16:creationId xmlns:a16="http://schemas.microsoft.com/office/drawing/2014/main" id="{3AC7B003-8176-3121-5603-A9A89E4BED13}"/>
+              </a:ext>
+            </a:extLst>
+          </p:cNvPr>
+          <p:cNvSpPr/>
+          <p:nvPr/>
+        </p:nvSpPr>
+        <p:spPr>
+          <a:xfrm>
+            <a:off x="3487300" y="2868688"/>
+            <a:ext cx="1117721" cy="1120624"/>
+          </a:xfrm>
+          <a:prstGeom prst="rect">
+            <a:avLst/>
+          </a:prstGeom>
+          <a:noFill/>
+          <a:ln w="38100">
+            <a:solidFill>
+              <a:schemeClr val="tx1"/>
+            </a:solidFill>
+          </a:ln>
+        </p:spPr>
+        <p:style>
+          <a:lnRef idx="2">
+            <a:schemeClr val="accent1">
+              <a:shade val="15000"/>
+            </a:schemeClr>
+          </a:lnRef>
+          <a:fillRef idx="1">
+            <a:schemeClr val="accent1"/>
+          </a:fillRef>
+          <a:effectRef idx="0">
+            <a:schemeClr val="accent1"/>
+          </a:effectRef>
+          <a:fontRef idx="minor">
+            <a:schemeClr val="lt1"/>
+          </a:fontRef>
+        </p:style>
+        <p:txBody>
+          <a:bodyPr rtlCol="0" anchor="ctr"/>
+          <a:lstStyle/>
+          <a:p>
+            <a:pPr algn="ctr"/>
+            <a:endParaRPr lang="en-US"/>
+          </a:p>
+        </p:txBody>
+      </p:sp>
+      <p:sp>
+        <p:nvSpPr>
+          <p:cNvPr id="56" name="TextBox 55">
+            <a:extLst>
+              <a:ext uri="{FF2B5EF4-FFF2-40B4-BE49-F238E27FC236}">
+                <a16:creationId xmlns:a16="http://schemas.microsoft.com/office/drawing/2014/main" id="{0357D9A5-7C9A-BC9E-0E6E-54A3542ABCD9}"/>
+              </a:ext>
+            </a:extLst>
+          </p:cNvPr>
+          <p:cNvSpPr txBox="1"/>
+          <p:nvPr/>
+        </p:nvSpPr>
+        <p:spPr>
+          <a:xfrm>
+            <a:off x="3487300" y="3275111"/>
+            <a:ext cx="1117721" cy="307777"/>
+          </a:xfrm>
+          <a:prstGeom prst="rect">
+            <a:avLst/>
+          </a:prstGeom>
+          <a:noFill/>
+        </p:spPr>
+        <p:txBody>
+          <a:bodyPr wrap="square" rtlCol="0">
+            <a:spAutoFit/>
+          </a:bodyPr>
+          <a:lstStyle/>
+          <a:p>
+            <a:pPr algn="ctr"/>
+            <a:r>
+              <a:rPr lang="en-US" sz="1400" dirty="0"/>
+              <a:t>mapper</a:t>
+            </a:r>
+          </a:p>
+        </p:txBody>
+      </p:sp>
+      <p:cxnSp>
+        <p:nvCxnSpPr>
+          <p:cNvPr id="60" name="Straight Arrow Connector 59">
+            <a:extLst>
+              <a:ext uri="{FF2B5EF4-FFF2-40B4-BE49-F238E27FC236}">
+                <a16:creationId xmlns:a16="http://schemas.microsoft.com/office/drawing/2014/main" id="{C5267EE3-CAA8-D5B0-AD79-E5060415FB86}"/>
+              </a:ext>
+            </a:extLst>
+          </p:cNvPr>
+          <p:cNvCxnSpPr>
+            <a:cxnSpLocks/>
+            <a:stCxn id="56" idx="3"/>
+            <a:endCxn id="10" idx="1"/>
+          </p:cNvCxnSpPr>
+          <p:nvPr/>
+        </p:nvCxnSpPr>
+        <p:spPr>
+          <a:xfrm flipV="1">
+            <a:off x="4605021" y="1511666"/>
+            <a:ext cx="919398" cy="1917334"/>
+          </a:xfrm>
+          <a:prstGeom prst="bentConnector3">
+            <a:avLst>
+              <a:gd name="adj1" fmla="val 50000"/>
+            </a:avLst>
+          </a:prstGeom>
+          <a:ln>
+            <a:solidFill>
+              <a:schemeClr val="tx1"/>
+            </a:solidFill>
+            <a:tailEnd type="triangle"/>
+          </a:ln>
+        </p:spPr>
+        <p:style>
+          <a:lnRef idx="2">
+            <a:schemeClr val="accent1"/>
+          </a:lnRef>
+          <a:fillRef idx="0">
+            <a:schemeClr val="accent1"/>
+          </a:fillRef>
+          <a:effectRef idx="1">
+            <a:schemeClr val="accent1"/>
+          </a:effectRef>
+          <a:fontRef idx="minor">
+            <a:schemeClr val="tx1"/>
+          </a:fontRef>
+        </p:style>
+      </p:cxnSp>
+      <p:sp>
+        <p:nvSpPr>
+          <p:cNvPr id="64" name="TextBox 63">
+            <a:extLst>
+              <a:ext uri="{FF2B5EF4-FFF2-40B4-BE49-F238E27FC236}">
+                <a16:creationId xmlns:a16="http://schemas.microsoft.com/office/drawing/2014/main" id="{A7A43534-FEAD-0930-9945-1C100CAF8E1C}"/>
+              </a:ext>
+            </a:extLst>
+          </p:cNvPr>
+          <p:cNvSpPr txBox="1"/>
+          <p:nvPr/>
+        </p:nvSpPr>
+        <p:spPr>
+          <a:xfrm>
+            <a:off x="4568611" y="2987705"/>
+            <a:ext cx="574796" cy="307777"/>
+          </a:xfrm>
+          <a:prstGeom prst="rect">
+            <a:avLst/>
+          </a:prstGeom>
+          <a:noFill/>
+        </p:spPr>
+        <p:txBody>
+          <a:bodyPr wrap="square" rtlCol="0">
+            <a:spAutoFit/>
+          </a:bodyPr>
+          <a:lstStyle/>
+          <a:p>
+            <a:pPr algn="ctr"/>
+            <a:r>
+              <a:rPr lang="en-US" sz="1400" dirty="0"/>
+              <a:t>I , Q</a:t>
+            </a:r>
+          </a:p>
+        </p:txBody>
+      </p:sp>
+      <p:sp>
+        <p:nvSpPr>
+          <p:cNvPr id="65" name="TextBox 64">
+            <a:extLst>
+              <a:ext uri="{FF2B5EF4-FFF2-40B4-BE49-F238E27FC236}">
+                <a16:creationId xmlns:a16="http://schemas.microsoft.com/office/drawing/2014/main" id="{A9A48A5A-A0A7-4733-6F09-C1CEB105B14D}"/>
+              </a:ext>
+            </a:extLst>
+          </p:cNvPr>
+          <p:cNvSpPr txBox="1"/>
+          <p:nvPr/>
+        </p:nvSpPr>
+        <p:spPr>
+          <a:xfrm>
+            <a:off x="4980126" y="1144380"/>
+            <a:ext cx="574796" cy="307777"/>
+          </a:xfrm>
+          <a:prstGeom prst="rect">
+            <a:avLst/>
+          </a:prstGeom>
+          <a:noFill/>
+        </p:spPr>
+        <p:txBody>
+          <a:bodyPr wrap="square" rtlCol="0">
+            <a:spAutoFit/>
+          </a:bodyPr>
+          <a:lstStyle/>
+          <a:p>
+            <a:pPr algn="ctr"/>
+            <a:r>
+              <a:rPr lang="en-US" sz="1400" dirty="0"/>
+              <a:t>I</a:t>
+            </a:r>
+          </a:p>
+        </p:txBody>
+      </p:sp>
+      <p:sp>
+        <p:nvSpPr>
+          <p:cNvPr id="67" name="Rectangle 66">
+            <a:extLst>
+              <a:ext uri="{FF2B5EF4-FFF2-40B4-BE49-F238E27FC236}">
+                <a16:creationId xmlns:a16="http://schemas.microsoft.com/office/drawing/2014/main" id="{F2F909A2-EF27-D62F-EAE9-C6042EA02DD3}"/>
+              </a:ext>
+            </a:extLst>
+          </p:cNvPr>
+          <p:cNvSpPr/>
+          <p:nvPr/>
+        </p:nvSpPr>
+        <p:spPr>
+          <a:xfrm>
+            <a:off x="5519503" y="4742674"/>
+            <a:ext cx="1117721" cy="1120624"/>
+          </a:xfrm>
+          <a:prstGeom prst="rect">
+            <a:avLst/>
+          </a:prstGeom>
+          <a:noFill/>
+          <a:ln w="38100">
+            <a:solidFill>
+              <a:schemeClr val="tx1"/>
+            </a:solidFill>
+          </a:ln>
+        </p:spPr>
+        <p:style>
+          <a:lnRef idx="2">
+            <a:schemeClr val="accent1">
+              <a:shade val="15000"/>
+            </a:schemeClr>
+          </a:lnRef>
+          <a:fillRef idx="1">
+            <a:schemeClr val="accent1"/>
+          </a:fillRef>
+          <a:effectRef idx="0">
+            <a:schemeClr val="accent1"/>
+          </a:effectRef>
+          <a:fontRef idx="minor">
+            <a:schemeClr val="lt1"/>
+          </a:fontRef>
+        </p:style>
+        <p:txBody>
+          <a:bodyPr rtlCol="0" anchor="ctr"/>
+          <a:lstStyle/>
+          <a:p>
+            <a:pPr algn="ctr"/>
+            <a:endParaRPr lang="en-US"/>
+          </a:p>
+        </p:txBody>
+      </p:sp>
+      <p:cxnSp>
+        <p:nvCxnSpPr>
+          <p:cNvPr id="68" name="Straight Arrow Connector 67">
+            <a:extLst>
+              <a:ext uri="{FF2B5EF4-FFF2-40B4-BE49-F238E27FC236}">
+                <a16:creationId xmlns:a16="http://schemas.microsoft.com/office/drawing/2014/main" id="{773ABC5C-AD24-E931-C765-2B05DA9D6E0F}"/>
+              </a:ext>
+            </a:extLst>
+          </p:cNvPr>
+          <p:cNvCxnSpPr>
+            <a:cxnSpLocks/>
+            <a:stCxn id="67" idx="3"/>
+            <a:endCxn id="70" idx="1"/>
+          </p:cNvCxnSpPr>
+          <p:nvPr/>
+        </p:nvCxnSpPr>
+        <p:spPr>
+          <a:xfrm>
+            <a:off x="6637224" y="5302986"/>
+            <a:ext cx="806732" cy="11877"/>
+          </a:xfrm>
+          <a:prstGeom prst="straightConnector1">
+            <a:avLst/>
+          </a:prstGeom>
+          <a:ln>
+            <a:solidFill>
+              <a:schemeClr val="tx1"/>
+            </a:solidFill>
+            <a:tailEnd type="triangle"/>
+          </a:ln>
+        </p:spPr>
+        <p:style>
+          <a:lnRef idx="2">
+            <a:schemeClr val="accent1"/>
+          </a:lnRef>
+          <a:fillRef idx="0">
+            <a:schemeClr val="accent1"/>
+          </a:fillRef>
+          <a:effectRef idx="1">
+            <a:schemeClr val="accent1"/>
+          </a:effectRef>
+          <a:fontRef idx="minor">
+            <a:schemeClr val="tx1"/>
+          </a:fontRef>
+        </p:style>
+      </p:cxnSp>
+      <p:sp>
+        <p:nvSpPr>
+          <p:cNvPr id="69" name="TextBox 68">
+            <a:extLst>
+              <a:ext uri="{FF2B5EF4-FFF2-40B4-BE49-F238E27FC236}">
+                <a16:creationId xmlns:a16="http://schemas.microsoft.com/office/drawing/2014/main" id="{7D6755FA-66B6-25E6-24F7-66DA5C92900C}"/>
+              </a:ext>
+            </a:extLst>
+          </p:cNvPr>
+          <p:cNvSpPr txBox="1"/>
+          <p:nvPr/>
+        </p:nvSpPr>
+        <p:spPr>
+          <a:xfrm>
+            <a:off x="5555913" y="5149097"/>
+            <a:ext cx="1044900" cy="307777"/>
+          </a:xfrm>
+          <a:prstGeom prst="rect">
+            <a:avLst/>
+          </a:prstGeom>
+          <a:noFill/>
+        </p:spPr>
+        <p:txBody>
+          <a:bodyPr wrap="square" rtlCol="0">
+            <a:spAutoFit/>
+          </a:bodyPr>
+          <a:lstStyle/>
+          <a:p>
+            <a:pPr algn="ctr"/>
+            <a:r>
+              <a:rPr lang="en-US" sz="1400" dirty="0"/>
+              <a:t>Upsampler</a:t>
+            </a:r>
+            <a:endParaRPr lang="en-US" dirty="0"/>
+          </a:p>
+        </p:txBody>
+      </p:sp>
+      <p:sp>
+        <p:nvSpPr>
+          <p:cNvPr id="70" name="Rectangle 69">
+            <a:extLst>
+              <a:ext uri="{FF2B5EF4-FFF2-40B4-BE49-F238E27FC236}">
+                <a16:creationId xmlns:a16="http://schemas.microsoft.com/office/drawing/2014/main" id="{223AF9CE-A240-FB76-3D1C-CFDFC4BC71F9}"/>
+              </a:ext>
+            </a:extLst>
+          </p:cNvPr>
+          <p:cNvSpPr/>
+          <p:nvPr/>
+        </p:nvSpPr>
+        <p:spPr>
+          <a:xfrm>
+            <a:off x="7443956" y="4754551"/>
+            <a:ext cx="1117721" cy="1120624"/>
+          </a:xfrm>
+          <a:prstGeom prst="rect">
+            <a:avLst/>
+          </a:prstGeom>
+          <a:noFill/>
+          <a:ln w="38100">
+            <a:solidFill>
+              <a:schemeClr val="tx1"/>
+            </a:solidFill>
+          </a:ln>
+        </p:spPr>
+        <p:style>
+          <a:lnRef idx="2">
+            <a:schemeClr val="accent1">
+              <a:shade val="15000"/>
+            </a:schemeClr>
+          </a:lnRef>
+          <a:fillRef idx="1">
+            <a:schemeClr val="accent1"/>
+          </a:fillRef>
+          <a:effectRef idx="0">
+            <a:schemeClr val="accent1"/>
+          </a:effectRef>
+          <a:fontRef idx="minor">
+            <a:schemeClr val="lt1"/>
+          </a:fontRef>
+        </p:style>
+        <p:txBody>
+          <a:bodyPr rtlCol="0" anchor="ctr"/>
+          <a:lstStyle/>
+          <a:p>
+            <a:pPr algn="ctr"/>
+            <a:endParaRPr lang="en-US"/>
+          </a:p>
+        </p:txBody>
+      </p:sp>
+      <p:cxnSp>
+        <p:nvCxnSpPr>
+          <p:cNvPr id="71" name="Straight Arrow Connector 70">
+            <a:extLst>
+              <a:ext uri="{FF2B5EF4-FFF2-40B4-BE49-F238E27FC236}">
+                <a16:creationId xmlns:a16="http://schemas.microsoft.com/office/drawing/2014/main" id="{A436080F-B378-CC71-C7F6-566AB773E5BC}"/>
+              </a:ext>
+            </a:extLst>
+          </p:cNvPr>
+          <p:cNvCxnSpPr>
+            <a:cxnSpLocks/>
+            <a:stCxn id="70" idx="3"/>
+            <a:endCxn id="76" idx="5"/>
+          </p:cNvCxnSpPr>
+          <p:nvPr/>
+        </p:nvCxnSpPr>
+        <p:spPr>
+          <a:xfrm>
+            <a:off x="8561677" y="5314863"/>
+            <a:ext cx="1102485" cy="14762"/>
+          </a:xfrm>
+          <a:prstGeom prst="straightConnector1">
+            <a:avLst/>
+          </a:prstGeom>
+          <a:ln>
+            <a:solidFill>
+              <a:schemeClr val="tx1"/>
+            </a:solidFill>
+            <a:tailEnd type="triangle"/>
+          </a:ln>
+        </p:spPr>
+        <p:style>
+          <a:lnRef idx="2">
+            <a:schemeClr val="accent1"/>
+          </a:lnRef>
+          <a:fillRef idx="0">
+            <a:schemeClr val="accent1"/>
+          </a:fillRef>
+          <a:effectRef idx="1">
+            <a:schemeClr val="accent1"/>
+          </a:effectRef>
+          <a:fontRef idx="minor">
+            <a:schemeClr val="tx1"/>
+          </a:fontRef>
+        </p:style>
+      </p:cxnSp>
+      <p:sp>
+        <p:nvSpPr>
+          <p:cNvPr id="72" name="TextBox 71">
+            <a:extLst>
+              <a:ext uri="{FF2B5EF4-FFF2-40B4-BE49-F238E27FC236}">
+                <a16:creationId xmlns:a16="http://schemas.microsoft.com/office/drawing/2014/main" id="{9AA0B939-7A57-A6CA-06DC-38DBEE0F71D9}"/>
+              </a:ext>
+            </a:extLst>
+          </p:cNvPr>
+          <p:cNvSpPr txBox="1"/>
+          <p:nvPr/>
+        </p:nvSpPr>
+        <p:spPr>
+          <a:xfrm>
+            <a:off x="7466142" y="4945531"/>
+            <a:ext cx="1117721" cy="738664"/>
+          </a:xfrm>
+          <a:prstGeom prst="rect">
+            <a:avLst/>
+          </a:prstGeom>
+          <a:noFill/>
+        </p:spPr>
+        <p:txBody>
+          <a:bodyPr wrap="square" rtlCol="0">
+            <a:spAutoFit/>
+          </a:bodyPr>
+          <a:lstStyle/>
+          <a:p>
+            <a:pPr algn="ctr"/>
+            <a:r>
+              <a:rPr lang="en-US" sz="1400" dirty="0"/>
+              <a:t>Pulse shaping</a:t>
+            </a:r>
+          </a:p>
+          <a:p>
+            <a:pPr algn="ctr"/>
+            <a:r>
+              <a:rPr lang="en-US" sz="1400" dirty="0"/>
+              <a:t>(FIR filter)</a:t>
+            </a:r>
+          </a:p>
+        </p:txBody>
+      </p:sp>
+      <p:sp>
+        <p:nvSpPr>
+          <p:cNvPr id="76" name="Oval 75">
+            <a:extLst>
+              <a:ext uri="{FF2B5EF4-FFF2-40B4-BE49-F238E27FC236}">
+                <a16:creationId xmlns:a16="http://schemas.microsoft.com/office/drawing/2014/main" id="{F1F71413-1803-107C-71B9-C249555BF95B}"/>
+              </a:ext>
+            </a:extLst>
+          </p:cNvPr>
+          <p:cNvSpPr/>
+          <p:nvPr/>
+        </p:nvSpPr>
+        <p:spPr>
+          <a:xfrm rot="8243572">
+            <a:off x="9663988" y="5137889"/>
+            <a:ext cx="400181" cy="400181"/>
+          </a:xfrm>
+          <a:prstGeom prst="ellipse">
+            <a:avLst/>
+          </a:prstGeom>
+          <a:noFill/>
+          <a:ln>
+            <a:solidFill>
+              <a:schemeClr val="tx1"/>
+            </a:solidFill>
+          </a:ln>
+        </p:spPr>
+        <p:style>
+          <a:lnRef idx="2">
+            <a:schemeClr val="accent1">
+              <a:shade val="15000"/>
+            </a:schemeClr>
+          </a:lnRef>
+          <a:fillRef idx="1">
+            <a:schemeClr val="accent1"/>
+          </a:fillRef>
+          <a:effectRef idx="0">
+            <a:schemeClr val="accent1"/>
+          </a:effectRef>
+          <a:fontRef idx="minor">
+            <a:schemeClr val="lt1"/>
+          </a:fontRef>
+        </p:style>
+        <p:txBody>
+          <a:bodyPr rtlCol="0" anchor="ctr"/>
+          <a:lstStyle/>
+          <a:p>
+            <a:pPr algn="ctr"/>
+            <a:endParaRPr lang="en-US"/>
+          </a:p>
+        </p:txBody>
+      </p:sp>
+      <p:cxnSp>
+        <p:nvCxnSpPr>
+          <p:cNvPr id="77" name="Straight Connector 76">
+            <a:extLst>
+              <a:ext uri="{FF2B5EF4-FFF2-40B4-BE49-F238E27FC236}">
+                <a16:creationId xmlns:a16="http://schemas.microsoft.com/office/drawing/2014/main" id="{9BA7AFB6-02DD-0A7B-CC9C-3EB76FB63509}"/>
+              </a:ext>
+            </a:extLst>
+          </p:cNvPr>
+          <p:cNvCxnSpPr>
+            <a:cxnSpLocks/>
+          </p:cNvCxnSpPr>
+          <p:nvPr/>
+        </p:nvCxnSpPr>
+        <p:spPr>
+          <a:xfrm rot="8243572">
+            <a:off x="9864079" y="5137889"/>
+            <a:ext cx="0" cy="400181"/>
+          </a:xfrm>
+          <a:prstGeom prst="line">
+            <a:avLst/>
+          </a:prstGeom>
+          <a:ln>
+            <a:solidFill>
+              <a:schemeClr val="tx1"/>
+            </a:solidFill>
+          </a:ln>
+        </p:spPr>
+        <p:style>
+          <a:lnRef idx="2">
+            <a:schemeClr val="accent1"/>
+          </a:lnRef>
+          <a:fillRef idx="0">
+            <a:schemeClr val="accent1"/>
+          </a:fillRef>
+          <a:effectRef idx="1">
+            <a:schemeClr val="accent1"/>
+          </a:effectRef>
+          <a:fontRef idx="minor">
+            <a:schemeClr val="tx1"/>
+          </a:fontRef>
+        </p:style>
+      </p:cxnSp>
+      <p:cxnSp>
+        <p:nvCxnSpPr>
+          <p:cNvPr id="78" name="Straight Connector 77">
+            <a:extLst>
+              <a:ext uri="{FF2B5EF4-FFF2-40B4-BE49-F238E27FC236}">
+                <a16:creationId xmlns:a16="http://schemas.microsoft.com/office/drawing/2014/main" id="{181C1EFD-8147-9855-82EF-6DBA1BE7A388}"/>
+              </a:ext>
+            </a:extLst>
+          </p:cNvPr>
+          <p:cNvCxnSpPr>
+            <a:cxnSpLocks/>
+          </p:cNvCxnSpPr>
+          <p:nvPr/>
+        </p:nvCxnSpPr>
+        <p:spPr>
+          <a:xfrm rot="8243572" flipH="1">
+            <a:off x="9663988" y="5337980"/>
+            <a:ext cx="400181" cy="0"/>
+          </a:xfrm>
+          <a:prstGeom prst="line">
+            <a:avLst/>
+          </a:prstGeom>
+          <a:ln>
+            <a:solidFill>
+              <a:schemeClr val="tx1"/>
+            </a:solidFill>
+          </a:ln>
+        </p:spPr>
+        <p:style>
+          <a:lnRef idx="2">
+            <a:schemeClr val="accent1"/>
+          </a:lnRef>
+          <a:fillRef idx="0">
+            <a:schemeClr val="accent1"/>
+          </a:fillRef>
+          <a:effectRef idx="1">
+            <a:schemeClr val="accent1"/>
+          </a:effectRef>
+          <a:fontRef idx="minor">
+            <a:schemeClr val="tx1"/>
+          </a:fontRef>
+        </p:style>
+      </p:cxnSp>
+      <p:cxnSp>
+        <p:nvCxnSpPr>
+          <p:cNvPr id="79" name="Straight Arrow Connector 78">
+            <a:extLst>
+              <a:ext uri="{FF2B5EF4-FFF2-40B4-BE49-F238E27FC236}">
+                <a16:creationId xmlns:a16="http://schemas.microsoft.com/office/drawing/2014/main" id="{0E8087EB-1091-C957-17A2-4E8B5F344C89}"/>
+              </a:ext>
+            </a:extLst>
+          </p:cNvPr>
+          <p:cNvCxnSpPr>
+            <a:cxnSpLocks/>
+            <a:stCxn id="76" idx="1"/>
+            <a:endCxn id="96" idx="0"/>
+          </p:cNvCxnSpPr>
+          <p:nvPr/>
+        </p:nvCxnSpPr>
+        <p:spPr>
+          <a:xfrm rot="5400000" flipH="1" flipV="1">
+            <a:off x="9882497" y="3813037"/>
+            <a:ext cx="1714795" cy="1351800"/>
+          </a:xfrm>
+          <a:prstGeom prst="bentConnector3">
+            <a:avLst>
+              <a:gd name="adj1" fmla="val 669"/>
+            </a:avLst>
+          </a:prstGeom>
+          <a:ln>
+            <a:solidFill>
+              <a:schemeClr val="tx1"/>
+            </a:solidFill>
+            <a:tailEnd type="triangle"/>
+          </a:ln>
+        </p:spPr>
+        <p:style>
+          <a:lnRef idx="2">
+            <a:schemeClr val="accent1"/>
+          </a:lnRef>
+          <a:fillRef idx="0">
+            <a:schemeClr val="accent1"/>
+          </a:fillRef>
+          <a:effectRef idx="1">
+            <a:schemeClr val="accent1"/>
+          </a:effectRef>
+          <a:fontRef idx="minor">
+            <a:schemeClr val="tx1"/>
+          </a:fontRef>
+        </p:style>
+      </p:cxnSp>
+      <p:cxnSp>
+        <p:nvCxnSpPr>
+          <p:cNvPr id="80" name="Straight Arrow Connector 59">
+            <a:extLst>
+              <a:ext uri="{FF2B5EF4-FFF2-40B4-BE49-F238E27FC236}">
+                <a16:creationId xmlns:a16="http://schemas.microsoft.com/office/drawing/2014/main" id="{8E329CAC-48C6-BB96-DBC8-D860D1C865F6}"/>
+              </a:ext>
+            </a:extLst>
+          </p:cNvPr>
+          <p:cNvCxnSpPr>
+            <a:cxnSpLocks/>
+            <a:stCxn id="29" idx="3"/>
+            <a:endCxn id="67" idx="1"/>
+          </p:cNvCxnSpPr>
+          <p:nvPr/>
+        </p:nvCxnSpPr>
+        <p:spPr>
+          <a:xfrm>
+            <a:off x="4605021" y="3429000"/>
+            <a:ext cx="914482" cy="1873986"/>
+          </a:xfrm>
+          <a:prstGeom prst="bentConnector3">
+            <a:avLst>
+              <a:gd name="adj1" fmla="val 50000"/>
+            </a:avLst>
+          </a:prstGeom>
+          <a:ln>
+            <a:solidFill>
+              <a:schemeClr val="tx1"/>
+            </a:solidFill>
+            <a:tailEnd type="triangle"/>
+          </a:ln>
+        </p:spPr>
+        <p:style>
+          <a:lnRef idx="2">
+            <a:schemeClr val="accent1"/>
+          </a:lnRef>
+          <a:fillRef idx="0">
+            <a:schemeClr val="accent1"/>
+          </a:fillRef>
+          <a:effectRef idx="1">
+            <a:schemeClr val="accent1"/>
+          </a:effectRef>
+          <a:fontRef idx="minor">
+            <a:schemeClr val="tx1"/>
+          </a:fontRef>
+        </p:style>
+      </p:cxnSp>
+      <p:sp>
+        <p:nvSpPr>
+          <p:cNvPr id="83" name="TextBox 82">
+            <a:extLst>
+              <a:ext uri="{FF2B5EF4-FFF2-40B4-BE49-F238E27FC236}">
+                <a16:creationId xmlns:a16="http://schemas.microsoft.com/office/drawing/2014/main" id="{C455FB75-5576-DA06-B7E2-42FBB66C9951}"/>
+              </a:ext>
+            </a:extLst>
+          </p:cNvPr>
+          <p:cNvSpPr txBox="1"/>
+          <p:nvPr/>
+        </p:nvSpPr>
+        <p:spPr>
+          <a:xfrm>
+            <a:off x="4980126" y="4905039"/>
+            <a:ext cx="574796" cy="307777"/>
+          </a:xfrm>
+          <a:prstGeom prst="rect">
+            <a:avLst/>
+          </a:prstGeom>
+          <a:noFill/>
+        </p:spPr>
+        <p:txBody>
+          <a:bodyPr wrap="square" rtlCol="0">
+            <a:spAutoFit/>
+          </a:bodyPr>
+          <a:lstStyle/>
+          <a:p>
+            <a:pPr algn="ctr"/>
+            <a:r>
+              <a:rPr lang="en-US" sz="1400" dirty="0"/>
+              <a:t>Q</a:t>
+            </a:r>
+          </a:p>
+        </p:txBody>
+      </p:sp>
+      <p:sp>
+        <p:nvSpPr>
+          <p:cNvPr id="85" name="Rectangle 84">
+            <a:extLst>
+              <a:ext uri="{FF2B5EF4-FFF2-40B4-BE49-F238E27FC236}">
+                <a16:creationId xmlns:a16="http://schemas.microsoft.com/office/drawing/2014/main" id="{14DA3E64-D834-45F7-0EC6-8F75A671FCF6}"/>
+              </a:ext>
+            </a:extLst>
+          </p:cNvPr>
+          <p:cNvSpPr/>
+          <p:nvPr/>
+        </p:nvSpPr>
+        <p:spPr>
+          <a:xfrm rot="10800000">
+            <a:off x="9593274" y="6045561"/>
+            <a:ext cx="524900" cy="528361"/>
+          </a:xfrm>
+          <a:prstGeom prst="rect">
+            <a:avLst/>
+          </a:prstGeom>
+          <a:noFill/>
+          <a:ln w="38100">
+            <a:solidFill>
+              <a:schemeClr val="tx1"/>
+            </a:solidFill>
+          </a:ln>
+        </p:spPr>
+        <p:style>
+          <a:lnRef idx="2">
+            <a:schemeClr val="accent1">
+              <a:shade val="15000"/>
+            </a:schemeClr>
+          </a:lnRef>
+          <a:fillRef idx="1">
+            <a:schemeClr val="accent1"/>
+          </a:fillRef>
+          <a:effectRef idx="0">
+            <a:schemeClr val="accent1"/>
+          </a:effectRef>
+          <a:fontRef idx="minor">
+            <a:schemeClr val="lt1"/>
+          </a:fontRef>
+        </p:style>
+        <p:txBody>
+          <a:bodyPr rtlCol="0" anchor="ctr"/>
+          <a:lstStyle/>
+          <a:p>
+            <a:pPr algn="ctr"/>
+            <a:endParaRPr lang="en-US"/>
+          </a:p>
+        </p:txBody>
+      </p:sp>
+      <p:sp>
+        <p:nvSpPr>
+          <p:cNvPr id="87" name="TextBox 86">
+            <a:extLst>
+              <a:ext uri="{FF2B5EF4-FFF2-40B4-BE49-F238E27FC236}">
+                <a16:creationId xmlns:a16="http://schemas.microsoft.com/office/drawing/2014/main" id="{49095647-601F-E860-C90B-379E02854D88}"/>
+              </a:ext>
+            </a:extLst>
+          </p:cNvPr>
+          <p:cNvSpPr txBox="1"/>
+          <p:nvPr/>
+        </p:nvSpPr>
+        <p:spPr>
+          <a:xfrm>
+            <a:off x="9581354" y="6155853"/>
+            <a:ext cx="565450" cy="307777"/>
+          </a:xfrm>
+          <a:prstGeom prst="rect">
+            <a:avLst/>
+          </a:prstGeom>
+          <a:noFill/>
+        </p:spPr>
+        <p:txBody>
+          <a:bodyPr wrap="square" rtlCol="0">
+            <a:spAutoFit/>
+          </a:bodyPr>
+          <a:lstStyle/>
+          <a:p>
+            <a:pPr algn="ctr"/>
+            <a:r>
+              <a:rPr lang="en-US" sz="1400" dirty="0"/>
+              <a:t>NCO</a:t>
+            </a:r>
+            <a:endParaRPr lang="en-US" dirty="0"/>
+          </a:p>
+        </p:txBody>
+      </p:sp>
+      <p:cxnSp>
+        <p:nvCxnSpPr>
+          <p:cNvPr id="90" name="Straight Arrow Connector 89">
+            <a:extLst>
+              <a:ext uri="{FF2B5EF4-FFF2-40B4-BE49-F238E27FC236}">
+                <a16:creationId xmlns:a16="http://schemas.microsoft.com/office/drawing/2014/main" id="{FBA0F8DE-0B7F-EE00-A206-D2874D1F07EC}"/>
+              </a:ext>
+            </a:extLst>
+          </p:cNvPr>
+          <p:cNvCxnSpPr>
+            <a:cxnSpLocks/>
+            <a:stCxn id="85" idx="2"/>
+            <a:endCxn id="76" idx="7"/>
+          </p:cNvCxnSpPr>
+          <p:nvPr/>
+        </p:nvCxnSpPr>
+        <p:spPr>
+          <a:xfrm flipV="1">
+            <a:off x="9855724" y="5537896"/>
+            <a:ext cx="0" cy="507665"/>
+          </a:xfrm>
+          <a:prstGeom prst="straightConnector1">
+            <a:avLst/>
+          </a:prstGeom>
+          <a:ln>
+            <a:solidFill>
+              <a:schemeClr val="tx1"/>
+            </a:solidFill>
+            <a:tailEnd type="triangle"/>
+          </a:ln>
+        </p:spPr>
+        <p:style>
+          <a:lnRef idx="2">
+            <a:schemeClr val="accent1"/>
+          </a:lnRef>
+          <a:fillRef idx="0">
+            <a:schemeClr val="accent1"/>
+          </a:fillRef>
+          <a:effectRef idx="1">
+            <a:schemeClr val="accent1"/>
+          </a:effectRef>
+          <a:fontRef idx="minor">
+            <a:schemeClr val="tx1"/>
+          </a:fontRef>
+        </p:style>
+      </p:cxnSp>
+      <p:sp>
+        <p:nvSpPr>
+          <p:cNvPr id="93" name="TextBox 92">
+            <a:extLst>
+              <a:ext uri="{FF2B5EF4-FFF2-40B4-BE49-F238E27FC236}">
+                <a16:creationId xmlns:a16="http://schemas.microsoft.com/office/drawing/2014/main" id="{C537756D-3736-7379-95F3-8D616CA691EE}"/>
+              </a:ext>
+            </a:extLst>
+          </p:cNvPr>
+          <p:cNvSpPr txBox="1"/>
+          <p:nvPr/>
+        </p:nvSpPr>
+        <p:spPr>
+          <a:xfrm>
+            <a:off x="9883937" y="992612"/>
+            <a:ext cx="1117721" cy="307777"/>
+          </a:xfrm>
+          <a:prstGeom prst="rect">
+            <a:avLst/>
+          </a:prstGeom>
+          <a:noFill/>
+        </p:spPr>
+        <p:txBody>
+          <a:bodyPr wrap="square" rtlCol="0">
+            <a:spAutoFit/>
+          </a:bodyPr>
+          <a:lstStyle/>
+          <a:p>
+            <a:pPr algn="ctr"/>
+            <a:r>
+              <a:rPr lang="en-US" sz="1400" dirty="0"/>
+              <a:t>Cos(2</a:t>
+            </a:r>
+            <a:r>
+              <a:rPr lang="el-GR" sz="1400" dirty="0"/>
+              <a:t>π</a:t>
+            </a:r>
+            <a:r>
+              <a:rPr lang="en-US" sz="1400" dirty="0" err="1"/>
+              <a:t>F</a:t>
+            </a:r>
+            <a:r>
+              <a:rPr lang="en-US" sz="1400" baseline="-25000" dirty="0" err="1"/>
+              <a:t>c</a:t>
+            </a:r>
+            <a:r>
+              <a:rPr lang="en-US" sz="1400" dirty="0" err="1"/>
+              <a:t>t</a:t>
+            </a:r>
+            <a:r>
+              <a:rPr lang="en-US" sz="1400" dirty="0"/>
+              <a:t>)</a:t>
+            </a:r>
+            <a:endParaRPr lang="en-US" dirty="0"/>
+          </a:p>
+        </p:txBody>
+      </p:sp>
+      <p:sp>
+        <p:nvSpPr>
+          <p:cNvPr id="94" name="TextBox 93">
+            <a:extLst>
+              <a:ext uri="{FF2B5EF4-FFF2-40B4-BE49-F238E27FC236}">
+                <a16:creationId xmlns:a16="http://schemas.microsoft.com/office/drawing/2014/main" id="{462201DA-2A2A-213B-D9F2-792D017AD00E}"/>
+              </a:ext>
+            </a:extLst>
+          </p:cNvPr>
+          <p:cNvSpPr txBox="1"/>
+          <p:nvPr/>
+        </p:nvSpPr>
+        <p:spPr>
+          <a:xfrm>
+            <a:off x="9893882" y="5577359"/>
+            <a:ext cx="1117721" cy="307777"/>
+          </a:xfrm>
+          <a:prstGeom prst="rect">
+            <a:avLst/>
+          </a:prstGeom>
+          <a:noFill/>
+        </p:spPr>
+        <p:txBody>
+          <a:bodyPr wrap="square" rtlCol="0">
+            <a:spAutoFit/>
+          </a:bodyPr>
+          <a:lstStyle/>
+          <a:p>
+            <a:pPr algn="ctr"/>
+            <a:r>
+              <a:rPr lang="en-US" sz="1400" dirty="0"/>
+              <a:t>-Sin(2</a:t>
+            </a:r>
+            <a:r>
+              <a:rPr lang="el-GR" sz="1400" dirty="0"/>
+              <a:t>π</a:t>
+            </a:r>
+            <a:r>
+              <a:rPr lang="en-US" sz="1400" dirty="0" err="1"/>
+              <a:t>F</a:t>
+            </a:r>
+            <a:r>
+              <a:rPr lang="en-US" sz="1400" baseline="-25000" dirty="0" err="1"/>
+              <a:t>c</a:t>
+            </a:r>
+            <a:r>
+              <a:rPr lang="en-US" sz="1400" dirty="0" err="1"/>
+              <a:t>t</a:t>
+            </a:r>
+            <a:r>
+              <a:rPr lang="en-US" sz="1400" dirty="0"/>
+              <a:t>)</a:t>
+            </a:r>
+            <a:endParaRPr lang="en-US" dirty="0"/>
+          </a:p>
+        </p:txBody>
+      </p:sp>
+      <p:sp>
+        <p:nvSpPr>
+          <p:cNvPr id="96" name="Rectangle 95">
+            <a:extLst>
+              <a:ext uri="{FF2B5EF4-FFF2-40B4-BE49-F238E27FC236}">
+                <a16:creationId xmlns:a16="http://schemas.microsoft.com/office/drawing/2014/main" id="{538C1DEA-E48B-4D31-44F1-DD6AD1682824}"/>
+              </a:ext>
+            </a:extLst>
+          </p:cNvPr>
+          <p:cNvSpPr/>
+          <p:nvPr/>
+        </p:nvSpPr>
+        <p:spPr>
+          <a:xfrm rot="10800000">
+            <a:off x="11153345" y="3103178"/>
+            <a:ext cx="524900" cy="528361"/>
+          </a:xfrm>
+          <a:prstGeom prst="rect">
+            <a:avLst/>
+          </a:prstGeom>
+          <a:noFill/>
+          <a:ln w="38100">
+            <a:solidFill>
+              <a:schemeClr val="tx1"/>
+            </a:solidFill>
+          </a:ln>
+        </p:spPr>
+        <p:style>
+          <a:lnRef idx="2">
+            <a:schemeClr val="accent1">
+              <a:shade val="15000"/>
+            </a:schemeClr>
+          </a:lnRef>
+          <a:fillRef idx="1">
+            <a:schemeClr val="accent1"/>
+          </a:fillRef>
+          <a:effectRef idx="0">
+            <a:schemeClr val="accent1"/>
+          </a:effectRef>
+          <a:fontRef idx="minor">
+            <a:schemeClr val="lt1"/>
+          </a:fontRef>
+        </p:style>
+        <p:txBody>
+          <a:bodyPr rtlCol="0" anchor="ctr"/>
+          <a:lstStyle/>
+          <a:p>
+            <a:pPr algn="ctr"/>
+            <a:endParaRPr lang="en-US"/>
+          </a:p>
+        </p:txBody>
+      </p:sp>
+      <p:sp>
+        <p:nvSpPr>
+          <p:cNvPr id="97" name="TextBox 96">
+            <a:extLst>
+              <a:ext uri="{FF2B5EF4-FFF2-40B4-BE49-F238E27FC236}">
+                <a16:creationId xmlns:a16="http://schemas.microsoft.com/office/drawing/2014/main" id="{79FE0A24-653F-D7A7-B287-9F7EA2113CDC}"/>
+              </a:ext>
+            </a:extLst>
+          </p:cNvPr>
+          <p:cNvSpPr txBox="1"/>
+          <p:nvPr/>
+        </p:nvSpPr>
+        <p:spPr>
+          <a:xfrm>
+            <a:off x="11133070" y="3136526"/>
+            <a:ext cx="565450" cy="461665"/>
+          </a:xfrm>
+          <a:prstGeom prst="rect">
+            <a:avLst/>
+          </a:prstGeom>
+          <a:noFill/>
+        </p:spPr>
+        <p:txBody>
+          <a:bodyPr wrap="square" rtlCol="0">
+            <a:spAutoFit/>
+          </a:bodyPr>
+          <a:lstStyle/>
+          <a:p>
+            <a:pPr algn="ctr"/>
+            <a:r>
+              <a:rPr lang="el-GR" sz="2400" dirty="0"/>
+              <a:t>Σ</a:t>
+            </a:r>
+            <a:endParaRPr lang="en-US" sz="3200" dirty="0"/>
+          </a:p>
+        </p:txBody>
+      </p:sp>
+      <p:cxnSp>
+        <p:nvCxnSpPr>
+          <p:cNvPr id="102" name="Straight Arrow Connector 101">
+            <a:extLst>
+              <a:ext uri="{FF2B5EF4-FFF2-40B4-BE49-F238E27FC236}">
+                <a16:creationId xmlns:a16="http://schemas.microsoft.com/office/drawing/2014/main" id="{011BDB31-52AB-D8CC-3D41-B93D82C498CA}"/>
+              </a:ext>
+            </a:extLst>
+          </p:cNvPr>
+          <p:cNvCxnSpPr>
+            <a:cxnSpLocks/>
+            <a:stCxn id="97" idx="3"/>
+          </p:cNvCxnSpPr>
+          <p:nvPr/>
+        </p:nvCxnSpPr>
+        <p:spPr>
+          <a:xfrm flipV="1">
+            <a:off x="11698520" y="3367358"/>
+            <a:ext cx="299345" cy="1"/>
+          </a:xfrm>
+          <a:prstGeom prst="straightConnector1">
+            <a:avLst/>
+          </a:prstGeom>
+          <a:ln>
+            <a:solidFill>
+              <a:schemeClr val="tx1"/>
+            </a:solidFill>
+            <a:tailEnd type="triangle"/>
+          </a:ln>
+        </p:spPr>
+        <p:style>
+          <a:lnRef idx="2">
+            <a:schemeClr val="accent1"/>
+          </a:lnRef>
+          <a:fillRef idx="0">
+            <a:schemeClr val="accent1"/>
+          </a:fillRef>
+          <a:effectRef idx="1">
+            <a:schemeClr val="accent1"/>
+          </a:effectRef>
+          <a:fontRef idx="minor">
+            <a:schemeClr val="tx1"/>
+          </a:fontRef>
+        </p:style>
+      </p:cxnSp>
+      <p:sp>
+        <p:nvSpPr>
+          <p:cNvPr id="105" name="TextBox 104">
+            <a:extLst>
+              <a:ext uri="{FF2B5EF4-FFF2-40B4-BE49-F238E27FC236}">
+                <a16:creationId xmlns:a16="http://schemas.microsoft.com/office/drawing/2014/main" id="{B16C8EC7-DBC6-6B4C-5EBA-12C9B96D5A6B}"/>
+              </a:ext>
+            </a:extLst>
+          </p:cNvPr>
+          <p:cNvSpPr txBox="1"/>
+          <p:nvPr/>
+        </p:nvSpPr>
+        <p:spPr>
+          <a:xfrm>
+            <a:off x="11339575" y="2949289"/>
+            <a:ext cx="1117721" cy="307777"/>
+          </a:xfrm>
+          <a:prstGeom prst="rect">
+            <a:avLst/>
+          </a:prstGeom>
+          <a:noFill/>
+        </p:spPr>
+        <p:txBody>
+          <a:bodyPr wrap="square" rtlCol="0">
+            <a:spAutoFit/>
+          </a:bodyPr>
+          <a:lstStyle/>
+          <a:p>
+            <a:pPr algn="ctr"/>
+            <a:r>
+              <a:rPr lang="en-US" sz="1400" dirty="0"/>
+              <a:t>S(t)</a:t>
+            </a:r>
+            <a:endParaRPr lang="en-US" dirty="0"/>
+          </a:p>
+        </p:txBody>
+      </p:sp>
     </p:spTree>
     <p:extLst>
       <p:ext uri="{BB962C8B-B14F-4D97-AF65-F5344CB8AC3E}">
-        <p14:creationId xmlns:p14="http://schemas.microsoft.com/office/powerpoint/2010/main" val="2271414276"/>
+        <p14:creationId xmlns:p14="http://schemas.microsoft.com/office/powerpoint/2010/main" val="3250743959"/>
       </p:ext>
     </p:extLst>
   </p:cSld>
@@ -10148,7 +12632,7 @@
         <p:cNvPr id="1" name="">
           <a:extLst>
             <a:ext uri="{FF2B5EF4-FFF2-40B4-BE49-F238E27FC236}">
-              <a16:creationId xmlns:a16="http://schemas.microsoft.com/office/drawing/2014/main" id="{D99442FD-ADEC-69FD-BDB1-1E3A35FDD6E0}"/>
+              <a16:creationId xmlns:a16="http://schemas.microsoft.com/office/drawing/2014/main" id="{ECE26068-228B-00A4-5FA3-88C1F5ADA46B}"/>
             </a:ext>
           </a:extLst>
         </p:cNvPr>
@@ -10163,10 +12647,389 @@
           <a:chExt cx="0" cy="0"/>
         </a:xfrm>
       </p:grpSpPr>
+      <p:sp>
+        <p:nvSpPr>
+          <p:cNvPr id="2" name="Title 1">
+            <a:extLst>
+              <a:ext uri="{FF2B5EF4-FFF2-40B4-BE49-F238E27FC236}">
+                <a16:creationId xmlns:a16="http://schemas.microsoft.com/office/drawing/2014/main" id="{BCF19012-D6E2-1CD4-5A44-87C8CDB449F2}"/>
+              </a:ext>
+            </a:extLst>
+          </p:cNvPr>
+          <p:cNvSpPr txBox="1">
+            <a:spLocks/>
+          </p:cNvSpPr>
+          <p:nvPr/>
+        </p:nvSpPr>
+        <p:spPr>
+          <a:xfrm>
+            <a:off x="4637461" y="246049"/>
+            <a:ext cx="2917078" cy="371219"/>
+          </a:xfrm>
+          <a:prstGeom prst="rect">
+            <a:avLst/>
+          </a:prstGeom>
+        </p:spPr>
+        <p:txBody>
+          <a:bodyPr vert="horz" lIns="91440" tIns="45720" rIns="91440" bIns="45720" rtlCol="0" anchor="b">
+            <a:normAutofit fontScale="75000" lnSpcReduction="20000"/>
+          </a:bodyPr>
+          <a:lstStyle>
+            <a:lvl1pPr algn="ctr" defTabSz="914400" rtl="0" eaLnBrk="1" latinLnBrk="0" hangingPunct="1">
+              <a:lnSpc>
+                <a:spcPct val="90000"/>
+              </a:lnSpc>
+              <a:spcBef>
+                <a:spcPct val="0"/>
+              </a:spcBef>
+              <a:buNone/>
+              <a:defRPr sz="6000" kern="1200">
+                <a:solidFill>
+                  <a:schemeClr val="tx1"/>
+                </a:solidFill>
+                <a:latin typeface="+mj-lt"/>
+                <a:ea typeface="+mj-ea"/>
+                <a:cs typeface="+mj-cs"/>
+              </a:defRPr>
+            </a:lvl1pPr>
+          </a:lstStyle>
+          <a:p>
+            <a:r>
+              <a:rPr lang="en-US" sz="3200" dirty="0"/>
+              <a:t>Demodulation</a:t>
+            </a:r>
+          </a:p>
+        </p:txBody>
+      </p:sp>
+      <p:sp>
+        <p:nvSpPr>
+          <p:cNvPr id="3" name="Rectangle 2">
+            <a:hlinkClick r:id="rId3" action="ppaction://hlinksldjump"/>
+            <a:extLst>
+              <a:ext uri="{FF2B5EF4-FFF2-40B4-BE49-F238E27FC236}">
+                <a16:creationId xmlns:a16="http://schemas.microsoft.com/office/drawing/2014/main" id="{F72F9A31-2D79-7C4A-619D-F1C438128288}"/>
+              </a:ext>
+            </a:extLst>
+          </p:cNvPr>
+          <p:cNvSpPr/>
+          <p:nvPr/>
+        </p:nvSpPr>
+        <p:spPr>
+          <a:xfrm>
+            <a:off x="2208032" y="1935678"/>
+            <a:ext cx="1760288" cy="1764860"/>
+          </a:xfrm>
+          <a:prstGeom prst="rect">
+            <a:avLst/>
+          </a:prstGeom>
+          <a:noFill/>
+          <a:ln w="38100">
+            <a:solidFill>
+              <a:schemeClr val="tx1"/>
+            </a:solidFill>
+          </a:ln>
+        </p:spPr>
+        <p:style>
+          <a:lnRef idx="2">
+            <a:schemeClr val="accent1">
+              <a:shade val="15000"/>
+            </a:schemeClr>
+          </a:lnRef>
+          <a:fillRef idx="1">
+            <a:schemeClr val="accent1"/>
+          </a:fillRef>
+          <a:effectRef idx="0">
+            <a:schemeClr val="accent1"/>
+          </a:effectRef>
+          <a:fontRef idx="minor">
+            <a:schemeClr val="lt1"/>
+          </a:fontRef>
+        </p:style>
+        <p:txBody>
+          <a:bodyPr rtlCol="0" anchor="ctr"/>
+          <a:lstStyle/>
+          <a:p>
+            <a:pPr algn="ctr"/>
+            <a:endParaRPr lang="en-US"/>
+          </a:p>
+        </p:txBody>
+      </p:sp>
+      <p:sp>
+        <p:nvSpPr>
+          <p:cNvPr id="5" name="TextBox 4">
+            <a:extLst>
+              <a:ext uri="{FF2B5EF4-FFF2-40B4-BE49-F238E27FC236}">
+                <a16:creationId xmlns:a16="http://schemas.microsoft.com/office/drawing/2014/main" id="{21FD87E3-DBC6-E4B6-69C0-E63A5189FE28}"/>
+              </a:ext>
+            </a:extLst>
+          </p:cNvPr>
+          <p:cNvSpPr txBox="1"/>
+          <p:nvPr/>
+        </p:nvSpPr>
+        <p:spPr>
+          <a:xfrm>
+            <a:off x="2208032" y="2587275"/>
+            <a:ext cx="1760289" cy="461665"/>
+          </a:xfrm>
+          <a:prstGeom prst="rect">
+            <a:avLst/>
+          </a:prstGeom>
+          <a:noFill/>
+        </p:spPr>
+        <p:txBody>
+          <a:bodyPr wrap="square" rtlCol="0">
+            <a:spAutoFit/>
+          </a:bodyPr>
+          <a:lstStyle/>
+          <a:p>
+            <a:pPr algn="ctr"/>
+            <a:r>
+              <a:rPr lang="en-US" sz="2400" dirty="0"/>
+              <a:t>BPSK</a:t>
+            </a:r>
+            <a:endParaRPr lang="en-US" dirty="0"/>
+          </a:p>
+        </p:txBody>
+      </p:sp>
+      <p:sp>
+        <p:nvSpPr>
+          <p:cNvPr id="6" name="Rectangle 5">
+            <a:hlinkClick r:id="rId4" action="ppaction://hlinksldjump"/>
+            <a:extLst>
+              <a:ext uri="{FF2B5EF4-FFF2-40B4-BE49-F238E27FC236}">
+                <a16:creationId xmlns:a16="http://schemas.microsoft.com/office/drawing/2014/main" id="{2E3F93B5-972B-7B54-0652-9B999433341F}"/>
+              </a:ext>
+            </a:extLst>
+          </p:cNvPr>
+          <p:cNvSpPr/>
+          <p:nvPr/>
+        </p:nvSpPr>
+        <p:spPr>
+          <a:xfrm>
+            <a:off x="8081175" y="1947602"/>
+            <a:ext cx="1760288" cy="1764860"/>
+          </a:xfrm>
+          <a:prstGeom prst="rect">
+            <a:avLst/>
+          </a:prstGeom>
+          <a:noFill/>
+          <a:ln w="38100">
+            <a:solidFill>
+              <a:schemeClr val="tx1"/>
+            </a:solidFill>
+          </a:ln>
+        </p:spPr>
+        <p:style>
+          <a:lnRef idx="2">
+            <a:schemeClr val="accent1">
+              <a:shade val="15000"/>
+            </a:schemeClr>
+          </a:lnRef>
+          <a:fillRef idx="1">
+            <a:schemeClr val="accent1"/>
+          </a:fillRef>
+          <a:effectRef idx="0">
+            <a:schemeClr val="accent1"/>
+          </a:effectRef>
+          <a:fontRef idx="minor">
+            <a:schemeClr val="lt1"/>
+          </a:fontRef>
+        </p:style>
+        <p:txBody>
+          <a:bodyPr rtlCol="0" anchor="ctr"/>
+          <a:lstStyle/>
+          <a:p>
+            <a:pPr algn="ctr"/>
+            <a:endParaRPr lang="en-US"/>
+          </a:p>
+        </p:txBody>
+      </p:sp>
+      <p:sp>
+        <p:nvSpPr>
+          <p:cNvPr id="7" name="TextBox 6">
+            <a:extLst>
+              <a:ext uri="{FF2B5EF4-FFF2-40B4-BE49-F238E27FC236}">
+                <a16:creationId xmlns:a16="http://schemas.microsoft.com/office/drawing/2014/main" id="{B53FDF38-6844-4C08-7329-19CB0C2229F5}"/>
+              </a:ext>
+            </a:extLst>
+          </p:cNvPr>
+          <p:cNvSpPr txBox="1"/>
+          <p:nvPr/>
+        </p:nvSpPr>
+        <p:spPr>
+          <a:xfrm>
+            <a:off x="8081175" y="2599199"/>
+            <a:ext cx="1760289" cy="461665"/>
+          </a:xfrm>
+          <a:prstGeom prst="rect">
+            <a:avLst/>
+          </a:prstGeom>
+          <a:noFill/>
+        </p:spPr>
+        <p:txBody>
+          <a:bodyPr wrap="square" rtlCol="0">
+            <a:spAutoFit/>
+          </a:bodyPr>
+          <a:lstStyle/>
+          <a:p>
+            <a:pPr algn="ctr"/>
+            <a:r>
+              <a:rPr lang="en-US" sz="2400" dirty="0"/>
+              <a:t>8-PSK</a:t>
+            </a:r>
+            <a:endParaRPr lang="en-US" dirty="0"/>
+          </a:p>
+        </p:txBody>
+      </p:sp>
+      <p:cxnSp>
+        <p:nvCxnSpPr>
+          <p:cNvPr id="9" name="Straight Connector 8">
+            <a:extLst>
+              <a:ext uri="{FF2B5EF4-FFF2-40B4-BE49-F238E27FC236}">
+                <a16:creationId xmlns:a16="http://schemas.microsoft.com/office/drawing/2014/main" id="{B3ED0A5A-C8D6-225F-1234-9A15F8046972}"/>
+              </a:ext>
+            </a:extLst>
+          </p:cNvPr>
+          <p:cNvCxnSpPr>
+            <a:cxnSpLocks/>
+          </p:cNvCxnSpPr>
+          <p:nvPr/>
+        </p:nvCxnSpPr>
+        <p:spPr>
+          <a:xfrm>
+            <a:off x="6096000" y="1686296"/>
+            <a:ext cx="0" cy="3289465"/>
+          </a:xfrm>
+          <a:prstGeom prst="line">
+            <a:avLst/>
+          </a:prstGeom>
+          <a:ln>
+            <a:solidFill>
+              <a:schemeClr val="tx1"/>
+            </a:solidFill>
+          </a:ln>
+        </p:spPr>
+        <p:style>
+          <a:lnRef idx="2">
+            <a:schemeClr val="accent1"/>
+          </a:lnRef>
+          <a:fillRef idx="0">
+            <a:schemeClr val="accent1"/>
+          </a:fillRef>
+          <a:effectRef idx="1">
+            <a:schemeClr val="accent1"/>
+          </a:effectRef>
+          <a:fontRef idx="minor">
+            <a:schemeClr val="tx1"/>
+          </a:fontRef>
+        </p:style>
+      </p:cxnSp>
+      <p:sp>
+        <p:nvSpPr>
+          <p:cNvPr id="12" name="TextBox 11">
+            <a:extLst>
+              <a:ext uri="{FF2B5EF4-FFF2-40B4-BE49-F238E27FC236}">
+                <a16:creationId xmlns:a16="http://schemas.microsoft.com/office/drawing/2014/main" id="{DAD89B49-55C8-0401-6C4B-7B318FADB4F8}"/>
+              </a:ext>
+            </a:extLst>
+          </p:cNvPr>
+          <p:cNvSpPr txBox="1"/>
+          <p:nvPr/>
+        </p:nvSpPr>
+        <p:spPr>
+          <a:xfrm>
+            <a:off x="1905601" y="4352135"/>
+            <a:ext cx="2365150" cy="1200329"/>
+          </a:xfrm>
+          <a:prstGeom prst="rect">
+            <a:avLst/>
+          </a:prstGeom>
+          <a:noFill/>
+        </p:spPr>
+        <p:txBody>
+          <a:bodyPr wrap="square" rtlCol="0">
+            <a:spAutoFit/>
+          </a:bodyPr>
+          <a:lstStyle/>
+          <a:p>
+            <a:pPr algn="ctr"/>
+            <a:r>
+              <a:rPr lang="en-US" sz="2400" dirty="0"/>
+              <a:t>For pulse train</a:t>
+            </a:r>
+          </a:p>
+          <a:p>
+            <a:pPr algn="ctr"/>
+            <a:r>
+              <a:rPr lang="en-US" sz="2400" dirty="0"/>
+              <a:t> and </a:t>
+            </a:r>
+          </a:p>
+          <a:p>
+            <a:pPr algn="ctr"/>
+            <a:r>
+              <a:rPr lang="en-US" sz="2400" dirty="0"/>
+              <a:t>control signal </a:t>
+            </a:r>
+            <a:endParaRPr lang="en-US" dirty="0"/>
+          </a:p>
+        </p:txBody>
+      </p:sp>
+      <p:sp>
+        <p:nvSpPr>
+          <p:cNvPr id="13" name="TextBox 12">
+            <a:extLst>
+              <a:ext uri="{FF2B5EF4-FFF2-40B4-BE49-F238E27FC236}">
+                <a16:creationId xmlns:a16="http://schemas.microsoft.com/office/drawing/2014/main" id="{559A2654-F315-CA6D-AA6C-07572271327F}"/>
+              </a:ext>
+            </a:extLst>
+          </p:cNvPr>
+          <p:cNvSpPr txBox="1"/>
+          <p:nvPr/>
+        </p:nvSpPr>
+        <p:spPr>
+          <a:xfrm>
+            <a:off x="7778744" y="4361641"/>
+            <a:ext cx="2365150" cy="1200329"/>
+          </a:xfrm>
+          <a:prstGeom prst="rect">
+            <a:avLst/>
+          </a:prstGeom>
+          <a:noFill/>
+        </p:spPr>
+        <p:txBody>
+          <a:bodyPr wrap="square" rtlCol="0">
+            <a:spAutoFit/>
+          </a:bodyPr>
+          <a:lstStyle/>
+          <a:p>
+            <a:pPr algn="ctr"/>
+            <a:r>
+              <a:rPr lang="en-US" sz="2400" dirty="0"/>
+              <a:t>For data</a:t>
+            </a:r>
+          </a:p>
+          <a:p>
+            <a:pPr algn="ctr"/>
+            <a:r>
+              <a:rPr lang="en-US" sz="2400" dirty="0"/>
+              <a:t> and </a:t>
+            </a:r>
+          </a:p>
+          <a:p>
+            <a:pPr algn="ctr"/>
+            <a:r>
+              <a:rPr lang="en-US" sz="2400" dirty="0"/>
+              <a:t>CRC </a:t>
+            </a:r>
+            <a:endParaRPr lang="en-US" dirty="0"/>
+          </a:p>
+        </p:txBody>
+      </p:sp>
     </p:spTree>
     <p:extLst>
       <p:ext uri="{BB962C8B-B14F-4D97-AF65-F5344CB8AC3E}">
-        <p14:creationId xmlns:p14="http://schemas.microsoft.com/office/powerpoint/2010/main" val="2366238698"/>
+        <p14:creationId xmlns:p14="http://schemas.microsoft.com/office/powerpoint/2010/main" val="1020098486"/>
       </p:ext>
     </p:extLst>
   </p:cSld>
@@ -10196,7 +13059,7 @@
         <p:cNvPr id="1" name="">
           <a:extLst>
             <a:ext uri="{FF2B5EF4-FFF2-40B4-BE49-F238E27FC236}">
-              <a16:creationId xmlns:a16="http://schemas.microsoft.com/office/drawing/2014/main" id="{77F85BE5-C0E2-6AE7-4318-F47AFF1E57AD}"/>
+              <a16:creationId xmlns:a16="http://schemas.microsoft.com/office/drawing/2014/main" id="{8BC827D4-E54E-4F2B-5A16-F97CEDD2C349}"/>
             </a:ext>
           </a:extLst>
         </p:cNvPr>
@@ -10211,23 +13074,1873 @@
           <a:chExt cx="0" cy="0"/>
         </a:xfrm>
       </p:grpSpPr>
+      <p:sp>
+        <p:nvSpPr>
+          <p:cNvPr id="6" name="Oval 5">
+            <a:extLst>
+              <a:ext uri="{FF2B5EF4-FFF2-40B4-BE49-F238E27FC236}">
+                <a16:creationId xmlns:a16="http://schemas.microsoft.com/office/drawing/2014/main" id="{730DEF6E-8E81-8A03-2C73-2935D0D302E7}"/>
+              </a:ext>
+            </a:extLst>
+          </p:cNvPr>
+          <p:cNvSpPr/>
+          <p:nvPr/>
+        </p:nvSpPr>
+        <p:spPr>
+          <a:xfrm rot="8243572">
+            <a:off x="3500338" y="2286774"/>
+            <a:ext cx="400181" cy="400181"/>
+          </a:xfrm>
+          <a:prstGeom prst="ellipse">
+            <a:avLst/>
+          </a:prstGeom>
+          <a:noFill/>
+          <a:ln>
+            <a:solidFill>
+              <a:schemeClr val="tx1"/>
+            </a:solidFill>
+          </a:ln>
+        </p:spPr>
+        <p:style>
+          <a:lnRef idx="2">
+            <a:schemeClr val="accent1">
+              <a:shade val="15000"/>
+            </a:schemeClr>
+          </a:lnRef>
+          <a:fillRef idx="1">
+            <a:schemeClr val="accent1"/>
+          </a:fillRef>
+          <a:effectRef idx="0">
+            <a:schemeClr val="accent1"/>
+          </a:effectRef>
+          <a:fontRef idx="minor">
+            <a:schemeClr val="lt1"/>
+          </a:fontRef>
+        </p:style>
+        <p:txBody>
+          <a:bodyPr rtlCol="0" anchor="ctr"/>
+          <a:lstStyle/>
+          <a:p>
+            <a:pPr algn="ctr"/>
+            <a:endParaRPr lang="en-US"/>
+          </a:p>
+        </p:txBody>
+      </p:sp>
+      <p:cxnSp>
+        <p:nvCxnSpPr>
+          <p:cNvPr id="7" name="Straight Connector 6">
+            <a:extLst>
+              <a:ext uri="{FF2B5EF4-FFF2-40B4-BE49-F238E27FC236}">
+                <a16:creationId xmlns:a16="http://schemas.microsoft.com/office/drawing/2014/main" id="{A7C5B95B-0758-484A-2A0D-4D7753D82D19}"/>
+              </a:ext>
+            </a:extLst>
+          </p:cNvPr>
+          <p:cNvCxnSpPr>
+            <a:cxnSpLocks/>
+          </p:cNvCxnSpPr>
+          <p:nvPr/>
+        </p:nvCxnSpPr>
+        <p:spPr>
+          <a:xfrm rot="8243572">
+            <a:off x="3700429" y="2286774"/>
+            <a:ext cx="0" cy="400181"/>
+          </a:xfrm>
+          <a:prstGeom prst="line">
+            <a:avLst/>
+          </a:prstGeom>
+          <a:ln>
+            <a:solidFill>
+              <a:schemeClr val="tx1"/>
+            </a:solidFill>
+          </a:ln>
+        </p:spPr>
+        <p:style>
+          <a:lnRef idx="2">
+            <a:schemeClr val="accent1"/>
+          </a:lnRef>
+          <a:fillRef idx="0">
+            <a:schemeClr val="accent1"/>
+          </a:fillRef>
+          <a:effectRef idx="1">
+            <a:schemeClr val="accent1"/>
+          </a:effectRef>
+          <a:fontRef idx="minor">
+            <a:schemeClr val="tx1"/>
+          </a:fontRef>
+        </p:style>
+      </p:cxnSp>
+      <p:cxnSp>
+        <p:nvCxnSpPr>
+          <p:cNvPr id="8" name="Straight Connector 7">
+            <a:extLst>
+              <a:ext uri="{FF2B5EF4-FFF2-40B4-BE49-F238E27FC236}">
+                <a16:creationId xmlns:a16="http://schemas.microsoft.com/office/drawing/2014/main" id="{D5BD2463-171F-0E0E-97F1-0E7B2F4F8115}"/>
+              </a:ext>
+            </a:extLst>
+          </p:cNvPr>
+          <p:cNvCxnSpPr>
+            <a:cxnSpLocks/>
+          </p:cNvCxnSpPr>
+          <p:nvPr/>
+        </p:nvCxnSpPr>
+        <p:spPr>
+          <a:xfrm rot="8243572" flipH="1">
+            <a:off x="3500338" y="2486865"/>
+            <a:ext cx="400181" cy="0"/>
+          </a:xfrm>
+          <a:prstGeom prst="line">
+            <a:avLst/>
+          </a:prstGeom>
+          <a:ln>
+            <a:solidFill>
+              <a:schemeClr val="tx1"/>
+            </a:solidFill>
+          </a:ln>
+        </p:spPr>
+        <p:style>
+          <a:lnRef idx="2">
+            <a:schemeClr val="accent1"/>
+          </a:lnRef>
+          <a:fillRef idx="0">
+            <a:schemeClr val="accent1"/>
+          </a:fillRef>
+          <a:effectRef idx="1">
+            <a:schemeClr val="accent1"/>
+          </a:effectRef>
+          <a:fontRef idx="minor">
+            <a:schemeClr val="tx1"/>
+          </a:fontRef>
+        </p:style>
+      </p:cxnSp>
+      <p:cxnSp>
+        <p:nvCxnSpPr>
+          <p:cNvPr id="9" name="Straight Arrow Connector 8">
+            <a:extLst>
+              <a:ext uri="{FF2B5EF4-FFF2-40B4-BE49-F238E27FC236}">
+                <a16:creationId xmlns:a16="http://schemas.microsoft.com/office/drawing/2014/main" id="{50A389C4-FC9C-50DB-0664-EB497B0BF205}"/>
+              </a:ext>
+            </a:extLst>
+          </p:cNvPr>
+          <p:cNvCxnSpPr>
+            <a:cxnSpLocks/>
+            <a:endCxn id="6" idx="5"/>
+          </p:cNvCxnSpPr>
+          <p:nvPr/>
+        </p:nvCxnSpPr>
+        <p:spPr>
+          <a:xfrm flipV="1">
+            <a:off x="1629988" y="2478510"/>
+            <a:ext cx="1870524" cy="8354"/>
+          </a:xfrm>
+          <a:prstGeom prst="straightConnector1">
+            <a:avLst/>
+          </a:prstGeom>
+          <a:ln>
+            <a:solidFill>
+              <a:schemeClr val="tx1"/>
+            </a:solidFill>
+            <a:tailEnd type="triangle"/>
+          </a:ln>
+        </p:spPr>
+        <p:style>
+          <a:lnRef idx="2">
+            <a:schemeClr val="accent1"/>
+          </a:lnRef>
+          <a:fillRef idx="0">
+            <a:schemeClr val="accent1"/>
+          </a:fillRef>
+          <a:effectRef idx="1">
+            <a:schemeClr val="accent1"/>
+          </a:effectRef>
+          <a:fontRef idx="minor">
+            <a:schemeClr val="tx1"/>
+          </a:fontRef>
+        </p:style>
+      </p:cxnSp>
+      <p:cxnSp>
+        <p:nvCxnSpPr>
+          <p:cNvPr id="10" name="Straight Arrow Connector 9">
+            <a:extLst>
+              <a:ext uri="{FF2B5EF4-FFF2-40B4-BE49-F238E27FC236}">
+                <a16:creationId xmlns:a16="http://schemas.microsoft.com/office/drawing/2014/main" id="{F2760B2F-59EA-7261-1715-3A101B184AF5}"/>
+              </a:ext>
+            </a:extLst>
+          </p:cNvPr>
+          <p:cNvCxnSpPr>
+            <a:cxnSpLocks/>
+            <a:stCxn id="12" idx="3"/>
+            <a:endCxn id="6" idx="7"/>
+          </p:cNvCxnSpPr>
+          <p:nvPr/>
+        </p:nvCxnSpPr>
+        <p:spPr>
+          <a:xfrm flipV="1">
+            <a:off x="3107805" y="2686781"/>
+            <a:ext cx="584269" cy="1915333"/>
+          </a:xfrm>
+          <a:prstGeom prst="bentConnector2">
+            <a:avLst/>
+          </a:prstGeom>
+          <a:ln>
+            <a:solidFill>
+              <a:schemeClr val="tx1"/>
+            </a:solidFill>
+            <a:tailEnd type="triangle"/>
+          </a:ln>
+        </p:spPr>
+        <p:style>
+          <a:lnRef idx="2">
+            <a:schemeClr val="accent1"/>
+          </a:lnRef>
+          <a:fillRef idx="0">
+            <a:schemeClr val="accent1"/>
+          </a:fillRef>
+          <a:effectRef idx="1">
+            <a:schemeClr val="accent1"/>
+          </a:effectRef>
+          <a:fontRef idx="minor">
+            <a:schemeClr val="tx1"/>
+          </a:fontRef>
+        </p:style>
+      </p:cxnSp>
+      <p:sp>
+        <p:nvSpPr>
+          <p:cNvPr id="12" name="Rectangle 11">
+            <a:extLst>
+              <a:ext uri="{FF2B5EF4-FFF2-40B4-BE49-F238E27FC236}">
+                <a16:creationId xmlns:a16="http://schemas.microsoft.com/office/drawing/2014/main" id="{002FB7B6-39CE-04B9-D6F4-08C896BED1E3}"/>
+              </a:ext>
+            </a:extLst>
+          </p:cNvPr>
+          <p:cNvSpPr/>
+          <p:nvPr/>
+        </p:nvSpPr>
+        <p:spPr>
+          <a:xfrm>
+            <a:off x="1990084" y="4216564"/>
+            <a:ext cx="1117721" cy="771099"/>
+          </a:xfrm>
+          <a:prstGeom prst="rect">
+            <a:avLst/>
+          </a:prstGeom>
+          <a:noFill/>
+          <a:ln w="38100">
+            <a:solidFill>
+              <a:schemeClr val="tx1"/>
+            </a:solidFill>
+          </a:ln>
+        </p:spPr>
+        <p:style>
+          <a:lnRef idx="2">
+            <a:schemeClr val="accent1">
+              <a:shade val="15000"/>
+            </a:schemeClr>
+          </a:lnRef>
+          <a:fillRef idx="1">
+            <a:schemeClr val="accent1"/>
+          </a:fillRef>
+          <a:effectRef idx="0">
+            <a:schemeClr val="accent1"/>
+          </a:effectRef>
+          <a:fontRef idx="minor">
+            <a:schemeClr val="lt1"/>
+          </a:fontRef>
+        </p:style>
+        <p:txBody>
+          <a:bodyPr rtlCol="0" anchor="ctr"/>
+          <a:lstStyle/>
+          <a:p>
+            <a:pPr algn="ctr"/>
+            <a:endParaRPr lang="en-US"/>
+          </a:p>
+        </p:txBody>
+      </p:sp>
+      <p:sp>
+        <p:nvSpPr>
+          <p:cNvPr id="13" name="Rectangle 12">
+            <a:extLst>
+              <a:ext uri="{FF2B5EF4-FFF2-40B4-BE49-F238E27FC236}">
+                <a16:creationId xmlns:a16="http://schemas.microsoft.com/office/drawing/2014/main" id="{179E4C28-36D3-5A32-8480-61305F92940E}"/>
+              </a:ext>
+            </a:extLst>
+          </p:cNvPr>
+          <p:cNvSpPr/>
+          <p:nvPr/>
+        </p:nvSpPr>
+        <p:spPr>
+          <a:xfrm>
+            <a:off x="5374576" y="4427351"/>
+            <a:ext cx="1117721" cy="1120624"/>
+          </a:xfrm>
+          <a:prstGeom prst="rect">
+            <a:avLst/>
+          </a:prstGeom>
+          <a:noFill/>
+          <a:ln w="38100">
+            <a:solidFill>
+              <a:schemeClr val="tx1"/>
+            </a:solidFill>
+          </a:ln>
+        </p:spPr>
+        <p:style>
+          <a:lnRef idx="2">
+            <a:schemeClr val="accent1">
+              <a:shade val="15000"/>
+            </a:schemeClr>
+          </a:lnRef>
+          <a:fillRef idx="1">
+            <a:schemeClr val="accent1"/>
+          </a:fillRef>
+          <a:effectRef idx="0">
+            <a:schemeClr val="accent1"/>
+          </a:effectRef>
+          <a:fontRef idx="minor">
+            <a:schemeClr val="lt1"/>
+          </a:fontRef>
+        </p:style>
+        <p:txBody>
+          <a:bodyPr rtlCol="0" anchor="ctr"/>
+          <a:lstStyle/>
+          <a:p>
+            <a:pPr algn="ctr"/>
+            <a:endParaRPr lang="en-US"/>
+          </a:p>
+        </p:txBody>
+      </p:sp>
+      <p:sp>
+        <p:nvSpPr>
+          <p:cNvPr id="14" name="Rectangle 13">
+            <a:extLst>
+              <a:ext uri="{FF2B5EF4-FFF2-40B4-BE49-F238E27FC236}">
+                <a16:creationId xmlns:a16="http://schemas.microsoft.com/office/drawing/2014/main" id="{E51FB4CC-11C5-9EA5-B2A6-CC87AD487CF0}"/>
+              </a:ext>
+            </a:extLst>
+          </p:cNvPr>
+          <p:cNvSpPr/>
+          <p:nvPr/>
+        </p:nvSpPr>
+        <p:spPr>
+          <a:xfrm>
+            <a:off x="5374575" y="1926552"/>
+            <a:ext cx="1117721" cy="1120624"/>
+          </a:xfrm>
+          <a:prstGeom prst="rect">
+            <a:avLst/>
+          </a:prstGeom>
+          <a:noFill/>
+          <a:ln w="38100">
+            <a:solidFill>
+              <a:schemeClr val="tx1"/>
+            </a:solidFill>
+          </a:ln>
+        </p:spPr>
+        <p:style>
+          <a:lnRef idx="2">
+            <a:schemeClr val="accent1">
+              <a:shade val="15000"/>
+            </a:schemeClr>
+          </a:lnRef>
+          <a:fillRef idx="1">
+            <a:schemeClr val="accent1"/>
+          </a:fillRef>
+          <a:effectRef idx="0">
+            <a:schemeClr val="accent1"/>
+          </a:effectRef>
+          <a:fontRef idx="minor">
+            <a:schemeClr val="lt1"/>
+          </a:fontRef>
+        </p:style>
+        <p:txBody>
+          <a:bodyPr rtlCol="0" anchor="ctr"/>
+          <a:lstStyle/>
+          <a:p>
+            <a:pPr algn="ctr"/>
+            <a:endParaRPr lang="en-US"/>
+          </a:p>
+        </p:txBody>
+      </p:sp>
+      <p:sp>
+        <p:nvSpPr>
+          <p:cNvPr id="15" name="Rectangle 14">
+            <a:extLst>
+              <a:ext uri="{FF2B5EF4-FFF2-40B4-BE49-F238E27FC236}">
+                <a16:creationId xmlns:a16="http://schemas.microsoft.com/office/drawing/2014/main" id="{DE39F850-66AB-15BC-489C-0750479358D6}"/>
+              </a:ext>
+            </a:extLst>
+          </p:cNvPr>
+          <p:cNvSpPr/>
+          <p:nvPr/>
+        </p:nvSpPr>
+        <p:spPr>
+          <a:xfrm>
+            <a:off x="9857298" y="1934907"/>
+            <a:ext cx="1117721" cy="1120624"/>
+          </a:xfrm>
+          <a:prstGeom prst="rect">
+            <a:avLst/>
+          </a:prstGeom>
+          <a:noFill/>
+          <a:ln w="38100">
+            <a:solidFill>
+              <a:schemeClr val="tx1"/>
+            </a:solidFill>
+          </a:ln>
+        </p:spPr>
+        <p:style>
+          <a:lnRef idx="2">
+            <a:schemeClr val="accent1">
+              <a:shade val="15000"/>
+            </a:schemeClr>
+          </a:lnRef>
+          <a:fillRef idx="1">
+            <a:schemeClr val="accent1"/>
+          </a:fillRef>
+          <a:effectRef idx="0">
+            <a:schemeClr val="accent1"/>
+          </a:effectRef>
+          <a:fontRef idx="minor">
+            <a:schemeClr val="lt1"/>
+          </a:fontRef>
+        </p:style>
+        <p:txBody>
+          <a:bodyPr rtlCol="0" anchor="ctr"/>
+          <a:lstStyle/>
+          <a:p>
+            <a:pPr algn="ctr"/>
+            <a:endParaRPr lang="en-US"/>
+          </a:p>
+        </p:txBody>
+      </p:sp>
+      <p:sp>
+        <p:nvSpPr>
+          <p:cNvPr id="16" name="Isosceles Triangle 15">
+            <a:extLst>
+              <a:ext uri="{FF2B5EF4-FFF2-40B4-BE49-F238E27FC236}">
+                <a16:creationId xmlns:a16="http://schemas.microsoft.com/office/drawing/2014/main" id="{10FA95A5-39C9-62E2-836A-77B860DF10CF}"/>
+              </a:ext>
+            </a:extLst>
+          </p:cNvPr>
+          <p:cNvSpPr/>
+          <p:nvPr/>
+        </p:nvSpPr>
+        <p:spPr>
+          <a:xfrm rot="5400000">
+            <a:off x="7656545" y="1934907"/>
+            <a:ext cx="997526" cy="1120624"/>
+          </a:xfrm>
+          <a:prstGeom prst="triangle">
+            <a:avLst/>
+          </a:prstGeom>
+          <a:noFill/>
+          <a:ln w="31750">
+            <a:solidFill>
+              <a:schemeClr val="tx1"/>
+            </a:solidFill>
+          </a:ln>
+        </p:spPr>
+        <p:style>
+          <a:lnRef idx="2">
+            <a:schemeClr val="accent1">
+              <a:shade val="15000"/>
+            </a:schemeClr>
+          </a:lnRef>
+          <a:fillRef idx="1">
+            <a:schemeClr val="accent1"/>
+          </a:fillRef>
+          <a:effectRef idx="0">
+            <a:schemeClr val="accent1"/>
+          </a:effectRef>
+          <a:fontRef idx="minor">
+            <a:schemeClr val="lt1"/>
+          </a:fontRef>
+        </p:style>
+        <p:txBody>
+          <a:bodyPr rtlCol="0" anchor="ctr"/>
+          <a:lstStyle/>
+          <a:p>
+            <a:pPr algn="ctr"/>
+            <a:endParaRPr lang="en-US"/>
+          </a:p>
+        </p:txBody>
+      </p:sp>
+      <p:cxnSp>
+        <p:nvCxnSpPr>
+          <p:cNvPr id="20" name="Straight Arrow Connector 9">
+            <a:extLst>
+              <a:ext uri="{FF2B5EF4-FFF2-40B4-BE49-F238E27FC236}">
+                <a16:creationId xmlns:a16="http://schemas.microsoft.com/office/drawing/2014/main" id="{4C1875E2-10D9-E56D-023C-3A4CD0A8B0C1}"/>
+              </a:ext>
+            </a:extLst>
+          </p:cNvPr>
+          <p:cNvCxnSpPr>
+            <a:cxnSpLocks/>
+            <a:endCxn id="12" idx="1"/>
+          </p:cNvCxnSpPr>
+          <p:nvPr/>
+        </p:nvCxnSpPr>
+        <p:spPr>
+          <a:xfrm rot="16200000" flipH="1">
+            <a:off x="449280" y="3061309"/>
+            <a:ext cx="1915333" cy="1166275"/>
+          </a:xfrm>
+          <a:prstGeom prst="bentConnector2">
+            <a:avLst/>
+          </a:prstGeom>
+          <a:ln>
+            <a:solidFill>
+              <a:schemeClr val="tx1"/>
+            </a:solidFill>
+            <a:tailEnd type="triangle"/>
+          </a:ln>
+        </p:spPr>
+        <p:style>
+          <a:lnRef idx="2">
+            <a:schemeClr val="accent1"/>
+          </a:lnRef>
+          <a:fillRef idx="0">
+            <a:schemeClr val="accent1"/>
+          </a:fillRef>
+          <a:effectRef idx="1">
+            <a:schemeClr val="accent1"/>
+          </a:effectRef>
+          <a:fontRef idx="minor">
+            <a:schemeClr val="tx1"/>
+          </a:fontRef>
+        </p:style>
+      </p:cxnSp>
+      <p:cxnSp>
+        <p:nvCxnSpPr>
+          <p:cNvPr id="29" name="Straight Arrow Connector 28">
+            <a:extLst>
+              <a:ext uri="{FF2B5EF4-FFF2-40B4-BE49-F238E27FC236}">
+                <a16:creationId xmlns:a16="http://schemas.microsoft.com/office/drawing/2014/main" id="{01A812EF-C6E0-131A-6050-D17A498FBE6C}"/>
+              </a:ext>
+            </a:extLst>
+          </p:cNvPr>
+          <p:cNvCxnSpPr>
+            <a:cxnSpLocks/>
+            <a:stCxn id="6" idx="1"/>
+            <a:endCxn id="14" idx="1"/>
+          </p:cNvCxnSpPr>
+          <p:nvPr/>
+        </p:nvCxnSpPr>
+        <p:spPr>
+          <a:xfrm flipV="1">
+            <a:off x="3900345" y="2486864"/>
+            <a:ext cx="1474230" cy="8355"/>
+          </a:xfrm>
+          <a:prstGeom prst="straightConnector1">
+            <a:avLst/>
+          </a:prstGeom>
+          <a:ln>
+            <a:solidFill>
+              <a:schemeClr val="tx1"/>
+            </a:solidFill>
+            <a:tailEnd type="triangle"/>
+          </a:ln>
+        </p:spPr>
+        <p:style>
+          <a:lnRef idx="2">
+            <a:schemeClr val="accent1"/>
+          </a:lnRef>
+          <a:fillRef idx="0">
+            <a:schemeClr val="accent1"/>
+          </a:fillRef>
+          <a:effectRef idx="1">
+            <a:schemeClr val="accent1"/>
+          </a:effectRef>
+          <a:fontRef idx="minor">
+            <a:schemeClr val="tx1"/>
+          </a:fontRef>
+        </p:style>
+      </p:cxnSp>
+      <p:cxnSp>
+        <p:nvCxnSpPr>
+          <p:cNvPr id="33" name="Straight Arrow Connector 32">
+            <a:extLst>
+              <a:ext uri="{FF2B5EF4-FFF2-40B4-BE49-F238E27FC236}">
+                <a16:creationId xmlns:a16="http://schemas.microsoft.com/office/drawing/2014/main" id="{8C668716-40BE-2501-BCC0-CD48A0A67DC3}"/>
+              </a:ext>
+            </a:extLst>
+          </p:cNvPr>
+          <p:cNvCxnSpPr>
+            <a:cxnSpLocks/>
+          </p:cNvCxnSpPr>
+          <p:nvPr/>
+        </p:nvCxnSpPr>
+        <p:spPr>
+          <a:xfrm>
+            <a:off x="6516253" y="2204140"/>
+            <a:ext cx="1078743" cy="0"/>
+          </a:xfrm>
+          <a:prstGeom prst="straightConnector1">
+            <a:avLst/>
+          </a:prstGeom>
+          <a:ln>
+            <a:solidFill>
+              <a:schemeClr val="tx1"/>
+            </a:solidFill>
+            <a:tailEnd type="triangle"/>
+          </a:ln>
+        </p:spPr>
+        <p:style>
+          <a:lnRef idx="2">
+            <a:schemeClr val="accent1"/>
+          </a:lnRef>
+          <a:fillRef idx="0">
+            <a:schemeClr val="accent1"/>
+          </a:fillRef>
+          <a:effectRef idx="1">
+            <a:schemeClr val="accent1"/>
+          </a:effectRef>
+          <a:fontRef idx="minor">
+            <a:schemeClr val="tx1"/>
+          </a:fontRef>
+        </p:style>
+      </p:cxnSp>
+      <p:cxnSp>
+        <p:nvCxnSpPr>
+          <p:cNvPr id="37" name="Straight Arrow Connector 36">
+            <a:extLst>
+              <a:ext uri="{FF2B5EF4-FFF2-40B4-BE49-F238E27FC236}">
+                <a16:creationId xmlns:a16="http://schemas.microsoft.com/office/drawing/2014/main" id="{23192B0D-72E5-4E2A-C805-6FD4C46373DD}"/>
+              </a:ext>
+            </a:extLst>
+          </p:cNvPr>
+          <p:cNvCxnSpPr>
+            <a:cxnSpLocks/>
+          </p:cNvCxnSpPr>
+          <p:nvPr/>
+        </p:nvCxnSpPr>
+        <p:spPr>
+          <a:xfrm rot="16200000" flipH="1">
+            <a:off x="3815257" y="3215387"/>
+            <a:ext cx="2279486" cy="839150"/>
+          </a:xfrm>
+          <a:prstGeom prst="bentConnector3">
+            <a:avLst>
+              <a:gd name="adj1" fmla="val 99977"/>
+            </a:avLst>
+          </a:prstGeom>
+          <a:ln>
+            <a:solidFill>
+              <a:schemeClr val="tx1"/>
+            </a:solidFill>
+            <a:tailEnd type="triangle"/>
+          </a:ln>
+        </p:spPr>
+        <p:style>
+          <a:lnRef idx="2">
+            <a:schemeClr val="accent1"/>
+          </a:lnRef>
+          <a:fillRef idx="0">
+            <a:schemeClr val="accent1"/>
+          </a:fillRef>
+          <a:effectRef idx="1">
+            <a:schemeClr val="accent1"/>
+          </a:effectRef>
+          <a:fontRef idx="minor">
+            <a:schemeClr val="tx1"/>
+          </a:fontRef>
+        </p:style>
+      </p:cxnSp>
+      <p:cxnSp>
+        <p:nvCxnSpPr>
+          <p:cNvPr id="44" name="Straight Arrow Connector 36">
+            <a:extLst>
+              <a:ext uri="{FF2B5EF4-FFF2-40B4-BE49-F238E27FC236}">
+                <a16:creationId xmlns:a16="http://schemas.microsoft.com/office/drawing/2014/main" id="{82667A04-30C2-3378-760A-71F147B8059B}"/>
+              </a:ext>
+            </a:extLst>
+          </p:cNvPr>
+          <p:cNvCxnSpPr>
+            <a:cxnSpLocks/>
+          </p:cNvCxnSpPr>
+          <p:nvPr/>
+        </p:nvCxnSpPr>
+        <p:spPr>
+          <a:xfrm>
+            <a:off x="3700427" y="4602113"/>
+            <a:ext cx="1674148" cy="564478"/>
+          </a:xfrm>
+          <a:prstGeom prst="bentConnector3">
+            <a:avLst>
+              <a:gd name="adj1" fmla="val -363"/>
+            </a:avLst>
+          </a:prstGeom>
+          <a:ln>
+            <a:solidFill>
+              <a:schemeClr val="tx1"/>
+            </a:solidFill>
+            <a:tailEnd type="triangle"/>
+          </a:ln>
+        </p:spPr>
+        <p:style>
+          <a:lnRef idx="2">
+            <a:schemeClr val="accent1"/>
+          </a:lnRef>
+          <a:fillRef idx="0">
+            <a:schemeClr val="accent1"/>
+          </a:fillRef>
+          <a:effectRef idx="1">
+            <a:schemeClr val="accent1"/>
+          </a:effectRef>
+          <a:fontRef idx="minor">
+            <a:schemeClr val="tx1"/>
+          </a:fontRef>
+        </p:style>
+      </p:cxnSp>
+      <p:cxnSp>
+        <p:nvCxnSpPr>
+          <p:cNvPr id="49" name="Straight Arrow Connector 48">
+            <a:extLst>
+              <a:ext uri="{FF2B5EF4-FFF2-40B4-BE49-F238E27FC236}">
+                <a16:creationId xmlns:a16="http://schemas.microsoft.com/office/drawing/2014/main" id="{84FADC31-BDCE-0BB6-D73A-6C5196D2E300}"/>
+              </a:ext>
+            </a:extLst>
+          </p:cNvPr>
+          <p:cNvCxnSpPr>
+            <a:cxnSpLocks/>
+            <a:stCxn id="16" idx="0"/>
+            <a:endCxn id="15" idx="1"/>
+          </p:cNvCxnSpPr>
+          <p:nvPr/>
+        </p:nvCxnSpPr>
+        <p:spPr>
+          <a:xfrm>
+            <a:off x="8715620" y="2495219"/>
+            <a:ext cx="1141678" cy="0"/>
+          </a:xfrm>
+          <a:prstGeom prst="straightConnector1">
+            <a:avLst/>
+          </a:prstGeom>
+          <a:ln>
+            <a:solidFill>
+              <a:schemeClr val="tx1"/>
+            </a:solidFill>
+            <a:tailEnd type="triangle"/>
+          </a:ln>
+        </p:spPr>
+        <p:style>
+          <a:lnRef idx="2">
+            <a:schemeClr val="accent1"/>
+          </a:lnRef>
+          <a:fillRef idx="0">
+            <a:schemeClr val="accent1"/>
+          </a:fillRef>
+          <a:effectRef idx="1">
+            <a:schemeClr val="accent1"/>
+          </a:effectRef>
+          <a:fontRef idx="minor">
+            <a:schemeClr val="tx1"/>
+          </a:fontRef>
+        </p:style>
+      </p:cxnSp>
+      <p:cxnSp>
+        <p:nvCxnSpPr>
+          <p:cNvPr id="52" name="Straight Arrow Connector 51">
+            <a:extLst>
+              <a:ext uri="{FF2B5EF4-FFF2-40B4-BE49-F238E27FC236}">
+                <a16:creationId xmlns:a16="http://schemas.microsoft.com/office/drawing/2014/main" id="{7BA65D89-2782-3F3B-B8FD-F567149D1E81}"/>
+              </a:ext>
+            </a:extLst>
+          </p:cNvPr>
+          <p:cNvCxnSpPr>
+            <a:cxnSpLocks/>
+            <a:stCxn id="13" idx="3"/>
+            <a:endCxn id="15" idx="2"/>
+          </p:cNvCxnSpPr>
+          <p:nvPr/>
+        </p:nvCxnSpPr>
+        <p:spPr>
+          <a:xfrm flipV="1">
+            <a:off x="6492297" y="3055531"/>
+            <a:ext cx="3923862" cy="1932132"/>
+          </a:xfrm>
+          <a:prstGeom prst="bentConnector2">
+            <a:avLst/>
+          </a:prstGeom>
+          <a:ln>
+            <a:solidFill>
+              <a:schemeClr val="tx1"/>
+            </a:solidFill>
+            <a:tailEnd type="triangle"/>
+          </a:ln>
+        </p:spPr>
+        <p:style>
+          <a:lnRef idx="2">
+            <a:schemeClr val="accent1"/>
+          </a:lnRef>
+          <a:fillRef idx="0">
+            <a:schemeClr val="accent1"/>
+          </a:fillRef>
+          <a:effectRef idx="1">
+            <a:schemeClr val="accent1"/>
+          </a:effectRef>
+          <a:fontRef idx="minor">
+            <a:schemeClr val="tx1"/>
+          </a:fontRef>
+        </p:style>
+      </p:cxnSp>
+      <p:cxnSp>
+        <p:nvCxnSpPr>
+          <p:cNvPr id="57" name="Straight Arrow Connector 56">
+            <a:extLst>
+              <a:ext uri="{FF2B5EF4-FFF2-40B4-BE49-F238E27FC236}">
+                <a16:creationId xmlns:a16="http://schemas.microsoft.com/office/drawing/2014/main" id="{7443CBBF-6404-B341-BA68-AC80E92CCD5F}"/>
+              </a:ext>
+            </a:extLst>
+          </p:cNvPr>
+          <p:cNvCxnSpPr>
+            <a:cxnSpLocks/>
+            <a:stCxn id="13" idx="0"/>
+            <a:endCxn id="14" idx="2"/>
+          </p:cNvCxnSpPr>
+          <p:nvPr/>
+        </p:nvCxnSpPr>
+        <p:spPr>
+          <a:xfrm flipH="1" flipV="1">
+            <a:off x="5933436" y="3047176"/>
+            <a:ext cx="1" cy="1380175"/>
+          </a:xfrm>
+          <a:prstGeom prst="straightConnector1">
+            <a:avLst/>
+          </a:prstGeom>
+          <a:ln>
+            <a:solidFill>
+              <a:schemeClr val="tx1"/>
+            </a:solidFill>
+            <a:tailEnd type="triangle"/>
+          </a:ln>
+        </p:spPr>
+        <p:style>
+          <a:lnRef idx="2">
+            <a:schemeClr val="accent1"/>
+          </a:lnRef>
+          <a:fillRef idx="0">
+            <a:schemeClr val="accent1"/>
+          </a:fillRef>
+          <a:effectRef idx="1">
+            <a:schemeClr val="accent1"/>
+          </a:effectRef>
+          <a:fontRef idx="minor">
+            <a:schemeClr val="tx1"/>
+          </a:fontRef>
+        </p:style>
+      </p:cxnSp>
+      <p:sp>
+        <p:nvSpPr>
+          <p:cNvPr id="60" name="Isosceles Triangle 59">
+            <a:extLst>
+              <a:ext uri="{FF2B5EF4-FFF2-40B4-BE49-F238E27FC236}">
+                <a16:creationId xmlns:a16="http://schemas.microsoft.com/office/drawing/2014/main" id="{5BEAC8DE-20F3-DA3F-D52B-D98A1FD994F6}"/>
+              </a:ext>
+            </a:extLst>
+          </p:cNvPr>
+          <p:cNvSpPr/>
+          <p:nvPr/>
+        </p:nvSpPr>
+        <p:spPr>
+          <a:xfrm>
+            <a:off x="5866450" y="2896673"/>
+            <a:ext cx="133970" cy="150503"/>
+          </a:xfrm>
+          <a:prstGeom prst="triangle">
+            <a:avLst/>
+          </a:prstGeom>
+          <a:noFill/>
+          <a:ln w="9525">
+            <a:solidFill>
+              <a:schemeClr val="tx1"/>
+            </a:solidFill>
+          </a:ln>
+        </p:spPr>
+        <p:style>
+          <a:lnRef idx="2">
+            <a:schemeClr val="accent1">
+              <a:shade val="15000"/>
+            </a:schemeClr>
+          </a:lnRef>
+          <a:fillRef idx="1">
+            <a:schemeClr val="accent1"/>
+          </a:fillRef>
+          <a:effectRef idx="0">
+            <a:schemeClr val="accent1"/>
+          </a:effectRef>
+          <a:fontRef idx="minor">
+            <a:schemeClr val="lt1"/>
+          </a:fontRef>
+        </p:style>
+        <p:txBody>
+          <a:bodyPr rtlCol="0" anchor="ctr"/>
+          <a:lstStyle/>
+          <a:p>
+            <a:pPr algn="ctr"/>
+            <a:endParaRPr lang="en-US"/>
+          </a:p>
+        </p:txBody>
+      </p:sp>
+      <p:sp>
+        <p:nvSpPr>
+          <p:cNvPr id="61" name="Isosceles Triangle 60">
+            <a:extLst>
+              <a:ext uri="{FF2B5EF4-FFF2-40B4-BE49-F238E27FC236}">
+                <a16:creationId xmlns:a16="http://schemas.microsoft.com/office/drawing/2014/main" id="{744E2B0B-541E-6179-62C1-925DC2E40613}"/>
+              </a:ext>
+            </a:extLst>
+          </p:cNvPr>
+          <p:cNvSpPr/>
+          <p:nvPr/>
+        </p:nvSpPr>
+        <p:spPr>
+          <a:xfrm>
+            <a:off x="10349172" y="2897113"/>
+            <a:ext cx="133970" cy="150503"/>
+          </a:xfrm>
+          <a:prstGeom prst="triangle">
+            <a:avLst/>
+          </a:prstGeom>
+          <a:noFill/>
+          <a:ln w="9525">
+            <a:solidFill>
+              <a:schemeClr val="tx1"/>
+            </a:solidFill>
+          </a:ln>
+        </p:spPr>
+        <p:style>
+          <a:lnRef idx="2">
+            <a:schemeClr val="accent1">
+              <a:shade val="15000"/>
+            </a:schemeClr>
+          </a:lnRef>
+          <a:fillRef idx="1">
+            <a:schemeClr val="accent1"/>
+          </a:fillRef>
+          <a:effectRef idx="0">
+            <a:schemeClr val="accent1"/>
+          </a:effectRef>
+          <a:fontRef idx="minor">
+            <a:schemeClr val="lt1"/>
+          </a:fontRef>
+        </p:style>
+        <p:txBody>
+          <a:bodyPr rtlCol="0" anchor="ctr"/>
+          <a:lstStyle/>
+          <a:p>
+            <a:pPr algn="ctr"/>
+            <a:endParaRPr lang="en-US"/>
+          </a:p>
+        </p:txBody>
+      </p:sp>
+      <p:sp>
+        <p:nvSpPr>
+          <p:cNvPr id="62" name="TextBox 61">
+            <a:extLst>
+              <a:ext uri="{FF2B5EF4-FFF2-40B4-BE49-F238E27FC236}">
+                <a16:creationId xmlns:a16="http://schemas.microsoft.com/office/drawing/2014/main" id="{A27FA420-0453-AFA8-32D8-AA5D9967FDC1}"/>
+              </a:ext>
+            </a:extLst>
+          </p:cNvPr>
+          <p:cNvSpPr txBox="1"/>
+          <p:nvPr/>
+        </p:nvSpPr>
+        <p:spPr>
+          <a:xfrm>
+            <a:off x="507765" y="1987803"/>
+            <a:ext cx="1165704" cy="646331"/>
+          </a:xfrm>
+          <a:prstGeom prst="rect">
+            <a:avLst/>
+          </a:prstGeom>
+          <a:noFill/>
+        </p:spPr>
+        <p:txBody>
+          <a:bodyPr wrap="none" rtlCol="0">
+            <a:spAutoFit/>
+          </a:bodyPr>
+          <a:lstStyle/>
+          <a:p>
+            <a:pPr algn="ctr"/>
+            <a:r>
+              <a:rPr lang="en-US" dirty="0"/>
+              <a:t>r(t)</a:t>
+            </a:r>
+          </a:p>
+          <a:p>
+            <a:r>
+              <a:rPr lang="en-US" dirty="0"/>
+              <a:t>passband</a:t>
+            </a:r>
+          </a:p>
+        </p:txBody>
+      </p:sp>
+      <p:sp>
+        <p:nvSpPr>
+          <p:cNvPr id="63" name="TextBox 62">
+            <a:extLst>
+              <a:ext uri="{FF2B5EF4-FFF2-40B4-BE49-F238E27FC236}">
+                <a16:creationId xmlns:a16="http://schemas.microsoft.com/office/drawing/2014/main" id="{C16AAE38-0FFA-3B83-A149-1A0900D1AAB9}"/>
+              </a:ext>
+            </a:extLst>
+          </p:cNvPr>
+          <p:cNvSpPr txBox="1"/>
+          <p:nvPr/>
+        </p:nvSpPr>
+        <p:spPr>
+          <a:xfrm>
+            <a:off x="1923149" y="4278947"/>
+            <a:ext cx="1276310" cy="646331"/>
+          </a:xfrm>
+          <a:prstGeom prst="rect">
+            <a:avLst/>
+          </a:prstGeom>
+          <a:noFill/>
+        </p:spPr>
+        <p:txBody>
+          <a:bodyPr wrap="none" rtlCol="0">
+            <a:spAutoFit/>
+          </a:bodyPr>
+          <a:lstStyle/>
+          <a:p>
+            <a:pPr algn="ctr"/>
+            <a:r>
+              <a:rPr lang="en-US" sz="1200" dirty="0"/>
+              <a:t>Carrier recovery </a:t>
+            </a:r>
+          </a:p>
+          <a:p>
+            <a:pPr algn="ctr"/>
+            <a:r>
+              <a:rPr lang="en-US" sz="1200" dirty="0"/>
+              <a:t>Circuit</a:t>
+            </a:r>
+          </a:p>
+          <a:p>
+            <a:pPr algn="ctr"/>
+            <a:r>
+              <a:rPr lang="en-US" sz="1200" dirty="0"/>
+              <a:t>(CRC)</a:t>
+            </a:r>
+          </a:p>
+        </p:txBody>
+      </p:sp>
+      <p:sp>
+        <p:nvSpPr>
+          <p:cNvPr id="64" name="TextBox 63">
+            <a:extLst>
+              <a:ext uri="{FF2B5EF4-FFF2-40B4-BE49-F238E27FC236}">
+                <a16:creationId xmlns:a16="http://schemas.microsoft.com/office/drawing/2014/main" id="{D10124E0-4F6C-FF35-760E-45C1C1164228}"/>
+              </a:ext>
+            </a:extLst>
+          </p:cNvPr>
+          <p:cNvSpPr txBox="1"/>
+          <p:nvPr/>
+        </p:nvSpPr>
+        <p:spPr>
+          <a:xfrm>
+            <a:off x="2550602" y="2816690"/>
+            <a:ext cx="1114408" cy="646331"/>
+          </a:xfrm>
+          <a:prstGeom prst="rect">
+            <a:avLst/>
+          </a:prstGeom>
+          <a:noFill/>
+        </p:spPr>
+        <p:txBody>
+          <a:bodyPr wrap="none" rtlCol="0">
+            <a:spAutoFit/>
+          </a:bodyPr>
+          <a:lstStyle/>
+          <a:p>
+            <a:pPr algn="ctr"/>
+            <a:r>
+              <a:rPr lang="en-US" sz="1200" dirty="0"/>
+              <a:t>Unmodulated</a:t>
+            </a:r>
+          </a:p>
+          <a:p>
+            <a:pPr algn="ctr"/>
+            <a:r>
+              <a:rPr lang="en-US" sz="1200" dirty="0"/>
+              <a:t>synchronized </a:t>
+            </a:r>
+          </a:p>
+          <a:p>
+            <a:pPr algn="ctr"/>
+            <a:r>
+              <a:rPr lang="en-US" sz="1200" dirty="0"/>
+              <a:t>carrier</a:t>
+            </a:r>
+          </a:p>
+        </p:txBody>
+      </p:sp>
+      <p:sp>
+        <p:nvSpPr>
+          <p:cNvPr id="65" name="TextBox 64">
+            <a:extLst>
+              <a:ext uri="{FF2B5EF4-FFF2-40B4-BE49-F238E27FC236}">
+                <a16:creationId xmlns:a16="http://schemas.microsoft.com/office/drawing/2014/main" id="{7FDA32FD-B81C-D645-16DE-D6DFE7ACC94F}"/>
+              </a:ext>
+            </a:extLst>
+          </p:cNvPr>
+          <p:cNvSpPr txBox="1"/>
+          <p:nvPr/>
+        </p:nvSpPr>
+        <p:spPr>
+          <a:xfrm>
+            <a:off x="5371475" y="4538271"/>
+            <a:ext cx="1120821" cy="923330"/>
+          </a:xfrm>
+          <a:prstGeom prst="rect">
+            <a:avLst/>
+          </a:prstGeom>
+          <a:noFill/>
+        </p:spPr>
+        <p:txBody>
+          <a:bodyPr wrap="none" rtlCol="0">
+            <a:spAutoFit/>
+          </a:bodyPr>
+          <a:lstStyle/>
+          <a:p>
+            <a:pPr algn="ctr"/>
+            <a:r>
+              <a:rPr lang="en-US" dirty="0"/>
+              <a:t>Bit timing</a:t>
+            </a:r>
+          </a:p>
+          <a:p>
+            <a:pPr algn="ctr"/>
+            <a:r>
+              <a:rPr lang="en-US" dirty="0"/>
+              <a:t>recovery</a:t>
+            </a:r>
+          </a:p>
+          <a:p>
+            <a:pPr algn="ctr"/>
+            <a:r>
+              <a:rPr lang="en-US" dirty="0"/>
+              <a:t>(BTR)</a:t>
+            </a:r>
+          </a:p>
+        </p:txBody>
+      </p:sp>
+      <p:sp>
+        <p:nvSpPr>
+          <p:cNvPr id="66" name="TextBox 65">
+            <a:extLst>
+              <a:ext uri="{FF2B5EF4-FFF2-40B4-BE49-F238E27FC236}">
+                <a16:creationId xmlns:a16="http://schemas.microsoft.com/office/drawing/2014/main" id="{BC273180-6FA9-0899-C798-6D6B1E83667D}"/>
+              </a:ext>
+            </a:extLst>
+          </p:cNvPr>
+          <p:cNvSpPr txBox="1"/>
+          <p:nvPr/>
+        </p:nvSpPr>
+        <p:spPr>
+          <a:xfrm>
+            <a:off x="5239355" y="3114539"/>
+            <a:ext cx="627095" cy="461665"/>
+          </a:xfrm>
+          <a:prstGeom prst="rect">
+            <a:avLst/>
+          </a:prstGeom>
+          <a:noFill/>
+        </p:spPr>
+        <p:txBody>
+          <a:bodyPr wrap="none" rtlCol="0">
+            <a:spAutoFit/>
+          </a:bodyPr>
+          <a:lstStyle/>
+          <a:p>
+            <a:pPr algn="ctr"/>
+            <a:r>
+              <a:rPr lang="en-US" sz="1200" dirty="0"/>
+              <a:t>Dump </a:t>
+            </a:r>
+          </a:p>
+          <a:p>
+            <a:pPr algn="ctr"/>
+            <a:r>
+              <a:rPr lang="en-US" sz="1200" dirty="0"/>
+              <a:t>signal</a:t>
+            </a:r>
+          </a:p>
+        </p:txBody>
+      </p:sp>
+      <p:sp>
+        <p:nvSpPr>
+          <p:cNvPr id="67" name="TextBox 66">
+            <a:extLst>
+              <a:ext uri="{FF2B5EF4-FFF2-40B4-BE49-F238E27FC236}">
+                <a16:creationId xmlns:a16="http://schemas.microsoft.com/office/drawing/2014/main" id="{678F4BAF-A0D9-A444-C203-2D2DCDB98EAB}"/>
+              </a:ext>
+            </a:extLst>
+          </p:cNvPr>
+          <p:cNvSpPr txBox="1"/>
+          <p:nvPr/>
+        </p:nvSpPr>
+        <p:spPr>
+          <a:xfrm>
+            <a:off x="7594996" y="2264387"/>
+            <a:ext cx="771365" cy="461665"/>
+          </a:xfrm>
+          <a:prstGeom prst="rect">
+            <a:avLst/>
+          </a:prstGeom>
+          <a:noFill/>
+        </p:spPr>
+        <p:txBody>
+          <a:bodyPr wrap="none" rtlCol="0">
+            <a:spAutoFit/>
+          </a:bodyPr>
+          <a:lstStyle/>
+          <a:p>
+            <a:pPr algn="ctr"/>
+            <a:r>
+              <a:rPr lang="en-US" sz="1200" dirty="0"/>
+              <a:t>Decision</a:t>
+            </a:r>
+          </a:p>
+          <a:p>
+            <a:pPr algn="ctr"/>
+            <a:r>
+              <a:rPr lang="en-US" sz="1200" dirty="0"/>
+              <a:t>device</a:t>
+            </a:r>
+          </a:p>
+        </p:txBody>
+      </p:sp>
+      <p:sp>
+        <p:nvSpPr>
+          <p:cNvPr id="68" name="TextBox 67">
+            <a:extLst>
+              <a:ext uri="{FF2B5EF4-FFF2-40B4-BE49-F238E27FC236}">
+                <a16:creationId xmlns:a16="http://schemas.microsoft.com/office/drawing/2014/main" id="{6948E043-C87E-FB92-60F9-AFFACC58942C}"/>
+              </a:ext>
+            </a:extLst>
+          </p:cNvPr>
+          <p:cNvSpPr txBox="1"/>
+          <p:nvPr/>
+        </p:nvSpPr>
+        <p:spPr>
+          <a:xfrm>
+            <a:off x="9813691" y="3098375"/>
+            <a:ext cx="545341" cy="461665"/>
+          </a:xfrm>
+          <a:prstGeom prst="rect">
+            <a:avLst/>
+          </a:prstGeom>
+          <a:noFill/>
+        </p:spPr>
+        <p:txBody>
+          <a:bodyPr wrap="none" rtlCol="0">
+            <a:spAutoFit/>
+          </a:bodyPr>
+          <a:lstStyle/>
+          <a:p>
+            <a:pPr algn="ctr"/>
+            <a:r>
+              <a:rPr lang="en-US" sz="1200" dirty="0"/>
+              <a:t>Data</a:t>
+            </a:r>
+          </a:p>
+          <a:p>
+            <a:pPr algn="ctr"/>
+            <a:r>
+              <a:rPr lang="en-US" sz="1200" dirty="0"/>
+              <a:t>clock</a:t>
+            </a:r>
+          </a:p>
+        </p:txBody>
+      </p:sp>
+      <mc:AlternateContent xmlns:mc="http://schemas.openxmlformats.org/markup-compatibility/2006">
+        <mc:Choice xmlns:a14="http://schemas.microsoft.com/office/drawing/2010/main" Requires="a14">
+          <p:sp>
+            <p:nvSpPr>
+              <p:cNvPr id="69" name="TextBox 68">
+                <a:extLst>
+                  <a:ext uri="{FF2B5EF4-FFF2-40B4-BE49-F238E27FC236}">
+                    <a16:creationId xmlns:a16="http://schemas.microsoft.com/office/drawing/2014/main" id="{3FB2555F-4D3B-5475-91E7-5E8A645FFD4A}"/>
+                  </a:ext>
+                </a:extLst>
+              </p:cNvPr>
+              <p:cNvSpPr txBox="1"/>
+              <p:nvPr/>
+            </p:nvSpPr>
+            <p:spPr>
+              <a:xfrm>
+                <a:off x="5366851" y="2104321"/>
+                <a:ext cx="1184812" cy="784574"/>
+              </a:xfrm>
+              <a:prstGeom prst="rect">
+                <a:avLst/>
+              </a:prstGeom>
+              <a:noFill/>
+            </p:spPr>
+            <p:txBody>
+              <a:bodyPr wrap="none" rtlCol="0">
+                <a:spAutoFit/>
+              </a:bodyPr>
+              <a:lstStyle/>
+              <a:p>
+                <a:pPr algn="ctr"/>
+                <a14:m>
+                  <m:oMathPara xmlns:m="http://schemas.openxmlformats.org/officeDocument/2006/math">
+                    <m:oMathParaPr>
+                      <m:jc m:val="centerGroup"/>
+                    </m:oMathParaPr>
+                    <m:oMath xmlns:m="http://schemas.openxmlformats.org/officeDocument/2006/math">
+                      <m:nary>
+                        <m:naryPr>
+                          <m:ctrlPr>
+                            <a:rPr lang="en-US" sz="2000" i="1" dirty="0" smtClean="0">
+                              <a:latin typeface="Cambria Math" panose="02040503050406030204" pitchFamily="18" charset="0"/>
+                            </a:rPr>
+                          </m:ctrlPr>
+                        </m:naryPr>
+                        <m:sub>
+                          <m:r>
+                            <m:rPr>
+                              <m:brk m:alnAt="23"/>
+                            </m:rPr>
+                            <a:rPr lang="en-US" sz="2000" b="0" i="1" dirty="0" smtClean="0">
+                              <a:latin typeface="Cambria Math" panose="02040503050406030204" pitchFamily="18" charset="0"/>
+                            </a:rPr>
+                            <m:t>0</m:t>
+                          </m:r>
+                        </m:sub>
+                        <m:sup>
+                          <m:r>
+                            <a:rPr lang="en-US" sz="2000" b="0" i="1" dirty="0" smtClean="0">
+                              <a:latin typeface="Cambria Math" panose="02040503050406030204" pitchFamily="18" charset="0"/>
+                            </a:rPr>
+                            <m:t>𝑇</m:t>
+                          </m:r>
+                          <m:r>
+                            <a:rPr lang="en-US" sz="2000" b="0" i="1" baseline="-25000" dirty="0" smtClean="0">
+                              <a:latin typeface="Cambria Math" panose="02040503050406030204" pitchFamily="18" charset="0"/>
+                            </a:rPr>
+                            <m:t>𝑏</m:t>
+                          </m:r>
+                        </m:sup>
+                        <m:e>
+                          <m:d>
+                            <m:dPr>
+                              <m:ctrlPr>
+                                <a:rPr lang="en-US" sz="2000" b="0" i="1" dirty="0" smtClean="0">
+                                  <a:latin typeface="Cambria Math" panose="02040503050406030204" pitchFamily="18" charset="0"/>
+                                </a:rPr>
+                              </m:ctrlPr>
+                            </m:dPr>
+                            <m:e>
+                              <m:r>
+                                <a:rPr lang="ar-EG" sz="2000" i="1" dirty="0">
+                                  <a:latin typeface="Cambria Math" panose="02040503050406030204" pitchFamily="18" charset="0"/>
+                                </a:rPr>
+                                <m:t>⋅</m:t>
+                              </m:r>
+                            </m:e>
+                          </m:d>
+                          <m:r>
+                            <a:rPr lang="en-US" sz="2000" b="0" i="1" dirty="0" smtClean="0">
+                              <a:latin typeface="Cambria Math" panose="02040503050406030204" pitchFamily="18" charset="0"/>
+                            </a:rPr>
+                            <m:t>𝑑𝑡</m:t>
+                          </m:r>
+                        </m:e>
+                      </m:nary>
+                    </m:oMath>
+                  </m:oMathPara>
+                </a14:m>
+              </a:p>
+            </p:txBody>
+          </p:sp>
+        </mc:Choice>
+        <mc:Fallback>
+          <p:sp>
+            <p:nvSpPr>
+              <p:cNvPr id="69" name="TextBox 68">
+                <a:extLst>
+                  <a:ext uri="{FF2B5EF4-FFF2-40B4-BE49-F238E27FC236}">
+                    <a16:creationId xmlns:a16="http://schemas.microsoft.com/office/drawing/2014/main" id="{3FB2555F-4D3B-5475-91E7-5E8A645FFD4A}"/>
+                  </a:ext>
+                </a:extLst>
+              </p:cNvPr>
+              <p:cNvSpPr txBox="1">
+                <a:spLocks noRot="1" noChangeAspect="1" noMove="1" noResize="1" noEditPoints="1" noAdjustHandles="1" noChangeArrowheads="1" noChangeShapeType="1" noTextEdit="1"/>
+              </p:cNvSpPr>
+              <p:nvPr/>
+            </p:nvSpPr>
+            <p:spPr>
+              <a:xfrm>
+                <a:off x="5366851" y="2104321"/>
+                <a:ext cx="1184812" cy="784574"/>
+              </a:xfrm>
+              <a:prstGeom prst="rect">
+                <a:avLst/>
+              </a:prstGeom>
+              <a:blipFill>
+                <a:blip r:embed="rId3"/>
+                <a:stretch>
+                  <a:fillRect/>
+                </a:stretch>
+              </a:blipFill>
+            </p:spPr>
+            <p:txBody>
+              <a:bodyPr/>
+              <a:lstStyle/>
+              <a:p>
+                <a:r>
+                  <a:rPr lang="en-US">
+                    <a:noFill/>
+                  </a:rPr>
+                  <a:t> </a:t>
+                </a:r>
+              </a:p>
+            </p:txBody>
+          </p:sp>
+        </mc:Fallback>
+      </mc:AlternateContent>
+      <p:sp>
+        <p:nvSpPr>
+          <p:cNvPr id="70" name="TextBox 69">
+            <a:extLst>
+              <a:ext uri="{FF2B5EF4-FFF2-40B4-BE49-F238E27FC236}">
+                <a16:creationId xmlns:a16="http://schemas.microsoft.com/office/drawing/2014/main" id="{807E4219-A13B-F877-1563-2FABCF205E5D}"/>
+              </a:ext>
+            </a:extLst>
+          </p:cNvPr>
+          <p:cNvSpPr txBox="1"/>
+          <p:nvPr/>
+        </p:nvSpPr>
+        <p:spPr>
+          <a:xfrm>
+            <a:off x="9849334" y="2298833"/>
+            <a:ext cx="1133645" cy="369332"/>
+          </a:xfrm>
+          <a:prstGeom prst="rect">
+            <a:avLst/>
+          </a:prstGeom>
+          <a:noFill/>
+        </p:spPr>
+        <p:txBody>
+          <a:bodyPr wrap="none" rtlCol="0">
+            <a:spAutoFit/>
+          </a:bodyPr>
+          <a:lstStyle/>
+          <a:p>
+            <a:pPr algn="ctr"/>
+            <a:r>
+              <a:rPr lang="en-US" dirty="0"/>
+              <a:t>D flip flop</a:t>
+            </a:r>
+          </a:p>
+        </p:txBody>
+      </p:sp>
+      <p:sp>
+        <p:nvSpPr>
+          <p:cNvPr id="71" name="Title 1">
+            <a:extLst>
+              <a:ext uri="{FF2B5EF4-FFF2-40B4-BE49-F238E27FC236}">
+                <a16:creationId xmlns:a16="http://schemas.microsoft.com/office/drawing/2014/main" id="{81D82953-9F3C-86FC-2DD2-7F9E2BE224EF}"/>
+              </a:ext>
+            </a:extLst>
+          </p:cNvPr>
+          <p:cNvSpPr txBox="1">
+            <a:spLocks/>
+          </p:cNvSpPr>
+          <p:nvPr/>
+        </p:nvSpPr>
+        <p:spPr>
+          <a:xfrm>
+            <a:off x="4637460" y="144793"/>
+            <a:ext cx="2917078" cy="371219"/>
+          </a:xfrm>
+          <a:prstGeom prst="rect">
+            <a:avLst/>
+          </a:prstGeom>
+        </p:spPr>
+        <p:txBody>
+          <a:bodyPr vert="horz" lIns="91440" tIns="45720" rIns="91440" bIns="45720" rtlCol="0" anchor="b">
+            <a:normAutofit fontScale="75000" lnSpcReduction="20000"/>
+          </a:bodyPr>
+          <a:lstStyle>
+            <a:lvl1pPr algn="ctr" defTabSz="914400" rtl="0" eaLnBrk="1" latinLnBrk="0" hangingPunct="1">
+              <a:lnSpc>
+                <a:spcPct val="90000"/>
+              </a:lnSpc>
+              <a:spcBef>
+                <a:spcPct val="0"/>
+              </a:spcBef>
+              <a:buNone/>
+              <a:defRPr sz="6000" kern="1200">
+                <a:solidFill>
+                  <a:schemeClr val="tx1"/>
+                </a:solidFill>
+                <a:latin typeface="+mj-lt"/>
+                <a:ea typeface="+mj-ea"/>
+                <a:cs typeface="+mj-cs"/>
+              </a:defRPr>
+            </a:lvl1pPr>
+          </a:lstStyle>
+          <a:p>
+            <a:r>
+              <a:rPr lang="en-US" sz="3200" dirty="0"/>
+              <a:t>BPSK</a:t>
+            </a:r>
+          </a:p>
+        </p:txBody>
+      </p:sp>
+      <p:cxnSp>
+        <p:nvCxnSpPr>
+          <p:cNvPr id="73" name="Straight Connector 72">
+            <a:extLst>
+              <a:ext uri="{FF2B5EF4-FFF2-40B4-BE49-F238E27FC236}">
+                <a16:creationId xmlns:a16="http://schemas.microsoft.com/office/drawing/2014/main" id="{1F12A0EA-6126-FC5D-54E6-D5DB4AB5A1B5}"/>
+              </a:ext>
+            </a:extLst>
+          </p:cNvPr>
+          <p:cNvCxnSpPr>
+            <a:cxnSpLocks/>
+          </p:cNvCxnSpPr>
+          <p:nvPr/>
+        </p:nvCxnSpPr>
+        <p:spPr>
+          <a:xfrm>
+            <a:off x="7238422" y="2771745"/>
+            <a:ext cx="356574" cy="0"/>
+          </a:xfrm>
+          <a:prstGeom prst="line">
+            <a:avLst/>
+          </a:prstGeom>
+          <a:ln>
+            <a:solidFill>
+              <a:schemeClr val="tx1"/>
+            </a:solidFill>
+          </a:ln>
+        </p:spPr>
+        <p:style>
+          <a:lnRef idx="2">
+            <a:schemeClr val="accent1"/>
+          </a:lnRef>
+          <a:fillRef idx="0">
+            <a:schemeClr val="accent1"/>
+          </a:fillRef>
+          <a:effectRef idx="1">
+            <a:schemeClr val="accent1"/>
+          </a:effectRef>
+          <a:fontRef idx="minor">
+            <a:schemeClr val="tx1"/>
+          </a:fontRef>
+        </p:style>
+      </p:cxnSp>
+      <p:cxnSp>
+        <p:nvCxnSpPr>
+          <p:cNvPr id="76" name="Straight Connector 75">
+            <a:extLst>
+              <a:ext uri="{FF2B5EF4-FFF2-40B4-BE49-F238E27FC236}">
+                <a16:creationId xmlns:a16="http://schemas.microsoft.com/office/drawing/2014/main" id="{F1ECFFDE-2531-0664-3B86-343D54881281}"/>
+              </a:ext>
+            </a:extLst>
+          </p:cNvPr>
+          <p:cNvCxnSpPr>
+            <a:cxnSpLocks/>
+          </p:cNvCxnSpPr>
+          <p:nvPr/>
+        </p:nvCxnSpPr>
+        <p:spPr>
+          <a:xfrm>
+            <a:off x="7243978" y="2763293"/>
+            <a:ext cx="0" cy="335082"/>
+          </a:xfrm>
+          <a:prstGeom prst="line">
+            <a:avLst/>
+          </a:prstGeom>
+          <a:ln>
+            <a:solidFill>
+              <a:schemeClr val="tx1"/>
+            </a:solidFill>
+          </a:ln>
+        </p:spPr>
+        <p:style>
+          <a:lnRef idx="2">
+            <a:schemeClr val="accent1"/>
+          </a:lnRef>
+          <a:fillRef idx="0">
+            <a:schemeClr val="accent1"/>
+          </a:fillRef>
+          <a:effectRef idx="1">
+            <a:schemeClr val="accent1"/>
+          </a:effectRef>
+          <a:fontRef idx="minor">
+            <a:schemeClr val="tx1"/>
+          </a:fontRef>
+        </p:style>
+      </p:cxnSp>
+      <p:cxnSp>
+        <p:nvCxnSpPr>
+          <p:cNvPr id="81" name="Straight Connector 80">
+            <a:extLst>
+              <a:ext uri="{FF2B5EF4-FFF2-40B4-BE49-F238E27FC236}">
+                <a16:creationId xmlns:a16="http://schemas.microsoft.com/office/drawing/2014/main" id="{A6406891-4F64-4FEE-ADDF-1C8A56BF9E6F}"/>
+              </a:ext>
+            </a:extLst>
+          </p:cNvPr>
+          <p:cNvCxnSpPr>
+            <a:cxnSpLocks/>
+          </p:cNvCxnSpPr>
+          <p:nvPr/>
+        </p:nvCxnSpPr>
+        <p:spPr>
+          <a:xfrm flipH="1">
+            <a:off x="7125710" y="3098375"/>
+            <a:ext cx="261937" cy="0"/>
+          </a:xfrm>
+          <a:prstGeom prst="line">
+            <a:avLst/>
+          </a:prstGeom>
+          <a:ln>
+            <a:solidFill>
+              <a:schemeClr val="tx1"/>
+            </a:solidFill>
+          </a:ln>
+        </p:spPr>
+        <p:style>
+          <a:lnRef idx="2">
+            <a:schemeClr val="accent1"/>
+          </a:lnRef>
+          <a:fillRef idx="0">
+            <a:schemeClr val="accent1"/>
+          </a:fillRef>
+          <a:effectRef idx="1">
+            <a:schemeClr val="accent1"/>
+          </a:effectRef>
+          <a:fontRef idx="minor">
+            <a:schemeClr val="tx1"/>
+          </a:fontRef>
+        </p:style>
+      </p:cxnSp>
+      <p:cxnSp>
+        <p:nvCxnSpPr>
+          <p:cNvPr id="85" name="Straight Connector 84">
+            <a:extLst>
+              <a:ext uri="{FF2B5EF4-FFF2-40B4-BE49-F238E27FC236}">
+                <a16:creationId xmlns:a16="http://schemas.microsoft.com/office/drawing/2014/main" id="{5502832F-F85C-BFBA-96EE-473EA9F9DA50}"/>
+              </a:ext>
+            </a:extLst>
+          </p:cNvPr>
+          <p:cNvCxnSpPr>
+            <a:cxnSpLocks/>
+          </p:cNvCxnSpPr>
+          <p:nvPr/>
+        </p:nvCxnSpPr>
+        <p:spPr>
+          <a:xfrm flipH="1">
+            <a:off x="7176509" y="3141811"/>
+            <a:ext cx="152400" cy="0"/>
+          </a:xfrm>
+          <a:prstGeom prst="line">
+            <a:avLst/>
+          </a:prstGeom>
+          <a:ln>
+            <a:solidFill>
+              <a:schemeClr val="tx1"/>
+            </a:solidFill>
+          </a:ln>
+        </p:spPr>
+        <p:style>
+          <a:lnRef idx="2">
+            <a:schemeClr val="accent1"/>
+          </a:lnRef>
+          <a:fillRef idx="0">
+            <a:schemeClr val="accent1"/>
+          </a:fillRef>
+          <a:effectRef idx="1">
+            <a:schemeClr val="accent1"/>
+          </a:effectRef>
+          <a:fontRef idx="minor">
+            <a:schemeClr val="tx1"/>
+          </a:fontRef>
+        </p:style>
+      </p:cxnSp>
+      <p:cxnSp>
+        <p:nvCxnSpPr>
+          <p:cNvPr id="88" name="Straight Connector 87">
+            <a:extLst>
+              <a:ext uri="{FF2B5EF4-FFF2-40B4-BE49-F238E27FC236}">
+                <a16:creationId xmlns:a16="http://schemas.microsoft.com/office/drawing/2014/main" id="{85BEB4DD-7484-37BF-9E7B-6FA018528F78}"/>
+              </a:ext>
+            </a:extLst>
+          </p:cNvPr>
+          <p:cNvCxnSpPr>
+            <a:cxnSpLocks/>
+          </p:cNvCxnSpPr>
+          <p:nvPr/>
+        </p:nvCxnSpPr>
+        <p:spPr>
+          <a:xfrm flipH="1">
+            <a:off x="7222150" y="3187054"/>
+            <a:ext cx="61118" cy="0"/>
+          </a:xfrm>
+          <a:prstGeom prst="line">
+            <a:avLst/>
+          </a:prstGeom>
+          <a:ln>
+            <a:solidFill>
+              <a:schemeClr val="tx1"/>
+            </a:solidFill>
+          </a:ln>
+        </p:spPr>
+        <p:style>
+          <a:lnRef idx="2">
+            <a:schemeClr val="accent1"/>
+          </a:lnRef>
+          <a:fillRef idx="0">
+            <a:schemeClr val="accent1"/>
+          </a:fillRef>
+          <a:effectRef idx="1">
+            <a:schemeClr val="accent1"/>
+          </a:effectRef>
+          <a:fontRef idx="minor">
+            <a:schemeClr val="tx1"/>
+          </a:fontRef>
+        </p:style>
+      </p:cxnSp>
+      <p:sp>
+        <p:nvSpPr>
+          <p:cNvPr id="91" name="TextBox 90">
+            <a:extLst>
+              <a:ext uri="{FF2B5EF4-FFF2-40B4-BE49-F238E27FC236}">
+                <a16:creationId xmlns:a16="http://schemas.microsoft.com/office/drawing/2014/main" id="{F3511BEA-BB3A-46C2-0798-2D6FFD0CDAE7}"/>
+              </a:ext>
+            </a:extLst>
+          </p:cNvPr>
+          <p:cNvSpPr txBox="1"/>
+          <p:nvPr/>
+        </p:nvSpPr>
+        <p:spPr>
+          <a:xfrm>
+            <a:off x="7556124" y="2062596"/>
+            <a:ext cx="274434" cy="276999"/>
+          </a:xfrm>
+          <a:prstGeom prst="rect">
+            <a:avLst/>
+          </a:prstGeom>
+          <a:noFill/>
+        </p:spPr>
+        <p:txBody>
+          <a:bodyPr wrap="none" rtlCol="0">
+            <a:spAutoFit/>
+          </a:bodyPr>
+          <a:lstStyle/>
+          <a:p>
+            <a:pPr algn="ctr"/>
+            <a:r>
+              <a:rPr lang="ar-EG" sz="1200" dirty="0"/>
+              <a:t>+</a:t>
+            </a:r>
+            <a:endParaRPr lang="en-US" sz="1200" dirty="0"/>
+          </a:p>
+        </p:txBody>
+      </p:sp>
+      <p:sp>
+        <p:nvSpPr>
+          <p:cNvPr id="92" name="TextBox 91">
+            <a:extLst>
+              <a:ext uri="{FF2B5EF4-FFF2-40B4-BE49-F238E27FC236}">
+                <a16:creationId xmlns:a16="http://schemas.microsoft.com/office/drawing/2014/main" id="{6A2E38B6-2AAE-BB2E-564D-D800381076F6}"/>
+              </a:ext>
+            </a:extLst>
+          </p:cNvPr>
+          <p:cNvSpPr txBox="1"/>
+          <p:nvPr/>
+        </p:nvSpPr>
+        <p:spPr>
+          <a:xfrm>
+            <a:off x="7565476" y="2634134"/>
+            <a:ext cx="237566" cy="276999"/>
+          </a:xfrm>
+          <a:prstGeom prst="rect">
+            <a:avLst/>
+          </a:prstGeom>
+          <a:noFill/>
+        </p:spPr>
+        <p:txBody>
+          <a:bodyPr wrap="none" rtlCol="0">
+            <a:spAutoFit/>
+          </a:bodyPr>
+          <a:lstStyle/>
+          <a:p>
+            <a:pPr algn="ctr"/>
+            <a:r>
+              <a:rPr lang="en-US" sz="1200" dirty="0"/>
+              <a:t>-</a:t>
+            </a:r>
+          </a:p>
+        </p:txBody>
+      </p:sp>
+      <p:cxnSp>
+        <p:nvCxnSpPr>
+          <p:cNvPr id="93" name="Straight Arrow Connector 92">
+            <a:extLst>
+              <a:ext uri="{FF2B5EF4-FFF2-40B4-BE49-F238E27FC236}">
+                <a16:creationId xmlns:a16="http://schemas.microsoft.com/office/drawing/2014/main" id="{6DCA8878-F354-61C8-5DCC-3DEA2984FB11}"/>
+              </a:ext>
+            </a:extLst>
+          </p:cNvPr>
+          <p:cNvCxnSpPr>
+            <a:cxnSpLocks/>
+            <a:stCxn id="15" idx="3"/>
+          </p:cNvCxnSpPr>
+          <p:nvPr/>
+        </p:nvCxnSpPr>
+        <p:spPr>
+          <a:xfrm>
+            <a:off x="10975019" y="2495219"/>
+            <a:ext cx="810797" cy="0"/>
+          </a:xfrm>
+          <a:prstGeom prst="straightConnector1">
+            <a:avLst/>
+          </a:prstGeom>
+          <a:ln>
+            <a:solidFill>
+              <a:schemeClr val="tx1"/>
+            </a:solidFill>
+            <a:tailEnd type="triangle"/>
+          </a:ln>
+        </p:spPr>
+        <p:style>
+          <a:lnRef idx="2">
+            <a:schemeClr val="accent1"/>
+          </a:lnRef>
+          <a:fillRef idx="0">
+            <a:schemeClr val="accent1"/>
+          </a:fillRef>
+          <a:effectRef idx="1">
+            <a:schemeClr val="accent1"/>
+          </a:effectRef>
+          <a:fontRef idx="minor">
+            <a:schemeClr val="tx1"/>
+          </a:fontRef>
+        </p:style>
+      </p:cxnSp>
     </p:spTree>
     <p:extLst>
       <p:ext uri="{BB962C8B-B14F-4D97-AF65-F5344CB8AC3E}">
-        <p14:creationId xmlns:p14="http://schemas.microsoft.com/office/powerpoint/2010/main" val="3837089173"/>
+        <p14:creationId xmlns:p14="http://schemas.microsoft.com/office/powerpoint/2010/main" val="2271414276"/>
       </p:ext>
     </p:extLst>
   </p:cSld>
   <p:clrMapOvr>
     <a:masterClrMapping/>
   </p:clrMapOvr>
-  <mc:AlternateContent xmlns:mc="http://schemas.openxmlformats.org/markup-compatibility/2006">
-    <mc:Choice xmlns:p159="http://schemas.microsoft.com/office/powerpoint/2015/09/main" Requires="p159">
+  <mc:AlternateContent xmlns:mc="http://schemas.openxmlformats.org/markup-compatibility/2006" xmlns:p159="http://schemas.microsoft.com/office/powerpoint/2015/09/main">
+    <mc:Choice Requires="p159">
       <p:transition spd="slow">
         <p159:morph option="byObject"/>
       </p:transition>
     </mc:Choice>
-    <mc:Fallback>
+    <mc:Fallback xmlns="">
       <p:transition spd="slow">
         <p:fade/>
       </p:transition>
@@ -10244,7 +14957,7 @@
         <p:cNvPr id="1" name="">
           <a:extLst>
             <a:ext uri="{FF2B5EF4-FFF2-40B4-BE49-F238E27FC236}">
-              <a16:creationId xmlns:a16="http://schemas.microsoft.com/office/drawing/2014/main" id="{65D5CA08-67CA-48C7-7F68-BB1F184194E6}"/>
+              <a16:creationId xmlns:a16="http://schemas.microsoft.com/office/drawing/2014/main" id="{D99442FD-ADEC-69FD-BDB1-1E3A35FDD6E0}"/>
             </a:ext>
           </a:extLst>
         </p:cNvPr>
@@ -10259,71 +14972,1985 @@
           <a:chExt cx="0" cy="0"/>
         </a:xfrm>
       </p:grpSpPr>
+      <p:sp>
+        <p:nvSpPr>
+          <p:cNvPr id="3" name="Title 1">
+            <a:extLst>
+              <a:ext uri="{FF2B5EF4-FFF2-40B4-BE49-F238E27FC236}">
+                <a16:creationId xmlns:a16="http://schemas.microsoft.com/office/drawing/2014/main" id="{94BCDA19-5C0E-2ED9-8F3C-5EB6DD093226}"/>
+              </a:ext>
+            </a:extLst>
+          </p:cNvPr>
+          <p:cNvSpPr txBox="1">
+            <a:spLocks/>
+          </p:cNvSpPr>
+          <p:nvPr/>
+        </p:nvSpPr>
+        <p:spPr>
+          <a:xfrm>
+            <a:off x="4637461" y="144793"/>
+            <a:ext cx="2917078" cy="371219"/>
+          </a:xfrm>
+          <a:prstGeom prst="rect">
+            <a:avLst/>
+          </a:prstGeom>
+        </p:spPr>
+        <p:txBody>
+          <a:bodyPr vert="horz" lIns="91440" tIns="45720" rIns="91440" bIns="45720" rtlCol="0" anchor="b">
+            <a:normAutofit fontScale="75000" lnSpcReduction="20000"/>
+          </a:bodyPr>
+          <a:lstStyle>
+            <a:lvl1pPr algn="ctr" defTabSz="914400" rtl="0" eaLnBrk="1" latinLnBrk="0" hangingPunct="1">
+              <a:lnSpc>
+                <a:spcPct val="90000"/>
+              </a:lnSpc>
+              <a:spcBef>
+                <a:spcPct val="0"/>
+              </a:spcBef>
+              <a:buNone/>
+              <a:defRPr sz="6000" kern="1200">
+                <a:solidFill>
+                  <a:schemeClr val="tx1"/>
+                </a:solidFill>
+                <a:latin typeface="+mj-lt"/>
+                <a:ea typeface="+mj-ea"/>
+                <a:cs typeface="+mj-cs"/>
+              </a:defRPr>
+            </a:lvl1pPr>
+          </a:lstStyle>
+          <a:p>
+            <a:r>
+              <a:rPr lang="en-US" sz="3200" dirty="0"/>
+              <a:t>8-PSK</a:t>
+            </a:r>
+          </a:p>
+        </p:txBody>
+      </p:sp>
+      <p:sp>
+        <p:nvSpPr>
+          <p:cNvPr id="4" name="Rectangle 3">
+            <a:extLst>
+              <a:ext uri="{FF2B5EF4-FFF2-40B4-BE49-F238E27FC236}">
+                <a16:creationId xmlns:a16="http://schemas.microsoft.com/office/drawing/2014/main" id="{4395EF33-EDF2-A163-4215-710EA89F8023}"/>
+              </a:ext>
+            </a:extLst>
+          </p:cNvPr>
+          <p:cNvSpPr/>
+          <p:nvPr/>
+        </p:nvSpPr>
+        <p:spPr>
+          <a:xfrm>
+            <a:off x="3050664" y="2912350"/>
+            <a:ext cx="1117721" cy="771099"/>
+          </a:xfrm>
+          <a:prstGeom prst="rect">
+            <a:avLst/>
+          </a:prstGeom>
+          <a:noFill/>
+          <a:ln w="38100">
+            <a:solidFill>
+              <a:schemeClr val="tx1"/>
+            </a:solidFill>
+          </a:ln>
+        </p:spPr>
+        <p:style>
+          <a:lnRef idx="2">
+            <a:schemeClr val="accent1">
+              <a:shade val="15000"/>
+            </a:schemeClr>
+          </a:lnRef>
+          <a:fillRef idx="1">
+            <a:schemeClr val="accent1"/>
+          </a:fillRef>
+          <a:effectRef idx="0">
+            <a:schemeClr val="accent1"/>
+          </a:effectRef>
+          <a:fontRef idx="minor">
+            <a:schemeClr val="lt1"/>
+          </a:fontRef>
+        </p:style>
+        <p:txBody>
+          <a:bodyPr rtlCol="0" anchor="ctr"/>
+          <a:lstStyle/>
+          <a:p>
+            <a:pPr algn="ctr"/>
+            <a:endParaRPr lang="en-US"/>
+          </a:p>
+        </p:txBody>
+      </p:sp>
+      <p:sp>
+        <p:nvSpPr>
+          <p:cNvPr id="5" name="Rectangle 4">
+            <a:extLst>
+              <a:ext uri="{FF2B5EF4-FFF2-40B4-BE49-F238E27FC236}">
+                <a16:creationId xmlns:a16="http://schemas.microsoft.com/office/drawing/2014/main" id="{069CE6CF-8EFF-3057-C35B-AEE0F654ED41}"/>
+              </a:ext>
+            </a:extLst>
+          </p:cNvPr>
+          <p:cNvSpPr/>
+          <p:nvPr/>
+        </p:nvSpPr>
+        <p:spPr>
+          <a:xfrm>
+            <a:off x="6211159" y="2745289"/>
+            <a:ext cx="1117721" cy="1120624"/>
+          </a:xfrm>
+          <a:prstGeom prst="rect">
+            <a:avLst/>
+          </a:prstGeom>
+          <a:noFill/>
+          <a:ln w="38100">
+            <a:solidFill>
+              <a:schemeClr val="tx1"/>
+            </a:solidFill>
+          </a:ln>
+        </p:spPr>
+        <p:style>
+          <a:lnRef idx="2">
+            <a:schemeClr val="accent1">
+              <a:shade val="15000"/>
+            </a:schemeClr>
+          </a:lnRef>
+          <a:fillRef idx="1">
+            <a:schemeClr val="accent1"/>
+          </a:fillRef>
+          <a:effectRef idx="0">
+            <a:schemeClr val="accent1"/>
+          </a:effectRef>
+          <a:fontRef idx="minor">
+            <a:schemeClr val="lt1"/>
+          </a:fontRef>
+        </p:style>
+        <p:txBody>
+          <a:bodyPr rtlCol="0" anchor="ctr"/>
+          <a:lstStyle/>
+          <a:p>
+            <a:pPr algn="ctr"/>
+            <a:endParaRPr lang="en-US"/>
+          </a:p>
+        </p:txBody>
+      </p:sp>
+      <p:sp>
+        <p:nvSpPr>
+          <p:cNvPr id="7" name="TextBox 6">
+            <a:extLst>
+              <a:ext uri="{FF2B5EF4-FFF2-40B4-BE49-F238E27FC236}">
+                <a16:creationId xmlns:a16="http://schemas.microsoft.com/office/drawing/2014/main" id="{8567ED74-6307-60E0-9905-0227C755AC2A}"/>
+              </a:ext>
+            </a:extLst>
+          </p:cNvPr>
+          <p:cNvSpPr txBox="1"/>
+          <p:nvPr/>
+        </p:nvSpPr>
+        <p:spPr>
+          <a:xfrm>
+            <a:off x="5492761" y="1338093"/>
+            <a:ext cx="565449" cy="369332"/>
+          </a:xfrm>
+          <a:prstGeom prst="rect">
+            <a:avLst/>
+          </a:prstGeom>
+          <a:noFill/>
+        </p:spPr>
+        <p:txBody>
+          <a:bodyPr wrap="square" rtlCol="0">
+            <a:spAutoFit/>
+          </a:bodyPr>
+          <a:lstStyle/>
+          <a:p>
+            <a:pPr algn="ctr"/>
+            <a:r>
+              <a:rPr lang="en-US" dirty="0"/>
+              <a:t>LPF</a:t>
+            </a:r>
+          </a:p>
+        </p:txBody>
+      </p:sp>
+      <p:sp>
+        <p:nvSpPr>
+          <p:cNvPr id="8" name="TextBox 7">
+            <a:extLst>
+              <a:ext uri="{FF2B5EF4-FFF2-40B4-BE49-F238E27FC236}">
+                <a16:creationId xmlns:a16="http://schemas.microsoft.com/office/drawing/2014/main" id="{048D5515-3E65-66E8-6800-76B627D746CF}"/>
+              </a:ext>
+            </a:extLst>
+          </p:cNvPr>
+          <p:cNvSpPr txBox="1"/>
+          <p:nvPr/>
+        </p:nvSpPr>
+        <p:spPr>
+          <a:xfrm>
+            <a:off x="6300730" y="2795273"/>
+            <a:ext cx="942886" cy="1107996"/>
+          </a:xfrm>
+          <a:prstGeom prst="rect">
+            <a:avLst/>
+          </a:prstGeom>
+          <a:noFill/>
+        </p:spPr>
+        <p:txBody>
+          <a:bodyPr wrap="none" rtlCol="0">
+            <a:spAutoFit/>
+          </a:bodyPr>
+          <a:lstStyle/>
+          <a:p>
+            <a:pPr algn="ctr"/>
+            <a:r>
+              <a:rPr lang="en-US" sz="1600" dirty="0"/>
+              <a:t>Symbol</a:t>
+            </a:r>
+          </a:p>
+          <a:p>
+            <a:pPr algn="ctr"/>
+            <a:r>
+              <a:rPr lang="en-US" sz="1600" dirty="0"/>
+              <a:t>timing</a:t>
+            </a:r>
+          </a:p>
+          <a:p>
+            <a:pPr algn="ctr"/>
+            <a:r>
+              <a:rPr lang="en-US" sz="1600" dirty="0"/>
+              <a:t>recovery</a:t>
+            </a:r>
+          </a:p>
+          <a:p>
+            <a:pPr algn="ctr"/>
+            <a:r>
+              <a:rPr lang="en-US" sz="1600" dirty="0"/>
+              <a:t>(STR)</a:t>
+            </a:r>
+          </a:p>
+        </p:txBody>
+      </p:sp>
+      <p:sp>
+        <p:nvSpPr>
+          <p:cNvPr id="18" name="Oval 17">
+            <a:extLst>
+              <a:ext uri="{FF2B5EF4-FFF2-40B4-BE49-F238E27FC236}">
+                <a16:creationId xmlns:a16="http://schemas.microsoft.com/office/drawing/2014/main" id="{760936A1-C621-88F5-A1AB-73D52CA252D0}"/>
+              </a:ext>
+            </a:extLst>
+          </p:cNvPr>
+          <p:cNvSpPr/>
+          <p:nvPr/>
+        </p:nvSpPr>
+        <p:spPr>
+          <a:xfrm rot="8243572">
+            <a:off x="3417789" y="1328709"/>
+            <a:ext cx="400181" cy="400181"/>
+          </a:xfrm>
+          <a:prstGeom prst="ellipse">
+            <a:avLst/>
+          </a:prstGeom>
+          <a:noFill/>
+          <a:ln>
+            <a:solidFill>
+              <a:schemeClr val="tx1"/>
+            </a:solidFill>
+          </a:ln>
+        </p:spPr>
+        <p:style>
+          <a:lnRef idx="2">
+            <a:schemeClr val="accent1">
+              <a:shade val="15000"/>
+            </a:schemeClr>
+          </a:lnRef>
+          <a:fillRef idx="1">
+            <a:schemeClr val="accent1"/>
+          </a:fillRef>
+          <a:effectRef idx="0">
+            <a:schemeClr val="accent1"/>
+          </a:effectRef>
+          <a:fontRef idx="minor">
+            <a:schemeClr val="lt1"/>
+          </a:fontRef>
+        </p:style>
+        <p:txBody>
+          <a:bodyPr rtlCol="0" anchor="ctr"/>
+          <a:lstStyle/>
+          <a:p>
+            <a:pPr algn="ctr"/>
+            <a:endParaRPr lang="en-US"/>
+          </a:p>
+        </p:txBody>
+      </p:sp>
+      <p:cxnSp>
+        <p:nvCxnSpPr>
+          <p:cNvPr id="19" name="Straight Connector 18">
+            <a:extLst>
+              <a:ext uri="{FF2B5EF4-FFF2-40B4-BE49-F238E27FC236}">
+                <a16:creationId xmlns:a16="http://schemas.microsoft.com/office/drawing/2014/main" id="{4FD23B00-AD7E-5FE6-B604-11480D36A58D}"/>
+              </a:ext>
+            </a:extLst>
+          </p:cNvPr>
+          <p:cNvCxnSpPr>
+            <a:cxnSpLocks/>
+          </p:cNvCxnSpPr>
+          <p:nvPr/>
+        </p:nvCxnSpPr>
+        <p:spPr>
+          <a:xfrm rot="8243572">
+            <a:off x="3617880" y="1328709"/>
+            <a:ext cx="0" cy="400181"/>
+          </a:xfrm>
+          <a:prstGeom prst="line">
+            <a:avLst/>
+          </a:prstGeom>
+          <a:ln>
+            <a:solidFill>
+              <a:schemeClr val="tx1"/>
+            </a:solidFill>
+          </a:ln>
+        </p:spPr>
+        <p:style>
+          <a:lnRef idx="2">
+            <a:schemeClr val="accent1"/>
+          </a:lnRef>
+          <a:fillRef idx="0">
+            <a:schemeClr val="accent1"/>
+          </a:fillRef>
+          <a:effectRef idx="1">
+            <a:schemeClr val="accent1"/>
+          </a:effectRef>
+          <a:fontRef idx="minor">
+            <a:schemeClr val="tx1"/>
+          </a:fontRef>
+        </p:style>
+      </p:cxnSp>
+      <p:cxnSp>
+        <p:nvCxnSpPr>
+          <p:cNvPr id="20" name="Straight Connector 19">
+            <a:extLst>
+              <a:ext uri="{FF2B5EF4-FFF2-40B4-BE49-F238E27FC236}">
+                <a16:creationId xmlns:a16="http://schemas.microsoft.com/office/drawing/2014/main" id="{19F113F9-E66E-9479-8456-36D18D2E26BD}"/>
+              </a:ext>
+            </a:extLst>
+          </p:cNvPr>
+          <p:cNvCxnSpPr>
+            <a:cxnSpLocks/>
+          </p:cNvCxnSpPr>
+          <p:nvPr/>
+        </p:nvCxnSpPr>
+        <p:spPr>
+          <a:xfrm rot="8243572" flipH="1">
+            <a:off x="3417789" y="1528800"/>
+            <a:ext cx="400181" cy="0"/>
+          </a:xfrm>
+          <a:prstGeom prst="line">
+            <a:avLst/>
+          </a:prstGeom>
+          <a:ln>
+            <a:solidFill>
+              <a:schemeClr val="tx1"/>
+            </a:solidFill>
+          </a:ln>
+        </p:spPr>
+        <p:style>
+          <a:lnRef idx="2">
+            <a:schemeClr val="accent1"/>
+          </a:lnRef>
+          <a:fillRef idx="0">
+            <a:schemeClr val="accent1"/>
+          </a:fillRef>
+          <a:effectRef idx="1">
+            <a:schemeClr val="accent1"/>
+          </a:effectRef>
+          <a:fontRef idx="minor">
+            <a:schemeClr val="tx1"/>
+          </a:fontRef>
+        </p:style>
+      </p:cxnSp>
+      <p:sp>
+        <p:nvSpPr>
+          <p:cNvPr id="21" name="Rectangle 20">
+            <a:extLst>
+              <a:ext uri="{FF2B5EF4-FFF2-40B4-BE49-F238E27FC236}">
+                <a16:creationId xmlns:a16="http://schemas.microsoft.com/office/drawing/2014/main" id="{9D4BB7D7-B25D-0800-0271-575FDB87C76C}"/>
+              </a:ext>
+            </a:extLst>
+          </p:cNvPr>
+          <p:cNvSpPr/>
+          <p:nvPr/>
+        </p:nvSpPr>
+        <p:spPr>
+          <a:xfrm>
+            <a:off x="5457126" y="1212294"/>
+            <a:ext cx="644657" cy="646331"/>
+          </a:xfrm>
+          <a:prstGeom prst="rect">
+            <a:avLst/>
+          </a:prstGeom>
+          <a:noFill/>
+          <a:ln w="38100">
+            <a:solidFill>
+              <a:schemeClr val="tx1"/>
+            </a:solidFill>
+          </a:ln>
+        </p:spPr>
+        <p:style>
+          <a:lnRef idx="2">
+            <a:schemeClr val="accent1">
+              <a:shade val="15000"/>
+            </a:schemeClr>
+          </a:lnRef>
+          <a:fillRef idx="1">
+            <a:schemeClr val="accent1"/>
+          </a:fillRef>
+          <a:effectRef idx="0">
+            <a:schemeClr val="accent1"/>
+          </a:effectRef>
+          <a:fontRef idx="minor">
+            <a:schemeClr val="lt1"/>
+          </a:fontRef>
+        </p:style>
+        <p:txBody>
+          <a:bodyPr rtlCol="0" anchor="ctr"/>
+          <a:lstStyle/>
+          <a:p>
+            <a:pPr algn="ctr"/>
+            <a:endParaRPr lang="en-US"/>
+          </a:p>
+        </p:txBody>
+      </p:sp>
+      <p:cxnSp>
+        <p:nvCxnSpPr>
+          <p:cNvPr id="24" name="Straight Arrow Connector 23">
+            <a:extLst>
+              <a:ext uri="{FF2B5EF4-FFF2-40B4-BE49-F238E27FC236}">
+                <a16:creationId xmlns:a16="http://schemas.microsoft.com/office/drawing/2014/main" id="{410AE478-1213-7E5D-9172-68FCBCED8ED5}"/>
+              </a:ext>
+            </a:extLst>
+          </p:cNvPr>
+          <p:cNvCxnSpPr>
+            <a:cxnSpLocks/>
+            <a:stCxn id="4" idx="3"/>
+            <a:endCxn id="5" idx="1"/>
+          </p:cNvCxnSpPr>
+          <p:nvPr/>
+        </p:nvCxnSpPr>
+        <p:spPr>
+          <a:xfrm>
+            <a:off x="4168385" y="3297900"/>
+            <a:ext cx="2042774" cy="7701"/>
+          </a:xfrm>
+          <a:prstGeom prst="straightConnector1">
+            <a:avLst/>
+          </a:prstGeom>
+          <a:ln>
+            <a:solidFill>
+              <a:schemeClr val="tx1"/>
+            </a:solidFill>
+            <a:tailEnd type="triangle"/>
+          </a:ln>
+        </p:spPr>
+        <p:style>
+          <a:lnRef idx="2">
+            <a:schemeClr val="accent1"/>
+          </a:lnRef>
+          <a:fillRef idx="0">
+            <a:schemeClr val="accent1"/>
+          </a:fillRef>
+          <a:effectRef idx="1">
+            <a:schemeClr val="accent1"/>
+          </a:effectRef>
+          <a:fontRef idx="minor">
+            <a:schemeClr val="tx1"/>
+          </a:fontRef>
+        </p:style>
+      </p:cxnSp>
+      <p:sp>
+        <p:nvSpPr>
+          <p:cNvPr id="46" name="Rectangle 45">
+            <a:extLst>
+              <a:ext uri="{FF2B5EF4-FFF2-40B4-BE49-F238E27FC236}">
+                <a16:creationId xmlns:a16="http://schemas.microsoft.com/office/drawing/2014/main" id="{500617BB-97AC-DADA-91A8-74A02BB00674}"/>
+              </a:ext>
+            </a:extLst>
+          </p:cNvPr>
+          <p:cNvSpPr/>
+          <p:nvPr/>
+        </p:nvSpPr>
+        <p:spPr>
+          <a:xfrm>
+            <a:off x="6768468" y="1209154"/>
+            <a:ext cx="644657" cy="646331"/>
+          </a:xfrm>
+          <a:prstGeom prst="rect">
+            <a:avLst/>
+          </a:prstGeom>
+          <a:noFill/>
+          <a:ln w="38100">
+            <a:solidFill>
+              <a:schemeClr val="tx1"/>
+            </a:solidFill>
+          </a:ln>
+        </p:spPr>
+        <p:style>
+          <a:lnRef idx="2">
+            <a:schemeClr val="accent1">
+              <a:shade val="15000"/>
+            </a:schemeClr>
+          </a:lnRef>
+          <a:fillRef idx="1">
+            <a:schemeClr val="accent1"/>
+          </a:fillRef>
+          <a:effectRef idx="0">
+            <a:schemeClr val="accent1"/>
+          </a:effectRef>
+          <a:fontRef idx="minor">
+            <a:schemeClr val="lt1"/>
+          </a:fontRef>
+        </p:style>
+        <p:txBody>
+          <a:bodyPr rtlCol="0" anchor="ctr"/>
+          <a:lstStyle/>
+          <a:p>
+            <a:pPr algn="ctr"/>
+            <a:endParaRPr lang="en-US"/>
+          </a:p>
+        </p:txBody>
+      </p:sp>
+      <p:cxnSp>
+        <p:nvCxnSpPr>
+          <p:cNvPr id="50" name="Straight Arrow Connector 49">
+            <a:extLst>
+              <a:ext uri="{FF2B5EF4-FFF2-40B4-BE49-F238E27FC236}">
+                <a16:creationId xmlns:a16="http://schemas.microsoft.com/office/drawing/2014/main" id="{7B635682-FA3D-4871-FE28-88C675FED046}"/>
+              </a:ext>
+            </a:extLst>
+          </p:cNvPr>
+          <p:cNvCxnSpPr>
+            <a:cxnSpLocks/>
+            <a:stCxn id="4" idx="0"/>
+            <a:endCxn id="18" idx="7"/>
+          </p:cNvCxnSpPr>
+          <p:nvPr/>
+        </p:nvCxnSpPr>
+        <p:spPr>
+          <a:xfrm flipV="1">
+            <a:off x="3609525" y="1728716"/>
+            <a:ext cx="0" cy="1183634"/>
+          </a:xfrm>
+          <a:prstGeom prst="straightConnector1">
+            <a:avLst/>
+          </a:prstGeom>
+          <a:ln>
+            <a:solidFill>
+              <a:schemeClr val="tx1"/>
+            </a:solidFill>
+            <a:tailEnd type="triangle"/>
+          </a:ln>
+        </p:spPr>
+        <p:style>
+          <a:lnRef idx="2">
+            <a:schemeClr val="accent1"/>
+          </a:lnRef>
+          <a:fillRef idx="0">
+            <a:schemeClr val="accent1"/>
+          </a:fillRef>
+          <a:effectRef idx="1">
+            <a:schemeClr val="accent1"/>
+          </a:effectRef>
+          <a:fontRef idx="minor">
+            <a:schemeClr val="tx1"/>
+          </a:fontRef>
+        </p:style>
+      </p:cxnSp>
+      <p:cxnSp>
+        <p:nvCxnSpPr>
+          <p:cNvPr id="53" name="Straight Arrow Connector 52">
+            <a:extLst>
+              <a:ext uri="{FF2B5EF4-FFF2-40B4-BE49-F238E27FC236}">
+                <a16:creationId xmlns:a16="http://schemas.microsoft.com/office/drawing/2014/main" id="{CA0C73F0-0190-3CAC-1616-5C5D3C339030}"/>
+              </a:ext>
+            </a:extLst>
+          </p:cNvPr>
+          <p:cNvCxnSpPr>
+            <a:cxnSpLocks/>
+            <a:endCxn id="65" idx="5"/>
+          </p:cNvCxnSpPr>
+          <p:nvPr/>
+        </p:nvCxnSpPr>
+        <p:spPr>
+          <a:xfrm rot="16200000" flipH="1">
+            <a:off x="1720363" y="3345501"/>
+            <a:ext cx="1712102" cy="1632298"/>
+          </a:xfrm>
+          <a:prstGeom prst="bentConnector3">
+            <a:avLst>
+              <a:gd name="adj1" fmla="val 100293"/>
+            </a:avLst>
+          </a:prstGeom>
+          <a:ln>
+            <a:solidFill>
+              <a:schemeClr val="tx1"/>
+            </a:solidFill>
+            <a:tailEnd type="triangle"/>
+          </a:ln>
+        </p:spPr>
+        <p:style>
+          <a:lnRef idx="2">
+            <a:schemeClr val="accent1"/>
+          </a:lnRef>
+          <a:fillRef idx="0">
+            <a:schemeClr val="accent1"/>
+          </a:fillRef>
+          <a:effectRef idx="1">
+            <a:schemeClr val="accent1"/>
+          </a:effectRef>
+          <a:fontRef idx="minor">
+            <a:schemeClr val="tx1"/>
+          </a:fontRef>
+        </p:style>
+      </p:cxnSp>
+      <p:sp>
+        <p:nvSpPr>
+          <p:cNvPr id="65" name="Oval 64">
+            <a:extLst>
+              <a:ext uri="{FF2B5EF4-FFF2-40B4-BE49-F238E27FC236}">
+                <a16:creationId xmlns:a16="http://schemas.microsoft.com/office/drawing/2014/main" id="{F98FE607-6A79-8E96-2481-E60FF1E8B29F}"/>
+              </a:ext>
+            </a:extLst>
+          </p:cNvPr>
+          <p:cNvSpPr/>
+          <p:nvPr/>
+        </p:nvSpPr>
+        <p:spPr>
+          <a:xfrm rot="8243572">
+            <a:off x="3392389" y="4825965"/>
+            <a:ext cx="400181" cy="400181"/>
+          </a:xfrm>
+          <a:prstGeom prst="ellipse">
+            <a:avLst/>
+          </a:prstGeom>
+          <a:noFill/>
+          <a:ln>
+            <a:solidFill>
+              <a:schemeClr val="tx1"/>
+            </a:solidFill>
+          </a:ln>
+        </p:spPr>
+        <p:style>
+          <a:lnRef idx="2">
+            <a:schemeClr val="accent1">
+              <a:shade val="15000"/>
+            </a:schemeClr>
+          </a:lnRef>
+          <a:fillRef idx="1">
+            <a:schemeClr val="accent1"/>
+          </a:fillRef>
+          <a:effectRef idx="0">
+            <a:schemeClr val="accent1"/>
+          </a:effectRef>
+          <a:fontRef idx="minor">
+            <a:schemeClr val="lt1"/>
+          </a:fontRef>
+        </p:style>
+        <p:txBody>
+          <a:bodyPr rtlCol="0" anchor="ctr"/>
+          <a:lstStyle/>
+          <a:p>
+            <a:pPr algn="ctr"/>
+            <a:endParaRPr lang="en-US"/>
+          </a:p>
+        </p:txBody>
+      </p:sp>
+      <p:cxnSp>
+        <p:nvCxnSpPr>
+          <p:cNvPr id="66" name="Straight Connector 65">
+            <a:extLst>
+              <a:ext uri="{FF2B5EF4-FFF2-40B4-BE49-F238E27FC236}">
+                <a16:creationId xmlns:a16="http://schemas.microsoft.com/office/drawing/2014/main" id="{C88520D9-ED7E-20BE-E240-48EBB61CC1BE}"/>
+              </a:ext>
+            </a:extLst>
+          </p:cNvPr>
+          <p:cNvCxnSpPr>
+            <a:cxnSpLocks/>
+          </p:cNvCxnSpPr>
+          <p:nvPr/>
+        </p:nvCxnSpPr>
+        <p:spPr>
+          <a:xfrm rot="8243572">
+            <a:off x="3592480" y="4825965"/>
+            <a:ext cx="0" cy="400181"/>
+          </a:xfrm>
+          <a:prstGeom prst="line">
+            <a:avLst/>
+          </a:prstGeom>
+          <a:ln>
+            <a:solidFill>
+              <a:schemeClr val="tx1"/>
+            </a:solidFill>
+          </a:ln>
+        </p:spPr>
+        <p:style>
+          <a:lnRef idx="2">
+            <a:schemeClr val="accent1"/>
+          </a:lnRef>
+          <a:fillRef idx="0">
+            <a:schemeClr val="accent1"/>
+          </a:fillRef>
+          <a:effectRef idx="1">
+            <a:schemeClr val="accent1"/>
+          </a:effectRef>
+          <a:fontRef idx="minor">
+            <a:schemeClr val="tx1"/>
+          </a:fontRef>
+        </p:style>
+      </p:cxnSp>
+      <p:cxnSp>
+        <p:nvCxnSpPr>
+          <p:cNvPr id="67" name="Straight Connector 66">
+            <a:extLst>
+              <a:ext uri="{FF2B5EF4-FFF2-40B4-BE49-F238E27FC236}">
+                <a16:creationId xmlns:a16="http://schemas.microsoft.com/office/drawing/2014/main" id="{51855E83-9257-C2FB-77A6-C6E5E2AED6E4}"/>
+              </a:ext>
+            </a:extLst>
+          </p:cNvPr>
+          <p:cNvCxnSpPr>
+            <a:cxnSpLocks/>
+          </p:cNvCxnSpPr>
+          <p:nvPr/>
+        </p:nvCxnSpPr>
+        <p:spPr>
+          <a:xfrm rot="8243572" flipH="1">
+            <a:off x="3392389" y="5026056"/>
+            <a:ext cx="400181" cy="0"/>
+          </a:xfrm>
+          <a:prstGeom prst="line">
+            <a:avLst/>
+          </a:prstGeom>
+          <a:ln>
+            <a:solidFill>
+              <a:schemeClr val="tx1"/>
+            </a:solidFill>
+          </a:ln>
+        </p:spPr>
+        <p:style>
+          <a:lnRef idx="2">
+            <a:schemeClr val="accent1"/>
+          </a:lnRef>
+          <a:fillRef idx="0">
+            <a:schemeClr val="accent1"/>
+          </a:fillRef>
+          <a:effectRef idx="1">
+            <a:schemeClr val="accent1"/>
+          </a:effectRef>
+          <a:fontRef idx="minor">
+            <a:schemeClr val="tx1"/>
+          </a:fontRef>
+        </p:style>
+      </p:cxnSp>
+      <p:sp>
+        <p:nvSpPr>
+          <p:cNvPr id="68" name="Rectangle 67">
+            <a:extLst>
+              <a:ext uri="{FF2B5EF4-FFF2-40B4-BE49-F238E27FC236}">
+                <a16:creationId xmlns:a16="http://schemas.microsoft.com/office/drawing/2014/main" id="{4CC58D0E-AE29-5661-1346-BE14F17869CF}"/>
+              </a:ext>
+            </a:extLst>
+          </p:cNvPr>
+          <p:cNvSpPr/>
+          <p:nvPr/>
+        </p:nvSpPr>
+        <p:spPr>
+          <a:xfrm>
+            <a:off x="5431726" y="4709550"/>
+            <a:ext cx="644657" cy="646331"/>
+          </a:xfrm>
+          <a:prstGeom prst="rect">
+            <a:avLst/>
+          </a:prstGeom>
+          <a:noFill/>
+          <a:ln w="38100">
+            <a:solidFill>
+              <a:schemeClr val="tx1"/>
+            </a:solidFill>
+          </a:ln>
+        </p:spPr>
+        <p:style>
+          <a:lnRef idx="2">
+            <a:schemeClr val="accent1">
+              <a:shade val="15000"/>
+            </a:schemeClr>
+          </a:lnRef>
+          <a:fillRef idx="1">
+            <a:schemeClr val="accent1"/>
+          </a:fillRef>
+          <a:effectRef idx="0">
+            <a:schemeClr val="accent1"/>
+          </a:effectRef>
+          <a:fontRef idx="minor">
+            <a:schemeClr val="lt1"/>
+          </a:fontRef>
+        </p:style>
+        <p:txBody>
+          <a:bodyPr rtlCol="0" anchor="ctr"/>
+          <a:lstStyle/>
+          <a:p>
+            <a:pPr algn="ctr"/>
+            <a:endParaRPr lang="en-US"/>
+          </a:p>
+        </p:txBody>
+      </p:sp>
+      <p:cxnSp>
+        <p:nvCxnSpPr>
+          <p:cNvPr id="69" name="Straight Arrow Connector 68">
+            <a:extLst>
+              <a:ext uri="{FF2B5EF4-FFF2-40B4-BE49-F238E27FC236}">
+                <a16:creationId xmlns:a16="http://schemas.microsoft.com/office/drawing/2014/main" id="{25346D3B-6820-61A8-1074-560303E2CE4F}"/>
+              </a:ext>
+            </a:extLst>
+          </p:cNvPr>
+          <p:cNvCxnSpPr>
+            <a:cxnSpLocks/>
+            <a:stCxn id="65" idx="1"/>
+            <a:endCxn id="68" idx="1"/>
+          </p:cNvCxnSpPr>
+          <p:nvPr/>
+        </p:nvCxnSpPr>
+        <p:spPr>
+          <a:xfrm flipV="1">
+            <a:off x="3792396" y="5032716"/>
+            <a:ext cx="1639330" cy="1694"/>
+          </a:xfrm>
+          <a:prstGeom prst="straightConnector1">
+            <a:avLst/>
+          </a:prstGeom>
+          <a:ln>
+            <a:solidFill>
+              <a:schemeClr val="tx1"/>
+            </a:solidFill>
+            <a:tailEnd type="triangle"/>
+          </a:ln>
+        </p:spPr>
+        <p:style>
+          <a:lnRef idx="2">
+            <a:schemeClr val="accent1"/>
+          </a:lnRef>
+          <a:fillRef idx="0">
+            <a:schemeClr val="accent1"/>
+          </a:fillRef>
+          <a:effectRef idx="1">
+            <a:schemeClr val="accent1"/>
+          </a:effectRef>
+          <a:fontRef idx="minor">
+            <a:schemeClr val="tx1"/>
+          </a:fontRef>
+        </p:style>
+      </p:cxnSp>
+      <p:sp>
+        <p:nvSpPr>
+          <p:cNvPr id="71" name="Rectangle 70">
+            <a:extLst>
+              <a:ext uri="{FF2B5EF4-FFF2-40B4-BE49-F238E27FC236}">
+                <a16:creationId xmlns:a16="http://schemas.microsoft.com/office/drawing/2014/main" id="{478A2317-0771-D9E7-C874-32D80F81435B}"/>
+              </a:ext>
+            </a:extLst>
+          </p:cNvPr>
+          <p:cNvSpPr/>
+          <p:nvPr/>
+        </p:nvSpPr>
+        <p:spPr>
+          <a:xfrm>
+            <a:off x="6768467" y="4698074"/>
+            <a:ext cx="644657" cy="646331"/>
+          </a:xfrm>
+          <a:prstGeom prst="rect">
+            <a:avLst/>
+          </a:prstGeom>
+          <a:noFill/>
+          <a:ln w="38100">
+            <a:solidFill>
+              <a:schemeClr val="tx1"/>
+            </a:solidFill>
+          </a:ln>
+        </p:spPr>
+        <p:style>
+          <a:lnRef idx="2">
+            <a:schemeClr val="accent1">
+              <a:shade val="15000"/>
+            </a:schemeClr>
+          </a:lnRef>
+          <a:fillRef idx="1">
+            <a:schemeClr val="accent1"/>
+          </a:fillRef>
+          <a:effectRef idx="0">
+            <a:schemeClr val="accent1"/>
+          </a:effectRef>
+          <a:fontRef idx="minor">
+            <a:schemeClr val="lt1"/>
+          </a:fontRef>
+        </p:style>
+        <p:txBody>
+          <a:bodyPr rtlCol="0" anchor="ctr"/>
+          <a:lstStyle/>
+          <a:p>
+            <a:pPr algn="ctr"/>
+            <a:endParaRPr lang="en-US"/>
+          </a:p>
+        </p:txBody>
+      </p:sp>
+      <p:cxnSp>
+        <p:nvCxnSpPr>
+          <p:cNvPr id="73" name="Straight Arrow Connector 72">
+            <a:extLst>
+              <a:ext uri="{FF2B5EF4-FFF2-40B4-BE49-F238E27FC236}">
+                <a16:creationId xmlns:a16="http://schemas.microsoft.com/office/drawing/2014/main" id="{125C96FD-C0A4-7AF0-3F5F-0563B3B545E3}"/>
+              </a:ext>
+            </a:extLst>
+          </p:cNvPr>
+          <p:cNvCxnSpPr>
+            <a:cxnSpLocks/>
+            <a:stCxn id="4" idx="2"/>
+            <a:endCxn id="65" idx="3"/>
+          </p:cNvCxnSpPr>
+          <p:nvPr/>
+        </p:nvCxnSpPr>
+        <p:spPr>
+          <a:xfrm flipH="1">
+            <a:off x="3600834" y="3683449"/>
+            <a:ext cx="8691" cy="1142690"/>
+          </a:xfrm>
+          <a:prstGeom prst="straightConnector1">
+            <a:avLst/>
+          </a:prstGeom>
+          <a:ln>
+            <a:solidFill>
+              <a:schemeClr val="tx1"/>
+            </a:solidFill>
+            <a:tailEnd type="triangle"/>
+          </a:ln>
+        </p:spPr>
+        <p:style>
+          <a:lnRef idx="2">
+            <a:schemeClr val="accent1"/>
+          </a:lnRef>
+          <a:fillRef idx="0">
+            <a:schemeClr val="accent1"/>
+          </a:fillRef>
+          <a:effectRef idx="1">
+            <a:schemeClr val="accent1"/>
+          </a:effectRef>
+          <a:fontRef idx="minor">
+            <a:schemeClr val="tx1"/>
+          </a:fontRef>
+        </p:style>
+      </p:cxnSp>
+      <p:cxnSp>
+        <p:nvCxnSpPr>
+          <p:cNvPr id="74" name="Straight Arrow Connector 52">
+            <a:extLst>
+              <a:ext uri="{FF2B5EF4-FFF2-40B4-BE49-F238E27FC236}">
+                <a16:creationId xmlns:a16="http://schemas.microsoft.com/office/drawing/2014/main" id="{08F4A3F9-4CF0-F982-5BC2-27FA610E7805}"/>
+              </a:ext>
+            </a:extLst>
+          </p:cNvPr>
+          <p:cNvCxnSpPr>
+            <a:cxnSpLocks/>
+            <a:endCxn id="18" idx="5"/>
+          </p:cNvCxnSpPr>
+          <p:nvPr/>
+        </p:nvCxnSpPr>
+        <p:spPr>
+          <a:xfrm rot="5400000" flipH="1" flipV="1">
+            <a:off x="1701266" y="1580752"/>
+            <a:ext cx="1777004" cy="1656390"/>
+          </a:xfrm>
+          <a:prstGeom prst="bentConnector3">
+            <a:avLst>
+              <a:gd name="adj1" fmla="val 100069"/>
+            </a:avLst>
+          </a:prstGeom>
+          <a:ln>
+            <a:solidFill>
+              <a:schemeClr val="tx1"/>
+            </a:solidFill>
+            <a:tailEnd type="triangle"/>
+          </a:ln>
+        </p:spPr>
+        <p:style>
+          <a:lnRef idx="2">
+            <a:schemeClr val="accent1"/>
+          </a:lnRef>
+          <a:fillRef idx="0">
+            <a:schemeClr val="accent1"/>
+          </a:fillRef>
+          <a:effectRef idx="1">
+            <a:schemeClr val="accent1"/>
+          </a:effectRef>
+          <a:fontRef idx="minor">
+            <a:schemeClr val="tx1"/>
+          </a:fontRef>
+        </p:style>
+      </p:cxnSp>
+      <p:sp>
+        <p:nvSpPr>
+          <p:cNvPr id="80" name="TextBox 79">
+            <a:extLst>
+              <a:ext uri="{FF2B5EF4-FFF2-40B4-BE49-F238E27FC236}">
+                <a16:creationId xmlns:a16="http://schemas.microsoft.com/office/drawing/2014/main" id="{A538CE2B-5115-2E2D-D36D-DA185012FB6D}"/>
+              </a:ext>
+            </a:extLst>
+          </p:cNvPr>
+          <p:cNvSpPr txBox="1"/>
+          <p:nvPr/>
+        </p:nvSpPr>
+        <p:spPr>
+          <a:xfrm>
+            <a:off x="3494340" y="1886418"/>
+            <a:ext cx="1117721" cy="307777"/>
+          </a:xfrm>
+          <a:prstGeom prst="rect">
+            <a:avLst/>
+          </a:prstGeom>
+          <a:noFill/>
+        </p:spPr>
+        <p:txBody>
+          <a:bodyPr wrap="square" rtlCol="0">
+            <a:spAutoFit/>
+          </a:bodyPr>
+          <a:lstStyle/>
+          <a:p>
+            <a:pPr algn="ctr"/>
+            <a:r>
+              <a:rPr lang="en-US" sz="1400" dirty="0"/>
+              <a:t>Cos(2</a:t>
+            </a:r>
+            <a:r>
+              <a:rPr lang="el-GR" sz="1400" dirty="0"/>
+              <a:t>π</a:t>
+            </a:r>
+            <a:r>
+              <a:rPr lang="en-US" sz="1400" dirty="0" err="1"/>
+              <a:t>F</a:t>
+            </a:r>
+            <a:r>
+              <a:rPr lang="en-US" sz="1400" baseline="-25000" dirty="0" err="1"/>
+              <a:t>c</a:t>
+            </a:r>
+            <a:r>
+              <a:rPr lang="en-US" sz="1400" dirty="0" err="1"/>
+              <a:t>t</a:t>
+            </a:r>
+            <a:r>
+              <a:rPr lang="en-US" sz="1400" dirty="0"/>
+              <a:t>)</a:t>
+            </a:r>
+            <a:endParaRPr lang="en-US" dirty="0"/>
+          </a:p>
+        </p:txBody>
+      </p:sp>
+      <p:sp>
+        <p:nvSpPr>
+          <p:cNvPr id="81" name="TextBox 80">
+            <a:extLst>
+              <a:ext uri="{FF2B5EF4-FFF2-40B4-BE49-F238E27FC236}">
+                <a16:creationId xmlns:a16="http://schemas.microsoft.com/office/drawing/2014/main" id="{0047DB9A-6538-505F-AA2F-0B58096E8C70}"/>
+              </a:ext>
+            </a:extLst>
+          </p:cNvPr>
+          <p:cNvSpPr txBox="1"/>
+          <p:nvPr/>
+        </p:nvSpPr>
+        <p:spPr>
+          <a:xfrm>
+            <a:off x="3534707" y="4093827"/>
+            <a:ext cx="1117721" cy="307777"/>
+          </a:xfrm>
+          <a:prstGeom prst="rect">
+            <a:avLst/>
+          </a:prstGeom>
+          <a:noFill/>
+        </p:spPr>
+        <p:txBody>
+          <a:bodyPr wrap="square" rtlCol="0">
+            <a:spAutoFit/>
+          </a:bodyPr>
+          <a:lstStyle/>
+          <a:p>
+            <a:pPr algn="ctr"/>
+            <a:r>
+              <a:rPr lang="en-US" sz="1400" dirty="0"/>
+              <a:t>-Sin(2</a:t>
+            </a:r>
+            <a:r>
+              <a:rPr lang="el-GR" sz="1400" dirty="0"/>
+              <a:t>π</a:t>
+            </a:r>
+            <a:r>
+              <a:rPr lang="en-US" sz="1400" dirty="0" err="1"/>
+              <a:t>F</a:t>
+            </a:r>
+            <a:r>
+              <a:rPr lang="en-US" sz="1400" baseline="-25000" dirty="0" err="1"/>
+              <a:t>c</a:t>
+            </a:r>
+            <a:r>
+              <a:rPr lang="en-US" sz="1400" dirty="0" err="1"/>
+              <a:t>t</a:t>
+            </a:r>
+            <a:r>
+              <a:rPr lang="en-US" sz="1400" dirty="0"/>
+              <a:t>)</a:t>
+            </a:r>
+            <a:endParaRPr lang="en-US" dirty="0"/>
+          </a:p>
+        </p:txBody>
+      </p:sp>
+      <p:cxnSp>
+        <p:nvCxnSpPr>
+          <p:cNvPr id="95" name="Straight Arrow Connector 94">
+            <a:extLst>
+              <a:ext uri="{FF2B5EF4-FFF2-40B4-BE49-F238E27FC236}">
+                <a16:creationId xmlns:a16="http://schemas.microsoft.com/office/drawing/2014/main" id="{E4A63397-20DC-7CE8-B144-4C2F3359B9AF}"/>
+              </a:ext>
+            </a:extLst>
+          </p:cNvPr>
+          <p:cNvCxnSpPr>
+            <a:cxnSpLocks/>
+            <a:stCxn id="18" idx="1"/>
+            <a:endCxn id="21" idx="1"/>
+          </p:cNvCxnSpPr>
+          <p:nvPr/>
+        </p:nvCxnSpPr>
+        <p:spPr>
+          <a:xfrm flipV="1">
+            <a:off x="3817796" y="1535460"/>
+            <a:ext cx="1639330" cy="1694"/>
+          </a:xfrm>
+          <a:prstGeom prst="straightConnector1">
+            <a:avLst/>
+          </a:prstGeom>
+          <a:ln>
+            <a:solidFill>
+              <a:schemeClr val="tx1"/>
+            </a:solidFill>
+            <a:tailEnd type="triangle"/>
+          </a:ln>
+        </p:spPr>
+        <p:style>
+          <a:lnRef idx="2">
+            <a:schemeClr val="accent1"/>
+          </a:lnRef>
+          <a:fillRef idx="0">
+            <a:schemeClr val="accent1"/>
+          </a:fillRef>
+          <a:effectRef idx="1">
+            <a:schemeClr val="accent1"/>
+          </a:effectRef>
+          <a:fontRef idx="minor">
+            <a:schemeClr val="tx1"/>
+          </a:fontRef>
+        </p:style>
+      </p:cxnSp>
+      <p:cxnSp>
+        <p:nvCxnSpPr>
+          <p:cNvPr id="103" name="Straight Arrow Connector 102">
+            <a:extLst>
+              <a:ext uri="{FF2B5EF4-FFF2-40B4-BE49-F238E27FC236}">
+                <a16:creationId xmlns:a16="http://schemas.microsoft.com/office/drawing/2014/main" id="{07001B07-7D47-6C7D-024A-073D26CD1845}"/>
+              </a:ext>
+            </a:extLst>
+          </p:cNvPr>
+          <p:cNvCxnSpPr>
+            <a:cxnSpLocks/>
+            <a:stCxn id="21" idx="3"/>
+            <a:endCxn id="46" idx="1"/>
+          </p:cNvCxnSpPr>
+          <p:nvPr/>
+        </p:nvCxnSpPr>
+        <p:spPr>
+          <a:xfrm flipV="1">
+            <a:off x="6101783" y="1532320"/>
+            <a:ext cx="666685" cy="3140"/>
+          </a:xfrm>
+          <a:prstGeom prst="straightConnector1">
+            <a:avLst/>
+          </a:prstGeom>
+          <a:ln>
+            <a:solidFill>
+              <a:schemeClr val="tx1"/>
+            </a:solidFill>
+            <a:tailEnd type="triangle"/>
+          </a:ln>
+        </p:spPr>
+        <p:style>
+          <a:lnRef idx="2">
+            <a:schemeClr val="accent1"/>
+          </a:lnRef>
+          <a:fillRef idx="0">
+            <a:schemeClr val="accent1"/>
+          </a:fillRef>
+          <a:effectRef idx="1">
+            <a:schemeClr val="accent1"/>
+          </a:effectRef>
+          <a:fontRef idx="minor">
+            <a:schemeClr val="tx1"/>
+          </a:fontRef>
+        </p:style>
+      </p:cxnSp>
+      <p:cxnSp>
+        <p:nvCxnSpPr>
+          <p:cNvPr id="106" name="Straight Arrow Connector 105">
+            <a:extLst>
+              <a:ext uri="{FF2B5EF4-FFF2-40B4-BE49-F238E27FC236}">
+                <a16:creationId xmlns:a16="http://schemas.microsoft.com/office/drawing/2014/main" id="{6A473245-A056-697B-8B84-27CA82A06E21}"/>
+              </a:ext>
+            </a:extLst>
+          </p:cNvPr>
+          <p:cNvCxnSpPr>
+            <a:cxnSpLocks/>
+            <a:stCxn id="68" idx="3"/>
+            <a:endCxn id="71" idx="1"/>
+          </p:cNvCxnSpPr>
+          <p:nvPr/>
+        </p:nvCxnSpPr>
+        <p:spPr>
+          <a:xfrm flipV="1">
+            <a:off x="6076383" y="5021240"/>
+            <a:ext cx="692084" cy="11476"/>
+          </a:xfrm>
+          <a:prstGeom prst="straightConnector1">
+            <a:avLst/>
+          </a:prstGeom>
+          <a:ln>
+            <a:solidFill>
+              <a:schemeClr val="tx1"/>
+            </a:solidFill>
+            <a:tailEnd type="triangle"/>
+          </a:ln>
+        </p:spPr>
+        <p:style>
+          <a:lnRef idx="2">
+            <a:schemeClr val="accent1"/>
+          </a:lnRef>
+          <a:fillRef idx="0">
+            <a:schemeClr val="accent1"/>
+          </a:fillRef>
+          <a:effectRef idx="1">
+            <a:schemeClr val="accent1"/>
+          </a:effectRef>
+          <a:fontRef idx="minor">
+            <a:schemeClr val="tx1"/>
+          </a:fontRef>
+        </p:style>
+      </p:cxnSp>
+      <p:cxnSp>
+        <p:nvCxnSpPr>
+          <p:cNvPr id="109" name="Straight Arrow Connector 108">
+            <a:extLst>
+              <a:ext uri="{FF2B5EF4-FFF2-40B4-BE49-F238E27FC236}">
+                <a16:creationId xmlns:a16="http://schemas.microsoft.com/office/drawing/2014/main" id="{651B5FCE-E423-E0A6-8C10-B142D5807D93}"/>
+              </a:ext>
+            </a:extLst>
+          </p:cNvPr>
+          <p:cNvCxnSpPr>
+            <a:cxnSpLocks/>
+          </p:cNvCxnSpPr>
+          <p:nvPr/>
+        </p:nvCxnSpPr>
+        <p:spPr>
+          <a:xfrm>
+            <a:off x="4652428" y="1543636"/>
+            <a:ext cx="1555629" cy="1456521"/>
+          </a:xfrm>
+          <a:prstGeom prst="bentConnector3">
+            <a:avLst>
+              <a:gd name="adj1" fmla="val -383"/>
+            </a:avLst>
+          </a:prstGeom>
+          <a:ln>
+            <a:solidFill>
+              <a:schemeClr val="tx1"/>
+            </a:solidFill>
+            <a:tailEnd type="triangle"/>
+          </a:ln>
+        </p:spPr>
+        <p:style>
+          <a:lnRef idx="2">
+            <a:schemeClr val="accent1"/>
+          </a:lnRef>
+          <a:fillRef idx="0">
+            <a:schemeClr val="accent1"/>
+          </a:fillRef>
+          <a:effectRef idx="1">
+            <a:schemeClr val="accent1"/>
+          </a:effectRef>
+          <a:fontRef idx="minor">
+            <a:schemeClr val="tx1"/>
+          </a:fontRef>
+        </p:style>
+      </p:cxnSp>
+      <p:sp>
+        <p:nvSpPr>
+          <p:cNvPr id="113" name="Rectangle 112">
+            <a:extLst>
+              <a:ext uri="{FF2B5EF4-FFF2-40B4-BE49-F238E27FC236}">
+                <a16:creationId xmlns:a16="http://schemas.microsoft.com/office/drawing/2014/main" id="{D833AFF8-ACF4-CE2B-420A-3ED13EE987AF}"/>
+              </a:ext>
+            </a:extLst>
+          </p:cNvPr>
+          <p:cNvSpPr/>
+          <p:nvPr/>
+        </p:nvSpPr>
+        <p:spPr>
+          <a:xfrm>
+            <a:off x="8590668" y="1246075"/>
+            <a:ext cx="1117721" cy="4109806"/>
+          </a:xfrm>
+          <a:prstGeom prst="rect">
+            <a:avLst/>
+          </a:prstGeom>
+          <a:noFill/>
+          <a:ln w="38100">
+            <a:solidFill>
+              <a:schemeClr val="tx1"/>
+            </a:solidFill>
+          </a:ln>
+        </p:spPr>
+        <p:style>
+          <a:lnRef idx="2">
+            <a:schemeClr val="accent1">
+              <a:shade val="15000"/>
+            </a:schemeClr>
+          </a:lnRef>
+          <a:fillRef idx="1">
+            <a:schemeClr val="accent1"/>
+          </a:fillRef>
+          <a:effectRef idx="0">
+            <a:schemeClr val="accent1"/>
+          </a:effectRef>
+          <a:fontRef idx="minor">
+            <a:schemeClr val="lt1"/>
+          </a:fontRef>
+        </p:style>
+        <p:txBody>
+          <a:bodyPr rtlCol="0" anchor="ctr"/>
+          <a:lstStyle/>
+          <a:p>
+            <a:pPr algn="ctr"/>
+            <a:endParaRPr lang="en-US"/>
+          </a:p>
+        </p:txBody>
+      </p:sp>
+      <p:cxnSp>
+        <p:nvCxnSpPr>
+          <p:cNvPr id="115" name="Straight Arrow Connector 114">
+            <a:extLst>
+              <a:ext uri="{FF2B5EF4-FFF2-40B4-BE49-F238E27FC236}">
+                <a16:creationId xmlns:a16="http://schemas.microsoft.com/office/drawing/2014/main" id="{01C5B620-F1D1-3EA7-8846-E0C39CEC41B7}"/>
+              </a:ext>
+            </a:extLst>
+          </p:cNvPr>
+          <p:cNvCxnSpPr>
+            <a:cxnSpLocks/>
+            <a:stCxn id="46" idx="3"/>
+          </p:cNvCxnSpPr>
+          <p:nvPr/>
+        </p:nvCxnSpPr>
+        <p:spPr>
+          <a:xfrm>
+            <a:off x="7413125" y="1532320"/>
+            <a:ext cx="1177542" cy="878371"/>
+          </a:xfrm>
+          <a:prstGeom prst="bentConnector3">
+            <a:avLst>
+              <a:gd name="adj1" fmla="val 50000"/>
+            </a:avLst>
+          </a:prstGeom>
+          <a:ln>
+            <a:solidFill>
+              <a:schemeClr val="tx1"/>
+            </a:solidFill>
+            <a:tailEnd type="triangle"/>
+          </a:ln>
+        </p:spPr>
+        <p:style>
+          <a:lnRef idx="2">
+            <a:schemeClr val="accent1"/>
+          </a:lnRef>
+          <a:fillRef idx="0">
+            <a:schemeClr val="accent1"/>
+          </a:fillRef>
+          <a:effectRef idx="1">
+            <a:schemeClr val="accent1"/>
+          </a:effectRef>
+          <a:fontRef idx="minor">
+            <a:schemeClr val="tx1"/>
+          </a:fontRef>
+        </p:style>
+      </p:cxnSp>
+      <p:cxnSp>
+        <p:nvCxnSpPr>
+          <p:cNvPr id="121" name="Straight Arrow Connector 114">
+            <a:extLst>
+              <a:ext uri="{FF2B5EF4-FFF2-40B4-BE49-F238E27FC236}">
+                <a16:creationId xmlns:a16="http://schemas.microsoft.com/office/drawing/2014/main" id="{247F5C03-1B98-ED03-534B-3BC39939D558}"/>
+              </a:ext>
+            </a:extLst>
+          </p:cNvPr>
+          <p:cNvCxnSpPr>
+            <a:cxnSpLocks/>
+            <a:stCxn id="71" idx="3"/>
+          </p:cNvCxnSpPr>
+          <p:nvPr/>
+        </p:nvCxnSpPr>
+        <p:spPr>
+          <a:xfrm flipV="1">
+            <a:off x="7413124" y="3865913"/>
+            <a:ext cx="1177543" cy="1155327"/>
+          </a:xfrm>
+          <a:prstGeom prst="bentConnector3">
+            <a:avLst>
+              <a:gd name="adj1" fmla="val 50000"/>
+            </a:avLst>
+          </a:prstGeom>
+          <a:ln>
+            <a:solidFill>
+              <a:schemeClr val="tx1"/>
+            </a:solidFill>
+            <a:tailEnd type="triangle"/>
+          </a:ln>
+        </p:spPr>
+        <p:style>
+          <a:lnRef idx="2">
+            <a:schemeClr val="accent1"/>
+          </a:lnRef>
+          <a:fillRef idx="0">
+            <a:schemeClr val="accent1"/>
+          </a:fillRef>
+          <a:effectRef idx="1">
+            <a:schemeClr val="accent1"/>
+          </a:effectRef>
+          <a:fontRef idx="minor">
+            <a:schemeClr val="tx1"/>
+          </a:fontRef>
+        </p:style>
+      </p:cxnSp>
+      <p:sp>
+        <p:nvSpPr>
+          <p:cNvPr id="128" name="Rectangle 127">
+            <a:extLst>
+              <a:ext uri="{FF2B5EF4-FFF2-40B4-BE49-F238E27FC236}">
+                <a16:creationId xmlns:a16="http://schemas.microsoft.com/office/drawing/2014/main" id="{1DBEF208-B55E-80DE-D218-9B5EFE07F226}"/>
+              </a:ext>
+            </a:extLst>
+          </p:cNvPr>
+          <p:cNvSpPr/>
+          <p:nvPr/>
+        </p:nvSpPr>
+        <p:spPr>
+          <a:xfrm>
+            <a:off x="10181742" y="2974734"/>
+            <a:ext cx="644657" cy="646331"/>
+          </a:xfrm>
+          <a:prstGeom prst="rect">
+            <a:avLst/>
+          </a:prstGeom>
+          <a:noFill/>
+          <a:ln w="38100">
+            <a:solidFill>
+              <a:schemeClr val="tx1"/>
+            </a:solidFill>
+          </a:ln>
+        </p:spPr>
+        <p:style>
+          <a:lnRef idx="2">
+            <a:schemeClr val="accent1">
+              <a:shade val="15000"/>
+            </a:schemeClr>
+          </a:lnRef>
+          <a:fillRef idx="1">
+            <a:schemeClr val="accent1"/>
+          </a:fillRef>
+          <a:effectRef idx="0">
+            <a:schemeClr val="accent1"/>
+          </a:effectRef>
+          <a:fontRef idx="minor">
+            <a:schemeClr val="lt1"/>
+          </a:fontRef>
+        </p:style>
+        <p:txBody>
+          <a:bodyPr rtlCol="0" anchor="ctr"/>
+          <a:lstStyle/>
+          <a:p>
+            <a:pPr algn="ctr"/>
+            <a:endParaRPr lang="en-US"/>
+          </a:p>
+        </p:txBody>
+      </p:sp>
+      <p:cxnSp>
+        <p:nvCxnSpPr>
+          <p:cNvPr id="129" name="Straight Arrow Connector 128">
+            <a:extLst>
+              <a:ext uri="{FF2B5EF4-FFF2-40B4-BE49-F238E27FC236}">
+                <a16:creationId xmlns:a16="http://schemas.microsoft.com/office/drawing/2014/main" id="{195ABCFC-4FAA-AB6E-95CF-ABF29D5C8A47}"/>
+              </a:ext>
+            </a:extLst>
+          </p:cNvPr>
+          <p:cNvCxnSpPr>
+            <a:cxnSpLocks/>
+            <a:stCxn id="113" idx="3"/>
+            <a:endCxn id="128" idx="1"/>
+          </p:cNvCxnSpPr>
+          <p:nvPr/>
+        </p:nvCxnSpPr>
+        <p:spPr>
+          <a:xfrm flipV="1">
+            <a:off x="9708389" y="3297900"/>
+            <a:ext cx="473353" cy="3078"/>
+          </a:xfrm>
+          <a:prstGeom prst="straightConnector1">
+            <a:avLst/>
+          </a:prstGeom>
+          <a:ln>
+            <a:solidFill>
+              <a:schemeClr val="tx1"/>
+            </a:solidFill>
+            <a:tailEnd type="triangle"/>
+          </a:ln>
+        </p:spPr>
+        <p:style>
+          <a:lnRef idx="2">
+            <a:schemeClr val="accent1"/>
+          </a:lnRef>
+          <a:fillRef idx="0">
+            <a:schemeClr val="accent1"/>
+          </a:fillRef>
+          <a:effectRef idx="1">
+            <a:schemeClr val="accent1"/>
+          </a:effectRef>
+          <a:fontRef idx="minor">
+            <a:schemeClr val="tx1"/>
+          </a:fontRef>
+        </p:style>
+      </p:cxnSp>
+      <p:sp>
+        <p:nvSpPr>
+          <p:cNvPr id="131" name="TextBox 130">
+            <a:extLst>
+              <a:ext uri="{FF2B5EF4-FFF2-40B4-BE49-F238E27FC236}">
+                <a16:creationId xmlns:a16="http://schemas.microsoft.com/office/drawing/2014/main" id="{29BB8CDE-5C60-3C21-A77E-A2767422E2BC}"/>
+              </a:ext>
+            </a:extLst>
+          </p:cNvPr>
+          <p:cNvSpPr txBox="1"/>
+          <p:nvPr/>
+        </p:nvSpPr>
+        <p:spPr>
+          <a:xfrm>
+            <a:off x="2966640" y="2974283"/>
+            <a:ext cx="1289359" cy="646331"/>
+          </a:xfrm>
+          <a:prstGeom prst="rect">
+            <a:avLst/>
+          </a:prstGeom>
+          <a:noFill/>
+        </p:spPr>
+        <p:txBody>
+          <a:bodyPr wrap="square" rtlCol="0">
+            <a:spAutoFit/>
+          </a:bodyPr>
+          <a:lstStyle/>
+          <a:p>
+            <a:pPr algn="ctr"/>
+            <a:r>
+              <a:rPr lang="en-US" sz="1200" dirty="0"/>
+              <a:t>Carrier recovery </a:t>
+            </a:r>
+          </a:p>
+          <a:p>
+            <a:pPr algn="ctr"/>
+            <a:r>
+              <a:rPr lang="en-US" sz="1200" dirty="0"/>
+              <a:t>Circuit</a:t>
+            </a:r>
+          </a:p>
+          <a:p>
+            <a:pPr algn="ctr"/>
+            <a:r>
+              <a:rPr lang="en-US" sz="1200" dirty="0"/>
+              <a:t>(CRC)</a:t>
+            </a:r>
+          </a:p>
+        </p:txBody>
+      </p:sp>
+      <p:sp>
+        <p:nvSpPr>
+          <p:cNvPr id="132" name="TextBox 131">
+            <a:extLst>
+              <a:ext uri="{FF2B5EF4-FFF2-40B4-BE49-F238E27FC236}">
+                <a16:creationId xmlns:a16="http://schemas.microsoft.com/office/drawing/2014/main" id="{361EDE9D-4229-C506-8E44-050A075969FD}"/>
+              </a:ext>
+            </a:extLst>
+          </p:cNvPr>
+          <p:cNvSpPr txBox="1"/>
+          <p:nvPr/>
+        </p:nvSpPr>
+        <p:spPr>
+          <a:xfrm>
+            <a:off x="6798122" y="1350793"/>
+            <a:ext cx="565449" cy="369332"/>
+          </a:xfrm>
+          <a:prstGeom prst="rect">
+            <a:avLst/>
+          </a:prstGeom>
+          <a:noFill/>
+        </p:spPr>
+        <p:txBody>
+          <a:bodyPr wrap="square" rtlCol="0">
+            <a:spAutoFit/>
+          </a:bodyPr>
+          <a:lstStyle/>
+          <a:p>
+            <a:pPr algn="ctr"/>
+            <a:r>
+              <a:rPr lang="en-US" dirty="0"/>
+              <a:t>MF</a:t>
+            </a:r>
+          </a:p>
+        </p:txBody>
+      </p:sp>
+      <p:sp>
+        <p:nvSpPr>
+          <p:cNvPr id="133" name="TextBox 132">
+            <a:extLst>
+              <a:ext uri="{FF2B5EF4-FFF2-40B4-BE49-F238E27FC236}">
+                <a16:creationId xmlns:a16="http://schemas.microsoft.com/office/drawing/2014/main" id="{0C8F9FB9-DE99-A8DB-A140-8D56ED6A392D}"/>
+              </a:ext>
+            </a:extLst>
+          </p:cNvPr>
+          <p:cNvSpPr txBox="1"/>
+          <p:nvPr/>
+        </p:nvSpPr>
+        <p:spPr>
+          <a:xfrm>
+            <a:off x="5480061" y="4830129"/>
+            <a:ext cx="565449" cy="369332"/>
+          </a:xfrm>
+          <a:prstGeom prst="rect">
+            <a:avLst/>
+          </a:prstGeom>
+          <a:noFill/>
+        </p:spPr>
+        <p:txBody>
+          <a:bodyPr wrap="square" rtlCol="0">
+            <a:spAutoFit/>
+          </a:bodyPr>
+          <a:lstStyle/>
+          <a:p>
+            <a:pPr algn="ctr"/>
+            <a:r>
+              <a:rPr lang="en-US" dirty="0"/>
+              <a:t>LPF</a:t>
+            </a:r>
+          </a:p>
+        </p:txBody>
+      </p:sp>
+      <p:sp>
+        <p:nvSpPr>
+          <p:cNvPr id="134" name="TextBox 133">
+            <a:extLst>
+              <a:ext uri="{FF2B5EF4-FFF2-40B4-BE49-F238E27FC236}">
+                <a16:creationId xmlns:a16="http://schemas.microsoft.com/office/drawing/2014/main" id="{68F88801-414F-1BEC-B7C2-E4C31E907411}"/>
+              </a:ext>
+            </a:extLst>
+          </p:cNvPr>
+          <p:cNvSpPr txBox="1"/>
+          <p:nvPr/>
+        </p:nvSpPr>
+        <p:spPr>
+          <a:xfrm>
+            <a:off x="6810822" y="4817429"/>
+            <a:ext cx="565449" cy="369332"/>
+          </a:xfrm>
+          <a:prstGeom prst="rect">
+            <a:avLst/>
+          </a:prstGeom>
+          <a:noFill/>
+        </p:spPr>
+        <p:txBody>
+          <a:bodyPr wrap="square" rtlCol="0">
+            <a:spAutoFit/>
+          </a:bodyPr>
+          <a:lstStyle/>
+          <a:p>
+            <a:pPr algn="ctr"/>
+            <a:r>
+              <a:rPr lang="en-US" dirty="0"/>
+              <a:t>MF</a:t>
+            </a:r>
+          </a:p>
+        </p:txBody>
+      </p:sp>
+      <p:sp>
+        <p:nvSpPr>
+          <p:cNvPr id="135" name="TextBox 134">
+            <a:extLst>
+              <a:ext uri="{FF2B5EF4-FFF2-40B4-BE49-F238E27FC236}">
+                <a16:creationId xmlns:a16="http://schemas.microsoft.com/office/drawing/2014/main" id="{9C9C743C-B060-B27A-112A-00AEDA1E0A5F}"/>
+              </a:ext>
+            </a:extLst>
+          </p:cNvPr>
+          <p:cNvSpPr txBox="1"/>
+          <p:nvPr/>
+        </p:nvSpPr>
+        <p:spPr>
+          <a:xfrm>
+            <a:off x="8628310" y="2974283"/>
+            <a:ext cx="1117721" cy="646331"/>
+          </a:xfrm>
+          <a:prstGeom prst="rect">
+            <a:avLst/>
+          </a:prstGeom>
+          <a:noFill/>
+        </p:spPr>
+        <p:txBody>
+          <a:bodyPr wrap="square" rtlCol="0">
+            <a:spAutoFit/>
+          </a:bodyPr>
+          <a:lstStyle/>
+          <a:p>
+            <a:pPr algn="ctr"/>
+            <a:r>
+              <a:rPr lang="en-US" dirty="0"/>
+              <a:t>Decision</a:t>
+            </a:r>
+          </a:p>
+          <a:p>
+            <a:pPr algn="ctr"/>
+            <a:r>
+              <a:rPr lang="en-US" dirty="0"/>
+              <a:t>device</a:t>
+            </a:r>
+          </a:p>
+        </p:txBody>
+      </p:sp>
+      <p:sp>
+        <p:nvSpPr>
+          <p:cNvPr id="136" name="TextBox 135">
+            <a:extLst>
+              <a:ext uri="{FF2B5EF4-FFF2-40B4-BE49-F238E27FC236}">
+                <a16:creationId xmlns:a16="http://schemas.microsoft.com/office/drawing/2014/main" id="{0AF1E3B4-E376-5A6B-93CA-886FC24335D4}"/>
+              </a:ext>
+            </a:extLst>
+          </p:cNvPr>
+          <p:cNvSpPr txBox="1"/>
+          <p:nvPr/>
+        </p:nvSpPr>
+        <p:spPr>
+          <a:xfrm>
+            <a:off x="10219384" y="3116888"/>
+            <a:ext cx="565449" cy="369332"/>
+          </a:xfrm>
+          <a:prstGeom prst="rect">
+            <a:avLst/>
+          </a:prstGeom>
+          <a:noFill/>
+        </p:spPr>
+        <p:txBody>
+          <a:bodyPr wrap="square" rtlCol="0">
+            <a:spAutoFit/>
+          </a:bodyPr>
+          <a:lstStyle/>
+          <a:p>
+            <a:pPr algn="ctr"/>
+            <a:r>
+              <a:rPr lang="en-US" dirty="0"/>
+              <a:t>P/S</a:t>
+            </a:r>
+          </a:p>
+        </p:txBody>
+      </p:sp>
+      <p:cxnSp>
+        <p:nvCxnSpPr>
+          <p:cNvPr id="138" name="Straight Arrow Connector 137">
+            <a:extLst>
+              <a:ext uri="{FF2B5EF4-FFF2-40B4-BE49-F238E27FC236}">
+                <a16:creationId xmlns:a16="http://schemas.microsoft.com/office/drawing/2014/main" id="{622C8438-11AC-22AF-3E18-931CA8BB40C4}"/>
+              </a:ext>
+            </a:extLst>
+          </p:cNvPr>
+          <p:cNvCxnSpPr>
+            <a:cxnSpLocks/>
+            <a:stCxn id="128" idx="3"/>
+          </p:cNvCxnSpPr>
+          <p:nvPr/>
+        </p:nvCxnSpPr>
+        <p:spPr>
+          <a:xfrm>
+            <a:off x="10826399" y="3297900"/>
+            <a:ext cx="532886" cy="7701"/>
+          </a:xfrm>
+          <a:prstGeom prst="straightConnector1">
+            <a:avLst/>
+          </a:prstGeom>
+          <a:ln>
+            <a:solidFill>
+              <a:schemeClr val="tx1"/>
+            </a:solidFill>
+            <a:tailEnd type="triangle"/>
+          </a:ln>
+        </p:spPr>
+        <p:style>
+          <a:lnRef idx="2">
+            <a:schemeClr val="accent1"/>
+          </a:lnRef>
+          <a:fillRef idx="0">
+            <a:schemeClr val="accent1"/>
+          </a:fillRef>
+          <a:effectRef idx="1">
+            <a:schemeClr val="accent1"/>
+          </a:effectRef>
+          <a:fontRef idx="minor">
+            <a:schemeClr val="tx1"/>
+          </a:fontRef>
+        </p:style>
+      </p:cxnSp>
+      <p:sp>
+        <p:nvSpPr>
+          <p:cNvPr id="140" name="TextBox 139">
+            <a:extLst>
+              <a:ext uri="{FF2B5EF4-FFF2-40B4-BE49-F238E27FC236}">
+                <a16:creationId xmlns:a16="http://schemas.microsoft.com/office/drawing/2014/main" id="{C691D618-682E-6E58-AF28-C5B1E8F75F22}"/>
+              </a:ext>
+            </a:extLst>
+          </p:cNvPr>
+          <p:cNvSpPr txBox="1"/>
+          <p:nvPr/>
+        </p:nvSpPr>
+        <p:spPr>
+          <a:xfrm>
+            <a:off x="1123629" y="3120935"/>
+            <a:ext cx="471604" cy="369332"/>
+          </a:xfrm>
+          <a:prstGeom prst="rect">
+            <a:avLst/>
+          </a:prstGeom>
+          <a:noFill/>
+        </p:spPr>
+        <p:txBody>
+          <a:bodyPr wrap="none" rtlCol="0">
+            <a:spAutoFit/>
+          </a:bodyPr>
+          <a:lstStyle/>
+          <a:p>
+            <a:pPr algn="ctr"/>
+            <a:r>
+              <a:rPr lang="en-US" dirty="0"/>
+              <a:t>r(t)</a:t>
+            </a:r>
+          </a:p>
+        </p:txBody>
+      </p:sp>
+      <p:cxnSp>
+        <p:nvCxnSpPr>
+          <p:cNvPr id="142" name="Straight Arrow Connector 141">
+            <a:extLst>
+              <a:ext uri="{FF2B5EF4-FFF2-40B4-BE49-F238E27FC236}">
+                <a16:creationId xmlns:a16="http://schemas.microsoft.com/office/drawing/2014/main" id="{06A296B2-B442-6499-4DE3-C9C2A07EB4C8}"/>
+              </a:ext>
+            </a:extLst>
+          </p:cNvPr>
+          <p:cNvCxnSpPr>
+            <a:cxnSpLocks/>
+            <a:endCxn id="4" idx="1"/>
+          </p:cNvCxnSpPr>
+          <p:nvPr/>
+        </p:nvCxnSpPr>
+        <p:spPr>
+          <a:xfrm flipV="1">
+            <a:off x="1760266" y="3297900"/>
+            <a:ext cx="1290398" cy="7700"/>
+          </a:xfrm>
+          <a:prstGeom prst="straightConnector1">
+            <a:avLst/>
+          </a:prstGeom>
+          <a:ln>
+            <a:solidFill>
+              <a:schemeClr val="tx1"/>
+            </a:solidFill>
+            <a:tailEnd type="triangle"/>
+          </a:ln>
+        </p:spPr>
+        <p:style>
+          <a:lnRef idx="2">
+            <a:schemeClr val="accent1"/>
+          </a:lnRef>
+          <a:fillRef idx="0">
+            <a:schemeClr val="accent1"/>
+          </a:fillRef>
+          <a:effectRef idx="1">
+            <a:schemeClr val="accent1"/>
+          </a:effectRef>
+          <a:fontRef idx="minor">
+            <a:schemeClr val="tx1"/>
+          </a:fontRef>
+        </p:style>
+      </p:cxnSp>
+      <p:cxnSp>
+        <p:nvCxnSpPr>
+          <p:cNvPr id="157" name="Straight Arrow Connector 156">
+            <a:extLst>
+              <a:ext uri="{FF2B5EF4-FFF2-40B4-BE49-F238E27FC236}">
+                <a16:creationId xmlns:a16="http://schemas.microsoft.com/office/drawing/2014/main" id="{D6715873-8154-7A7B-8BC2-8000F588495C}"/>
+              </a:ext>
+            </a:extLst>
+          </p:cNvPr>
+          <p:cNvCxnSpPr>
+            <a:cxnSpLocks/>
+          </p:cNvCxnSpPr>
+          <p:nvPr/>
+        </p:nvCxnSpPr>
+        <p:spPr>
+          <a:xfrm>
+            <a:off x="1562936" y="3305599"/>
+            <a:ext cx="248129" cy="0"/>
+          </a:xfrm>
+          <a:prstGeom prst="straightConnector1">
+            <a:avLst/>
+          </a:prstGeom>
+          <a:ln>
+            <a:solidFill>
+              <a:schemeClr val="tx1"/>
+            </a:solidFill>
+            <a:tailEnd type="triangle"/>
+          </a:ln>
+        </p:spPr>
+        <p:style>
+          <a:lnRef idx="2">
+            <a:schemeClr val="accent1"/>
+          </a:lnRef>
+          <a:fillRef idx="0">
+            <a:schemeClr val="accent1"/>
+          </a:fillRef>
+          <a:effectRef idx="1">
+            <a:schemeClr val="accent1"/>
+          </a:effectRef>
+          <a:fontRef idx="minor">
+            <a:schemeClr val="tx1"/>
+          </a:fontRef>
+        </p:style>
+      </p:cxnSp>
     </p:spTree>
     <p:extLst>
       <p:ext uri="{BB962C8B-B14F-4D97-AF65-F5344CB8AC3E}">
-        <p14:creationId xmlns:p14="http://schemas.microsoft.com/office/powerpoint/2010/main" val="2369801624"/>
+        <p14:creationId xmlns:p14="http://schemas.microsoft.com/office/powerpoint/2010/main" val="2366238698"/>
       </p:ext>
     </p:extLst>
   </p:cSld>
   <p:clrMapOvr>
     <a:masterClrMapping/>
   </p:clrMapOvr>
-  <mc:AlternateContent xmlns:mc="http://schemas.openxmlformats.org/markup-compatibility/2006">
-    <mc:Choice xmlns:p159="http://schemas.microsoft.com/office/powerpoint/2015/09/main" Requires="p159">
+  <mc:AlternateContent xmlns:mc="http://schemas.openxmlformats.org/markup-compatibility/2006" xmlns:p159="http://schemas.microsoft.com/office/powerpoint/2015/09/main">
+    <mc:Choice Requires="p159">
       <p:transition spd="slow">
         <p159:morph option="byObject"/>
       </p:transition>
     </mc:Choice>
-    <mc:Fallback>
-      <p:transition spd="slow">
-        <p:fade/>
-      </p:transition>
-    </mc:Fallback>
-  </mc:AlternateContent>
-</p:sld>
-</file>
-
-<file path=ppt/slides/slide16.xml><?xml version="1.0" encoding="utf-8"?>
-<p:sld xmlns:a="http://schemas.openxmlformats.org/drawingml/2006/main" xmlns:r="http://schemas.openxmlformats.org/officeDocument/2006/relationships" xmlns:p="http://schemas.openxmlformats.org/presentationml/2006/main">
-  <p:cSld>
-    <p:spTree>
-      <p:nvGrpSpPr>
-        <p:cNvPr id="1" name="">
-          <a:extLst>
-            <a:ext uri="{FF2B5EF4-FFF2-40B4-BE49-F238E27FC236}">
-              <a16:creationId xmlns:a16="http://schemas.microsoft.com/office/drawing/2014/main" id="{0B156DDB-34B1-978E-5CF8-8343F5FBE0D0}"/>
-            </a:ext>
-          </a:extLst>
-        </p:cNvPr>
-        <p:cNvGrpSpPr/>
-        <p:nvPr/>
-      </p:nvGrpSpPr>
-      <p:grpSpPr>
-        <a:xfrm>
-          <a:off x="0" y="0"/>
-          <a:ext cx="0" cy="0"/>
-          <a:chOff x="0" y="0"/>
-          <a:chExt cx="0" cy="0"/>
-        </a:xfrm>
-      </p:grpSpPr>
-    </p:spTree>
-    <p:extLst>
-      <p:ext uri="{BB962C8B-B14F-4D97-AF65-F5344CB8AC3E}">
-        <p14:creationId xmlns:p14="http://schemas.microsoft.com/office/powerpoint/2010/main" val="1027058324"/>
-      </p:ext>
-    </p:extLst>
-  </p:cSld>
-  <p:clrMapOvr>
-    <a:masterClrMapping/>
-  </p:clrMapOvr>
-  <mc:AlternateContent xmlns:mc="http://schemas.openxmlformats.org/markup-compatibility/2006">
-    <mc:Choice xmlns:p159="http://schemas.microsoft.com/office/powerpoint/2015/09/main" Requires="p159">
-      <p:transition spd="slow">
-        <p159:morph option="byObject"/>
-      </p:transition>
-    </mc:Choice>
-    <mc:Fallback>
+    <mc:Fallback xmlns="">
       <p:transition spd="slow">
         <p:fade/>
       </p:transition>
@@ -31228,13 +37855,13 @@
   <p:clrMapOvr>
     <a:masterClrMapping/>
   </p:clrMapOvr>
-  <mc:AlternateContent xmlns:mc="http://schemas.openxmlformats.org/markup-compatibility/2006">
-    <mc:Choice xmlns:p159="http://schemas.microsoft.com/office/powerpoint/2015/09/main" Requires="p159">
+  <mc:AlternateContent xmlns:mc="http://schemas.openxmlformats.org/markup-compatibility/2006" xmlns:p159="http://schemas.microsoft.com/office/powerpoint/2015/09/main">
+    <mc:Choice Requires="p159">
       <p:transition spd="slow">
         <p159:morph option="byObject"/>
       </p:transition>
     </mc:Choice>
-    <mc:Fallback>
+    <mc:Fallback xmlns="">
       <p:transition spd="slow">
         <p:fade/>
       </p:transition>
@@ -31251,7 +37878,7 @@
         <p:cNvPr id="1" name="">
           <a:extLst>
             <a:ext uri="{FF2B5EF4-FFF2-40B4-BE49-F238E27FC236}">
-              <a16:creationId xmlns:a16="http://schemas.microsoft.com/office/drawing/2014/main" id="{1D29938C-1769-F57A-2575-ECFF0111FBF1}"/>
+              <a16:creationId xmlns:a16="http://schemas.microsoft.com/office/drawing/2014/main" id="{5A67FFF3-96CA-EBD6-E7FD-DF68D526535F}"/>
             </a:ext>
           </a:extLst>
         </p:cNvPr>
@@ -31266,12 +37893,58 @@
           <a:chExt cx="0" cy="0"/>
         </a:xfrm>
       </p:grpSpPr>
+      <p:cxnSp>
+        <p:nvCxnSpPr>
+          <p:cNvPr id="2" name="Straight Arrow Connector 1">
+            <a:extLst>
+              <a:ext uri="{FF2B5EF4-FFF2-40B4-BE49-F238E27FC236}">
+                <a16:creationId xmlns:a16="http://schemas.microsoft.com/office/drawing/2014/main" id="{0158E880-AA90-6C88-C375-E54DB79642CA}"/>
+              </a:ext>
+            </a:extLst>
+          </p:cNvPr>
+          <p:cNvCxnSpPr>
+            <a:cxnSpLocks/>
+          </p:cNvCxnSpPr>
+          <p:nvPr/>
+        </p:nvCxnSpPr>
+        <p:spPr>
+          <a:xfrm flipV="1">
+            <a:off x="5203354" y="3051920"/>
+            <a:ext cx="834629" cy="813253"/>
+          </a:xfrm>
+          <a:prstGeom prst="bentConnector3">
+            <a:avLst>
+              <a:gd name="adj1" fmla="val 42392"/>
+            </a:avLst>
+          </a:prstGeom>
+          <a:ln>
+            <a:solidFill>
+              <a:schemeClr val="tx1"/>
+            </a:solidFill>
+            <a:tailEnd type="triangle"/>
+          </a:ln>
+        </p:spPr>
+        <p:style>
+          <a:lnRef idx="2">
+            <a:schemeClr val="accent1"/>
+          </a:lnRef>
+          <a:fillRef idx="0">
+            <a:schemeClr val="accent1"/>
+          </a:fillRef>
+          <a:effectRef idx="1">
+            <a:schemeClr val="accent1"/>
+          </a:effectRef>
+          <a:fontRef idx="minor">
+            <a:schemeClr val="tx1"/>
+          </a:fontRef>
+        </p:style>
+      </p:cxnSp>
       <p:sp>
         <p:nvSpPr>
-          <p:cNvPr id="2" name="Title 1">
-            <a:extLst>
-              <a:ext uri="{FF2B5EF4-FFF2-40B4-BE49-F238E27FC236}">
-                <a16:creationId xmlns:a16="http://schemas.microsoft.com/office/drawing/2014/main" id="{79A152A7-384C-1C86-71F3-92F2EF0342B0}"/>
+          <p:cNvPr id="4" name="Title 1">
+            <a:extLst>
+              <a:ext uri="{FF2B5EF4-FFF2-40B4-BE49-F238E27FC236}">
+                <a16:creationId xmlns:a16="http://schemas.microsoft.com/office/drawing/2014/main" id="{902998AF-BC77-3031-39E7-B16B62532A32}"/>
               </a:ext>
             </a:extLst>
           </p:cNvPr>
@@ -31282,7 +37955,7 @@
         </p:nvSpPr>
         <p:spPr>
           <a:xfrm>
-            <a:off x="4637461" y="246049"/>
+            <a:off x="4720226" y="246049"/>
             <a:ext cx="2917078" cy="371219"/>
           </a:xfrm>
           <a:prstGeom prst="rect">
@@ -31291,7 +37964,7 @@
         </p:spPr>
         <p:txBody>
           <a:bodyPr vert="horz" lIns="91440" tIns="45720" rIns="91440" bIns="45720" rtlCol="0" anchor="b">
-            <a:normAutofit fontScale="75000" lnSpcReduction="20000"/>
+            <a:normAutofit fontScale="67500" lnSpcReduction="20000"/>
           </a:bodyPr>
           <a:lstStyle>
             <a:lvl1pPr algn="ctr" defTabSz="914400" rtl="0" eaLnBrk="1" latinLnBrk="0" hangingPunct="1">
@@ -31315,18 +37988,17 @@
           <a:p>
             <a:r>
               <a:rPr lang="en-US" sz="3200" dirty="0"/>
-              <a:t>Modulation</a:t>
+              <a:t>Reed Solomon decoder</a:t>
             </a:r>
           </a:p>
         </p:txBody>
       </p:sp>
       <p:sp>
         <p:nvSpPr>
-          <p:cNvPr id="3" name="Rectangle 2">
-            <a:hlinkClick r:id="rId3" action="ppaction://hlinksldjump"/>
-            <a:extLst>
-              <a:ext uri="{FF2B5EF4-FFF2-40B4-BE49-F238E27FC236}">
-                <a16:creationId xmlns:a16="http://schemas.microsoft.com/office/drawing/2014/main" id="{58C432C4-71B5-111F-58F0-E474CC3302D5}"/>
+          <p:cNvPr id="5" name="Rectangle 4">
+            <a:extLst>
+              <a:ext uri="{FF2B5EF4-FFF2-40B4-BE49-F238E27FC236}">
+                <a16:creationId xmlns:a16="http://schemas.microsoft.com/office/drawing/2014/main" id="{17AD3A27-D5B4-A161-7D44-115B03A1541E}"/>
               </a:ext>
             </a:extLst>
           </p:cNvPr>
@@ -31335,8 +38007,8 @@
         </p:nvSpPr>
         <p:spPr>
           <a:xfrm>
-            <a:off x="2208032" y="1935678"/>
-            <a:ext cx="1760288" cy="1764860"/>
+            <a:off x="4148843" y="1531918"/>
+            <a:ext cx="1054511" cy="2555302"/>
           </a:xfrm>
           <a:prstGeom prst="rect">
             <a:avLst/>
@@ -31375,57 +38047,20 @@
       </p:sp>
       <p:sp>
         <p:nvSpPr>
-          <p:cNvPr id="5" name="TextBox 4">
-            <a:extLst>
-              <a:ext uri="{FF2B5EF4-FFF2-40B4-BE49-F238E27FC236}">
-                <a16:creationId xmlns:a16="http://schemas.microsoft.com/office/drawing/2014/main" id="{9A3904CC-B386-6306-35C8-C6AE2AEC2007}"/>
-              </a:ext>
-            </a:extLst>
-          </p:cNvPr>
-          <p:cNvSpPr txBox="1"/>
+          <p:cNvPr id="6" name="Rectangle 5">
+            <a:extLst>
+              <a:ext uri="{FF2B5EF4-FFF2-40B4-BE49-F238E27FC236}">
+                <a16:creationId xmlns:a16="http://schemas.microsoft.com/office/drawing/2014/main" id="{A69A8F86-EDBA-2BB0-5641-B6408E9A5D63}"/>
+              </a:ext>
+            </a:extLst>
+          </p:cNvPr>
+          <p:cNvSpPr/>
           <p:nvPr/>
         </p:nvSpPr>
         <p:spPr>
           <a:xfrm>
-            <a:off x="2208032" y="2587275"/>
-            <a:ext cx="1760289" cy="461665"/>
-          </a:xfrm>
-          <a:prstGeom prst="rect">
-            <a:avLst/>
-          </a:prstGeom>
-          <a:noFill/>
-        </p:spPr>
-        <p:txBody>
-          <a:bodyPr wrap="square" rtlCol="0">
-            <a:spAutoFit/>
-          </a:bodyPr>
-          <a:lstStyle/>
-          <a:p>
-            <a:pPr algn="ctr"/>
-            <a:r>
-              <a:rPr lang="en-US" sz="2400" dirty="0"/>
-              <a:t>BPSK</a:t>
-            </a:r>
-            <a:endParaRPr lang="en-US" dirty="0"/>
-          </a:p>
-        </p:txBody>
-      </p:sp>
-      <p:sp>
-        <p:nvSpPr>
-          <p:cNvPr id="6" name="Rectangle 5">
-            <a:extLst>
-              <a:ext uri="{FF2B5EF4-FFF2-40B4-BE49-F238E27FC236}">
-                <a16:creationId xmlns:a16="http://schemas.microsoft.com/office/drawing/2014/main" id="{8DA3DEFC-C7F2-2465-95CB-843F0EBABF52}"/>
-              </a:ext>
-            </a:extLst>
-          </p:cNvPr>
-          <p:cNvSpPr/>
-          <p:nvPr/>
-        </p:nvSpPr>
-        <p:spPr>
-          <a:xfrm>
-            <a:off x="8081175" y="1947602"/>
-            <a:ext cx="1760288" cy="1764860"/>
+            <a:off x="6026343" y="2245362"/>
+            <a:ext cx="1195538" cy="1128414"/>
           </a:xfrm>
           <a:prstGeom prst="rect">
             <a:avLst/>
@@ -31464,67 +38099,643 @@
       </p:sp>
       <p:sp>
         <p:nvSpPr>
-          <p:cNvPr id="7" name="TextBox 6">
-            <a:extLst>
-              <a:ext uri="{FF2B5EF4-FFF2-40B4-BE49-F238E27FC236}">
-                <a16:creationId xmlns:a16="http://schemas.microsoft.com/office/drawing/2014/main" id="{328EE5AA-E4AB-27C8-8354-644C04B62972}"/>
-              </a:ext>
-            </a:extLst>
-          </p:cNvPr>
-          <p:cNvSpPr txBox="1"/>
+          <p:cNvPr id="7" name="Rectangle 6">
+            <a:extLst>
+              <a:ext uri="{FF2B5EF4-FFF2-40B4-BE49-F238E27FC236}">
+                <a16:creationId xmlns:a16="http://schemas.microsoft.com/office/drawing/2014/main" id="{AB166E05-C1FE-0E4F-D769-BBB96EF3E7FB}"/>
+              </a:ext>
+            </a:extLst>
+          </p:cNvPr>
+          <p:cNvSpPr/>
           <p:nvPr/>
         </p:nvSpPr>
         <p:spPr>
           <a:xfrm>
-            <a:off x="8081175" y="2599199"/>
-            <a:ext cx="1760289" cy="461665"/>
+            <a:off x="7918326" y="2929812"/>
+            <a:ext cx="973331" cy="1128414"/>
           </a:xfrm>
           <a:prstGeom prst="rect">
             <a:avLst/>
           </a:prstGeom>
           <a:noFill/>
-        </p:spPr>
+          <a:ln w="38100">
+            <a:solidFill>
+              <a:schemeClr val="tx1"/>
+            </a:solidFill>
+          </a:ln>
+        </p:spPr>
+        <p:style>
+          <a:lnRef idx="2">
+            <a:schemeClr val="accent1">
+              <a:shade val="15000"/>
+            </a:schemeClr>
+          </a:lnRef>
+          <a:fillRef idx="1">
+            <a:schemeClr val="accent1"/>
+          </a:fillRef>
+          <a:effectRef idx="0">
+            <a:schemeClr val="accent1"/>
+          </a:effectRef>
+          <a:fontRef idx="minor">
+            <a:schemeClr val="lt1"/>
+          </a:fontRef>
+        </p:style>
         <p:txBody>
-          <a:bodyPr wrap="square" rtlCol="0">
-            <a:spAutoFit/>
-          </a:bodyPr>
+          <a:bodyPr rtlCol="0" anchor="ctr"/>
           <a:lstStyle/>
           <a:p>
             <a:pPr algn="ctr"/>
-            <a:r>
-              <a:rPr lang="en-US" sz="2400" dirty="0"/>
-              <a:t>8-PSK</a:t>
-            </a:r>
-            <a:endParaRPr lang="en-US" dirty="0"/>
+            <a:endParaRPr lang="en-US"/>
+          </a:p>
+        </p:txBody>
+      </p:sp>
+      <p:sp>
+        <p:nvSpPr>
+          <p:cNvPr id="8" name="Rectangle 7">
+            <a:extLst>
+              <a:ext uri="{FF2B5EF4-FFF2-40B4-BE49-F238E27FC236}">
+                <a16:creationId xmlns:a16="http://schemas.microsoft.com/office/drawing/2014/main" id="{8DA7A1F1-ACF5-6CF4-2001-2917C4117368}"/>
+              </a:ext>
+            </a:extLst>
+          </p:cNvPr>
+          <p:cNvSpPr/>
+          <p:nvPr/>
+        </p:nvSpPr>
+        <p:spPr>
+          <a:xfrm>
+            <a:off x="9457478" y="2240099"/>
+            <a:ext cx="1005735" cy="1128414"/>
+          </a:xfrm>
+          <a:prstGeom prst="rect">
+            <a:avLst/>
+          </a:prstGeom>
+          <a:noFill/>
+          <a:ln w="38100">
+            <a:solidFill>
+              <a:schemeClr val="tx1"/>
+            </a:solidFill>
+          </a:ln>
+        </p:spPr>
+        <p:style>
+          <a:lnRef idx="2">
+            <a:schemeClr val="accent1">
+              <a:shade val="15000"/>
+            </a:schemeClr>
+          </a:lnRef>
+          <a:fillRef idx="1">
+            <a:schemeClr val="accent1"/>
+          </a:fillRef>
+          <a:effectRef idx="0">
+            <a:schemeClr val="accent1"/>
+          </a:effectRef>
+          <a:fontRef idx="minor">
+            <a:schemeClr val="lt1"/>
+          </a:fontRef>
+        </p:style>
+        <p:txBody>
+          <a:bodyPr rtlCol="0" anchor="ctr"/>
+          <a:lstStyle/>
+          <a:p>
+            <a:pPr algn="ctr"/>
+            <a:endParaRPr lang="en-US"/>
+          </a:p>
+        </p:txBody>
+      </p:sp>
+      <p:sp>
+        <p:nvSpPr>
+          <p:cNvPr id="9" name="Rectangle 8">
+            <a:extLst>
+              <a:ext uri="{FF2B5EF4-FFF2-40B4-BE49-F238E27FC236}">
+                <a16:creationId xmlns:a16="http://schemas.microsoft.com/office/drawing/2014/main" id="{ED1FE0D8-A44F-EE58-A09C-3F7CDFA4255D}"/>
+              </a:ext>
+            </a:extLst>
+          </p:cNvPr>
+          <p:cNvSpPr/>
+          <p:nvPr/>
+        </p:nvSpPr>
+        <p:spPr>
+          <a:xfrm>
+            <a:off x="2607030" y="2864793"/>
+            <a:ext cx="888273" cy="1128414"/>
+          </a:xfrm>
+          <a:prstGeom prst="rect">
+            <a:avLst/>
+          </a:prstGeom>
+          <a:noFill/>
+          <a:ln w="38100">
+            <a:solidFill>
+              <a:schemeClr val="tx1"/>
+            </a:solidFill>
+          </a:ln>
+        </p:spPr>
+        <p:style>
+          <a:lnRef idx="2">
+            <a:schemeClr val="accent1">
+              <a:shade val="15000"/>
+            </a:schemeClr>
+          </a:lnRef>
+          <a:fillRef idx="1">
+            <a:schemeClr val="accent1"/>
+          </a:fillRef>
+          <a:effectRef idx="0">
+            <a:schemeClr val="accent1"/>
+          </a:effectRef>
+          <a:fontRef idx="minor">
+            <a:schemeClr val="lt1"/>
+          </a:fontRef>
+        </p:style>
+        <p:txBody>
+          <a:bodyPr rtlCol="0" anchor="ctr"/>
+          <a:lstStyle/>
+          <a:p>
+            <a:pPr algn="ctr"/>
+            <a:endParaRPr lang="en-US"/>
+          </a:p>
+        </p:txBody>
+      </p:sp>
+      <p:sp>
+        <p:nvSpPr>
+          <p:cNvPr id="10" name="Rectangle 9">
+            <a:extLst>
+              <a:ext uri="{FF2B5EF4-FFF2-40B4-BE49-F238E27FC236}">
+                <a16:creationId xmlns:a16="http://schemas.microsoft.com/office/drawing/2014/main" id="{054CDAC7-40A2-AF13-103D-8E080CC6DAD7}"/>
+              </a:ext>
+            </a:extLst>
+          </p:cNvPr>
+          <p:cNvSpPr/>
+          <p:nvPr/>
+        </p:nvSpPr>
+        <p:spPr>
+          <a:xfrm>
+            <a:off x="4237098" y="5169824"/>
+            <a:ext cx="1759941" cy="646488"/>
+          </a:xfrm>
+          <a:prstGeom prst="rect">
+            <a:avLst/>
+          </a:prstGeom>
+          <a:noFill/>
+          <a:ln w="38100">
+            <a:solidFill>
+              <a:schemeClr val="tx1"/>
+            </a:solidFill>
+          </a:ln>
+        </p:spPr>
+        <p:style>
+          <a:lnRef idx="2">
+            <a:schemeClr val="accent1">
+              <a:shade val="15000"/>
+            </a:schemeClr>
+          </a:lnRef>
+          <a:fillRef idx="1">
+            <a:schemeClr val="accent1"/>
+          </a:fillRef>
+          <a:effectRef idx="0">
+            <a:schemeClr val="accent1"/>
+          </a:effectRef>
+          <a:fontRef idx="minor">
+            <a:schemeClr val="lt1"/>
+          </a:fontRef>
+        </p:style>
+        <p:txBody>
+          <a:bodyPr rtlCol="0" anchor="ctr"/>
+          <a:lstStyle/>
+          <a:p>
+            <a:pPr algn="ctr"/>
+            <a:endParaRPr lang="en-US"/>
           </a:p>
         </p:txBody>
       </p:sp>
       <p:cxnSp>
         <p:nvCxnSpPr>
-          <p:cNvPr id="9" name="Straight Connector 8">
-            <a:extLst>
-              <a:ext uri="{FF2B5EF4-FFF2-40B4-BE49-F238E27FC236}">
-                <a16:creationId xmlns:a16="http://schemas.microsoft.com/office/drawing/2014/main" id="{2787B9EA-858B-0296-B215-01AC94DECCF1}"/>
+          <p:cNvPr id="11" name="Straight Arrow Connector 10">
+            <a:extLst>
+              <a:ext uri="{FF2B5EF4-FFF2-40B4-BE49-F238E27FC236}">
+                <a16:creationId xmlns:a16="http://schemas.microsoft.com/office/drawing/2014/main" id="{B3530602-69CD-62AE-3AE8-3B4F7EACF565}"/>
               </a:ext>
             </a:extLst>
           </p:cNvPr>
           <p:cNvCxnSpPr>
             <a:cxnSpLocks/>
+            <a:stCxn id="9" idx="3"/>
           </p:cNvCxnSpPr>
           <p:nvPr/>
         </p:nvCxnSpPr>
         <p:spPr>
           <a:xfrm>
-            <a:off x="6096000" y="1686296"/>
-            <a:ext cx="0" cy="3289465"/>
-          </a:xfrm>
-          <a:prstGeom prst="line">
+            <a:off x="3495303" y="3429000"/>
+            <a:ext cx="653540" cy="0"/>
+          </a:xfrm>
+          <a:prstGeom prst="straightConnector1">
             <a:avLst/>
           </a:prstGeom>
           <a:ln>
             <a:solidFill>
               <a:schemeClr val="tx1"/>
             </a:solidFill>
+            <a:tailEnd type="triangle"/>
+          </a:ln>
+        </p:spPr>
+        <p:style>
+          <a:lnRef idx="2">
+            <a:schemeClr val="accent1"/>
+          </a:lnRef>
+          <a:fillRef idx="0">
+            <a:schemeClr val="accent1"/>
+          </a:fillRef>
+          <a:effectRef idx="1">
+            <a:schemeClr val="accent1"/>
+          </a:effectRef>
+          <a:fontRef idx="minor">
+            <a:schemeClr val="tx1"/>
+          </a:fontRef>
+        </p:style>
+      </p:cxnSp>
+      <p:cxnSp>
+        <p:nvCxnSpPr>
+          <p:cNvPr id="27" name="Straight Arrow Connector 1">
+            <a:extLst>
+              <a:ext uri="{FF2B5EF4-FFF2-40B4-BE49-F238E27FC236}">
+                <a16:creationId xmlns:a16="http://schemas.microsoft.com/office/drawing/2014/main" id="{D8C2C8E1-8072-ACCA-E5A0-81A8DD12C30C}"/>
+              </a:ext>
+            </a:extLst>
+          </p:cNvPr>
+          <p:cNvCxnSpPr>
+            <a:cxnSpLocks/>
+          </p:cNvCxnSpPr>
+          <p:nvPr/>
+        </p:nvCxnSpPr>
+        <p:spPr>
+          <a:xfrm>
+            <a:off x="5203354" y="1921919"/>
+            <a:ext cx="834629" cy="813253"/>
+          </a:xfrm>
+          <a:prstGeom prst="bentConnector3">
+            <a:avLst>
+              <a:gd name="adj1" fmla="val 42392"/>
+            </a:avLst>
+          </a:prstGeom>
+          <a:ln>
+            <a:solidFill>
+              <a:schemeClr val="tx1"/>
+            </a:solidFill>
+            <a:tailEnd type="triangle"/>
+          </a:ln>
+        </p:spPr>
+        <p:style>
+          <a:lnRef idx="2">
+            <a:schemeClr val="accent1"/>
+          </a:lnRef>
+          <a:fillRef idx="0">
+            <a:schemeClr val="accent1"/>
+          </a:fillRef>
+          <a:effectRef idx="1">
+            <a:schemeClr val="accent1"/>
+          </a:effectRef>
+          <a:fontRef idx="minor">
+            <a:schemeClr val="tx1"/>
+          </a:fontRef>
+        </p:style>
+      </p:cxnSp>
+      <p:cxnSp>
+        <p:nvCxnSpPr>
+          <p:cNvPr id="28" name="Straight Arrow Connector 27">
+            <a:extLst>
+              <a:ext uri="{FF2B5EF4-FFF2-40B4-BE49-F238E27FC236}">
+                <a16:creationId xmlns:a16="http://schemas.microsoft.com/office/drawing/2014/main" id="{EAE7BDE8-98A7-8CF3-A3C9-782EE81A4928}"/>
+              </a:ext>
+            </a:extLst>
+          </p:cNvPr>
+          <p:cNvCxnSpPr>
+            <a:cxnSpLocks/>
+          </p:cNvCxnSpPr>
+          <p:nvPr/>
+        </p:nvCxnSpPr>
+        <p:spPr>
+          <a:xfrm>
+            <a:off x="7221881" y="3013087"/>
+            <a:ext cx="696445" cy="0"/>
+          </a:xfrm>
+          <a:prstGeom prst="straightConnector1">
+            <a:avLst/>
+          </a:prstGeom>
+          <a:ln>
+            <a:solidFill>
+              <a:schemeClr val="tx1"/>
+            </a:solidFill>
+            <a:tailEnd type="triangle"/>
+          </a:ln>
+        </p:spPr>
+        <p:style>
+          <a:lnRef idx="2">
+            <a:schemeClr val="accent1"/>
+          </a:lnRef>
+          <a:fillRef idx="0">
+            <a:schemeClr val="accent1"/>
+          </a:fillRef>
+          <a:effectRef idx="1">
+            <a:schemeClr val="accent1"/>
+          </a:effectRef>
+          <a:fontRef idx="minor">
+            <a:schemeClr val="tx1"/>
+          </a:fontRef>
+        </p:style>
+      </p:cxnSp>
+      <p:cxnSp>
+        <p:nvCxnSpPr>
+          <p:cNvPr id="31" name="Straight Arrow Connector 30">
+            <a:extLst>
+              <a:ext uri="{FF2B5EF4-FFF2-40B4-BE49-F238E27FC236}">
+                <a16:creationId xmlns:a16="http://schemas.microsoft.com/office/drawing/2014/main" id="{CBFA236C-1E68-69CA-AF1C-6253ECEB64C2}"/>
+              </a:ext>
+            </a:extLst>
+          </p:cNvPr>
+          <p:cNvCxnSpPr>
+            <a:cxnSpLocks/>
+          </p:cNvCxnSpPr>
+          <p:nvPr/>
+        </p:nvCxnSpPr>
+        <p:spPr>
+          <a:xfrm>
+            <a:off x="7221881" y="3263552"/>
+            <a:ext cx="696445" cy="0"/>
+          </a:xfrm>
+          <a:prstGeom prst="straightConnector1">
+            <a:avLst/>
+          </a:prstGeom>
+          <a:ln>
+            <a:solidFill>
+              <a:schemeClr val="tx1"/>
+            </a:solidFill>
+            <a:tailEnd type="triangle"/>
+          </a:ln>
+        </p:spPr>
+        <p:style>
+          <a:lnRef idx="2">
+            <a:schemeClr val="accent1"/>
+          </a:lnRef>
+          <a:fillRef idx="0">
+            <a:schemeClr val="accent1"/>
+          </a:fillRef>
+          <a:effectRef idx="1">
+            <a:schemeClr val="accent1"/>
+          </a:effectRef>
+          <a:fontRef idx="minor">
+            <a:schemeClr val="tx1"/>
+          </a:fontRef>
+        </p:style>
+      </p:cxnSp>
+      <p:cxnSp>
+        <p:nvCxnSpPr>
+          <p:cNvPr id="32" name="Straight Arrow Connector 31">
+            <a:extLst>
+              <a:ext uri="{FF2B5EF4-FFF2-40B4-BE49-F238E27FC236}">
+                <a16:creationId xmlns:a16="http://schemas.microsoft.com/office/drawing/2014/main" id="{9B5B1759-9D54-03BF-D13D-8591BE97E7F7}"/>
+              </a:ext>
+            </a:extLst>
+          </p:cNvPr>
+          <p:cNvCxnSpPr>
+            <a:cxnSpLocks/>
+          </p:cNvCxnSpPr>
+          <p:nvPr/>
+        </p:nvCxnSpPr>
+        <p:spPr>
+          <a:xfrm>
+            <a:off x="7221881" y="2412006"/>
+            <a:ext cx="2235597" cy="0"/>
+          </a:xfrm>
+          <a:prstGeom prst="straightConnector1">
+            <a:avLst/>
+          </a:prstGeom>
+          <a:ln>
+            <a:solidFill>
+              <a:schemeClr val="tx1"/>
+            </a:solidFill>
+            <a:tailEnd type="triangle"/>
+          </a:ln>
+        </p:spPr>
+        <p:style>
+          <a:lnRef idx="2">
+            <a:schemeClr val="accent1"/>
+          </a:lnRef>
+          <a:fillRef idx="0">
+            <a:schemeClr val="accent1"/>
+          </a:fillRef>
+          <a:effectRef idx="1">
+            <a:schemeClr val="accent1"/>
+          </a:effectRef>
+          <a:fontRef idx="minor">
+            <a:schemeClr val="tx1"/>
+          </a:fontRef>
+        </p:style>
+      </p:cxnSp>
+      <p:cxnSp>
+        <p:nvCxnSpPr>
+          <p:cNvPr id="34" name="Straight Arrow Connector 33">
+            <a:extLst>
+              <a:ext uri="{FF2B5EF4-FFF2-40B4-BE49-F238E27FC236}">
+                <a16:creationId xmlns:a16="http://schemas.microsoft.com/office/drawing/2014/main" id="{7CE696CB-F0AB-2580-F81C-B8F90A58E7F5}"/>
+              </a:ext>
+            </a:extLst>
+          </p:cNvPr>
+          <p:cNvCxnSpPr>
+            <a:cxnSpLocks/>
+          </p:cNvCxnSpPr>
+          <p:nvPr/>
+        </p:nvCxnSpPr>
+        <p:spPr>
+          <a:xfrm>
+            <a:off x="8902508" y="3154622"/>
+            <a:ext cx="554970" cy="0"/>
+          </a:xfrm>
+          <a:prstGeom prst="straightConnector1">
+            <a:avLst/>
+          </a:prstGeom>
+          <a:ln>
+            <a:solidFill>
+              <a:schemeClr val="tx1"/>
+            </a:solidFill>
+            <a:tailEnd type="triangle"/>
+          </a:ln>
+        </p:spPr>
+        <p:style>
+          <a:lnRef idx="2">
+            <a:schemeClr val="accent1"/>
+          </a:lnRef>
+          <a:fillRef idx="0">
+            <a:schemeClr val="accent1"/>
+          </a:fillRef>
+          <a:effectRef idx="1">
+            <a:schemeClr val="accent1"/>
+          </a:effectRef>
+          <a:fontRef idx="minor">
+            <a:schemeClr val="tx1"/>
+          </a:fontRef>
+        </p:style>
+      </p:cxnSp>
+      <p:cxnSp>
+        <p:nvCxnSpPr>
+          <p:cNvPr id="36" name="Straight Arrow Connector 35">
+            <a:extLst>
+              <a:ext uri="{FF2B5EF4-FFF2-40B4-BE49-F238E27FC236}">
+                <a16:creationId xmlns:a16="http://schemas.microsoft.com/office/drawing/2014/main" id="{6D129554-FAAA-DDE6-E7AD-83200FD4188C}"/>
+              </a:ext>
+            </a:extLst>
+          </p:cNvPr>
+          <p:cNvCxnSpPr>
+            <a:cxnSpLocks/>
+            <a:stCxn id="8" idx="3"/>
+          </p:cNvCxnSpPr>
+          <p:nvPr/>
+        </p:nvCxnSpPr>
+        <p:spPr>
+          <a:xfrm flipV="1">
+            <a:off x="10463213" y="2804305"/>
+            <a:ext cx="566883" cy="1"/>
+          </a:xfrm>
+          <a:prstGeom prst="straightConnector1">
+            <a:avLst/>
+          </a:prstGeom>
+          <a:ln>
+            <a:solidFill>
+              <a:schemeClr val="tx1"/>
+            </a:solidFill>
+            <a:tailEnd type="triangle"/>
+          </a:ln>
+        </p:spPr>
+        <p:style>
+          <a:lnRef idx="2">
+            <a:schemeClr val="accent1"/>
+          </a:lnRef>
+          <a:fillRef idx="0">
+            <a:schemeClr val="accent1"/>
+          </a:fillRef>
+          <a:effectRef idx="1">
+            <a:schemeClr val="accent1"/>
+          </a:effectRef>
+          <a:fontRef idx="minor">
+            <a:schemeClr val="tx1"/>
+          </a:fontRef>
+        </p:style>
+      </p:cxnSp>
+      <p:cxnSp>
+        <p:nvCxnSpPr>
+          <p:cNvPr id="39" name="Straight Arrow Connector 38">
+            <a:extLst>
+              <a:ext uri="{FF2B5EF4-FFF2-40B4-BE49-F238E27FC236}">
+                <a16:creationId xmlns:a16="http://schemas.microsoft.com/office/drawing/2014/main" id="{0B3A8D3B-4297-06A1-AD3A-829958AA5FE8}"/>
+              </a:ext>
+            </a:extLst>
+          </p:cNvPr>
+          <p:cNvCxnSpPr>
+            <a:cxnSpLocks/>
+            <a:endCxn id="9" idx="1"/>
+          </p:cNvCxnSpPr>
+          <p:nvPr/>
+        </p:nvCxnSpPr>
+        <p:spPr>
+          <a:xfrm flipV="1">
+            <a:off x="1994765" y="3429000"/>
+            <a:ext cx="612265" cy="2869"/>
+          </a:xfrm>
+          <a:prstGeom prst="straightConnector1">
+            <a:avLst/>
+          </a:prstGeom>
+          <a:ln>
+            <a:solidFill>
+              <a:schemeClr val="tx1"/>
+            </a:solidFill>
+            <a:tailEnd type="triangle"/>
+          </a:ln>
+        </p:spPr>
+        <p:style>
+          <a:lnRef idx="2">
+            <a:schemeClr val="accent1"/>
+          </a:lnRef>
+          <a:fillRef idx="0">
+            <a:schemeClr val="accent1"/>
+          </a:fillRef>
+          <a:effectRef idx="1">
+            <a:schemeClr val="accent1"/>
+          </a:effectRef>
+          <a:fontRef idx="minor">
+            <a:schemeClr val="tx1"/>
+          </a:fontRef>
+        </p:style>
+      </p:cxnSp>
+      <p:cxnSp>
+        <p:nvCxnSpPr>
+          <p:cNvPr id="41" name="Straight Arrow Connector 1">
+            <a:extLst>
+              <a:ext uri="{FF2B5EF4-FFF2-40B4-BE49-F238E27FC236}">
+                <a16:creationId xmlns:a16="http://schemas.microsoft.com/office/drawing/2014/main" id="{9AE94E91-5276-4B85-C482-5EEC812F1247}"/>
+              </a:ext>
+            </a:extLst>
+          </p:cNvPr>
+          <p:cNvCxnSpPr>
+            <a:cxnSpLocks/>
+            <a:endCxn id="10" idx="1"/>
+          </p:cNvCxnSpPr>
+          <p:nvPr/>
+        </p:nvCxnSpPr>
+        <p:spPr>
+          <a:xfrm rot="16200000" flipH="1">
+            <a:off x="2236963" y="3492933"/>
+            <a:ext cx="2064068" cy="1936201"/>
+          </a:xfrm>
+          <a:prstGeom prst="bentConnector2">
+            <a:avLst/>
+          </a:prstGeom>
+          <a:ln>
+            <a:solidFill>
+              <a:schemeClr val="tx1"/>
+            </a:solidFill>
+            <a:tailEnd type="triangle"/>
+          </a:ln>
+        </p:spPr>
+        <p:style>
+          <a:lnRef idx="2">
+            <a:schemeClr val="accent1"/>
+          </a:lnRef>
+          <a:fillRef idx="0">
+            <a:schemeClr val="accent1"/>
+          </a:fillRef>
+          <a:effectRef idx="1">
+            <a:schemeClr val="accent1"/>
+          </a:effectRef>
+          <a:fontRef idx="minor">
+            <a:schemeClr val="tx1"/>
+          </a:fontRef>
+        </p:style>
+      </p:cxnSp>
+      <p:cxnSp>
+        <p:nvCxnSpPr>
+          <p:cNvPr id="44" name="Straight Arrow Connector 1">
+            <a:extLst>
+              <a:ext uri="{FF2B5EF4-FFF2-40B4-BE49-F238E27FC236}">
+                <a16:creationId xmlns:a16="http://schemas.microsoft.com/office/drawing/2014/main" id="{BAC2788B-6189-AA5F-4198-CA0E8BD552AF}"/>
+              </a:ext>
+            </a:extLst>
+          </p:cNvPr>
+          <p:cNvCxnSpPr>
+            <a:cxnSpLocks/>
+            <a:stCxn id="10" idx="3"/>
+            <a:endCxn id="8" idx="2"/>
+          </p:cNvCxnSpPr>
+          <p:nvPr/>
+        </p:nvCxnSpPr>
+        <p:spPr>
+          <a:xfrm flipV="1">
+            <a:off x="5997039" y="3368513"/>
+            <a:ext cx="3963307" cy="2124555"/>
+          </a:xfrm>
+          <a:prstGeom prst="bentConnector2">
+            <a:avLst/>
+          </a:prstGeom>
+          <a:ln>
+            <a:solidFill>
+              <a:schemeClr val="tx1"/>
+            </a:solidFill>
+            <a:tailEnd type="triangle"/>
           </a:ln>
         </p:spPr>
         <p:style>
@@ -31544,10 +38755,10 @@
       </p:cxnSp>
       <p:sp>
         <p:nvSpPr>
-          <p:cNvPr id="12" name="TextBox 11">
-            <a:extLst>
-              <a:ext uri="{FF2B5EF4-FFF2-40B4-BE49-F238E27FC236}">
-                <a16:creationId xmlns:a16="http://schemas.microsoft.com/office/drawing/2014/main" id="{F6771E52-258E-1DFE-F3EF-F5D59BEFEC1A}"/>
+          <p:cNvPr id="47" name="TextBox 46">
+            <a:extLst>
+              <a:ext uri="{FF2B5EF4-FFF2-40B4-BE49-F238E27FC236}">
+                <a16:creationId xmlns:a16="http://schemas.microsoft.com/office/drawing/2014/main" id="{305DF066-321E-F333-D562-53879917E587}"/>
               </a:ext>
             </a:extLst>
           </p:cNvPr>
@@ -31556,8 +38767,605 @@
         </p:nvSpPr>
         <p:spPr>
           <a:xfrm>
-            <a:off x="1905601" y="4352135"/>
-            <a:ext cx="2365150" cy="1200329"/>
+            <a:off x="530392" y="2996881"/>
+            <a:ext cx="1662635" cy="923330"/>
+          </a:xfrm>
+          <a:prstGeom prst="rect">
+            <a:avLst/>
+          </a:prstGeom>
+          <a:noFill/>
+        </p:spPr>
+        <p:txBody>
+          <a:bodyPr wrap="none" rtlCol="0">
+            <a:spAutoFit/>
+          </a:bodyPr>
+          <a:lstStyle/>
+          <a:p>
+            <a:r>
+              <a:rPr lang="en-US" dirty="0"/>
+              <a:t>Received </a:t>
+            </a:r>
+          </a:p>
+          <a:p>
+            <a:r>
+              <a:rPr lang="en-US" dirty="0"/>
+              <a:t>codeword</a:t>
+            </a:r>
+          </a:p>
+          <a:p>
+            <a:r>
+              <a:rPr lang="en-US" dirty="0"/>
+              <a:t>V(x) = r(x) + e(x)</a:t>
+            </a:r>
+          </a:p>
+        </p:txBody>
+      </p:sp>
+      <p:sp>
+        <p:nvSpPr>
+          <p:cNvPr id="48" name="TextBox 47">
+            <a:extLst>
+              <a:ext uri="{FF2B5EF4-FFF2-40B4-BE49-F238E27FC236}">
+                <a16:creationId xmlns:a16="http://schemas.microsoft.com/office/drawing/2014/main" id="{D7B5F956-F1F3-1C5B-F68A-2D750A2298AF}"/>
+              </a:ext>
+            </a:extLst>
+          </p:cNvPr>
+          <p:cNvSpPr txBox="1"/>
+          <p:nvPr/>
+        </p:nvSpPr>
+        <p:spPr>
+          <a:xfrm>
+            <a:off x="3566834" y="2949288"/>
+            <a:ext cx="551754" cy="369332"/>
+          </a:xfrm>
+          <a:prstGeom prst="rect">
+            <a:avLst/>
+          </a:prstGeom>
+          <a:noFill/>
+        </p:spPr>
+        <p:txBody>
+          <a:bodyPr wrap="none" rtlCol="0">
+            <a:spAutoFit/>
+          </a:bodyPr>
+          <a:lstStyle/>
+          <a:p>
+            <a:r>
+              <a:rPr lang="en-US" dirty="0"/>
+              <a:t>S(x)</a:t>
+            </a:r>
+          </a:p>
+        </p:txBody>
+      </p:sp>
+      <p:sp>
+        <p:nvSpPr>
+          <p:cNvPr id="49" name="TextBox 48">
+            <a:extLst>
+              <a:ext uri="{FF2B5EF4-FFF2-40B4-BE49-F238E27FC236}">
+                <a16:creationId xmlns:a16="http://schemas.microsoft.com/office/drawing/2014/main" id="{44C5FAD1-DA3B-BC0F-FB28-3E7BCD8E0E33}"/>
+              </a:ext>
+            </a:extLst>
+          </p:cNvPr>
+          <p:cNvSpPr txBox="1"/>
+          <p:nvPr/>
+        </p:nvSpPr>
+        <p:spPr>
+          <a:xfrm>
+            <a:off x="2563555" y="3174098"/>
+            <a:ext cx="973023" cy="523220"/>
+          </a:xfrm>
+          <a:prstGeom prst="rect">
+            <a:avLst/>
+          </a:prstGeom>
+          <a:noFill/>
+        </p:spPr>
+        <p:txBody>
+          <a:bodyPr wrap="none" rtlCol="0">
+            <a:spAutoFit/>
+          </a:bodyPr>
+          <a:lstStyle/>
+          <a:p>
+            <a:r>
+              <a:rPr lang="en-US" sz="1400" dirty="0"/>
+              <a:t>Syndrome</a:t>
+            </a:r>
+          </a:p>
+          <a:p>
+            <a:r>
+              <a:rPr lang="en-US" sz="1400" dirty="0"/>
+              <a:t>calculator</a:t>
+            </a:r>
+          </a:p>
+        </p:txBody>
+      </p:sp>
+      <p:sp>
+        <p:nvSpPr>
+          <p:cNvPr id="50" name="TextBox 49">
+            <a:extLst>
+              <a:ext uri="{FF2B5EF4-FFF2-40B4-BE49-F238E27FC236}">
+                <a16:creationId xmlns:a16="http://schemas.microsoft.com/office/drawing/2014/main" id="{9A18C5BD-BB29-9DE1-AAB1-83D792262472}"/>
+              </a:ext>
+            </a:extLst>
+          </p:cNvPr>
+          <p:cNvSpPr txBox="1"/>
+          <p:nvPr/>
+        </p:nvSpPr>
+        <p:spPr>
+          <a:xfrm>
+            <a:off x="4162445" y="2395290"/>
+            <a:ext cx="1115562" cy="923330"/>
+          </a:xfrm>
+          <a:prstGeom prst="rect">
+            <a:avLst/>
+          </a:prstGeom>
+          <a:noFill/>
+        </p:spPr>
+        <p:txBody>
+          <a:bodyPr wrap="none" rtlCol="0">
+            <a:spAutoFit/>
+          </a:bodyPr>
+          <a:lstStyle/>
+          <a:p>
+            <a:r>
+              <a:rPr lang="en-US" dirty="0"/>
+              <a:t>Key</a:t>
+            </a:r>
+          </a:p>
+          <a:p>
+            <a:r>
+              <a:rPr lang="en-US" dirty="0"/>
+              <a:t>equation </a:t>
+            </a:r>
+          </a:p>
+          <a:p>
+            <a:r>
+              <a:rPr lang="en-US" dirty="0"/>
+              <a:t>solver</a:t>
+            </a:r>
+          </a:p>
+        </p:txBody>
+      </p:sp>
+      <p:sp>
+        <p:nvSpPr>
+          <p:cNvPr id="51" name="TextBox 50">
+            <a:extLst>
+              <a:ext uri="{FF2B5EF4-FFF2-40B4-BE49-F238E27FC236}">
+                <a16:creationId xmlns:a16="http://schemas.microsoft.com/office/drawing/2014/main" id="{F8F15DF9-0235-DB00-7DCE-73C92DD35AA9}"/>
+              </a:ext>
+            </a:extLst>
+          </p:cNvPr>
+          <p:cNvSpPr txBox="1"/>
+          <p:nvPr/>
+        </p:nvSpPr>
+        <p:spPr>
+          <a:xfrm>
+            <a:off x="4454739" y="5230516"/>
+            <a:ext cx="1324658" cy="523220"/>
+          </a:xfrm>
+          <a:prstGeom prst="rect">
+            <a:avLst/>
+          </a:prstGeom>
+          <a:noFill/>
+        </p:spPr>
+        <p:txBody>
+          <a:bodyPr wrap="none" rtlCol="0">
+            <a:spAutoFit/>
+          </a:bodyPr>
+          <a:lstStyle/>
+          <a:p>
+            <a:r>
+              <a:rPr lang="en-US" sz="1400" dirty="0"/>
+              <a:t> FIFO Register</a:t>
+            </a:r>
+          </a:p>
+          <a:p>
+            <a:r>
+              <a:rPr lang="en-US" sz="1400" dirty="0"/>
+              <a:t>(delay register)</a:t>
+            </a:r>
+          </a:p>
+        </p:txBody>
+      </p:sp>
+      <p:sp>
+        <p:nvSpPr>
+          <p:cNvPr id="52" name="TextBox 51">
+            <a:extLst>
+              <a:ext uri="{FF2B5EF4-FFF2-40B4-BE49-F238E27FC236}">
+                <a16:creationId xmlns:a16="http://schemas.microsoft.com/office/drawing/2014/main" id="{B28240E7-AB4A-8D80-0AC8-62E3A0F46DB4}"/>
+              </a:ext>
+            </a:extLst>
+          </p:cNvPr>
+          <p:cNvSpPr txBox="1"/>
+          <p:nvPr/>
+        </p:nvSpPr>
+        <p:spPr>
+          <a:xfrm>
+            <a:off x="4048234" y="4140928"/>
+            <a:ext cx="1255728" cy="307777"/>
+          </a:xfrm>
+          <a:prstGeom prst="rect">
+            <a:avLst/>
+          </a:prstGeom>
+          <a:noFill/>
+        </p:spPr>
+        <p:txBody>
+          <a:bodyPr wrap="none" rtlCol="0">
+            <a:spAutoFit/>
+          </a:bodyPr>
+          <a:lstStyle/>
+          <a:p>
+            <a:r>
+              <a:rPr lang="en-US" sz="1400" dirty="0" err="1"/>
+              <a:t>iBM</a:t>
+            </a:r>
+            <a:r>
+              <a:rPr lang="en-US" sz="1400" dirty="0"/>
+              <a:t> algorithm</a:t>
+            </a:r>
+          </a:p>
+        </p:txBody>
+      </p:sp>
+      <p:sp>
+        <p:nvSpPr>
+          <p:cNvPr id="53" name="TextBox 52">
+            <a:extLst>
+              <a:ext uri="{FF2B5EF4-FFF2-40B4-BE49-F238E27FC236}">
+                <a16:creationId xmlns:a16="http://schemas.microsoft.com/office/drawing/2014/main" id="{57D55BB9-91D9-2DCB-4CF1-3C8DA7F40E2F}"/>
+              </a:ext>
+            </a:extLst>
+          </p:cNvPr>
+          <p:cNvSpPr txBox="1"/>
+          <p:nvPr/>
+        </p:nvSpPr>
+        <p:spPr>
+          <a:xfrm>
+            <a:off x="5316432" y="3818385"/>
+            <a:ext cx="606256" cy="369332"/>
+          </a:xfrm>
+          <a:prstGeom prst="rect">
+            <a:avLst/>
+          </a:prstGeom>
+          <a:noFill/>
+        </p:spPr>
+        <p:txBody>
+          <a:bodyPr wrap="none" rtlCol="0">
+            <a:spAutoFit/>
+          </a:bodyPr>
+          <a:lstStyle/>
+          <a:p>
+            <a:r>
+              <a:rPr lang="el-GR" dirty="0"/>
+              <a:t>ω</a:t>
+            </a:r>
+            <a:r>
+              <a:rPr lang="en-US" dirty="0"/>
+              <a:t>(x)</a:t>
+            </a:r>
+          </a:p>
+        </p:txBody>
+      </p:sp>
+      <p:sp>
+        <p:nvSpPr>
+          <p:cNvPr id="54" name="TextBox 53">
+            <a:extLst>
+              <a:ext uri="{FF2B5EF4-FFF2-40B4-BE49-F238E27FC236}">
+                <a16:creationId xmlns:a16="http://schemas.microsoft.com/office/drawing/2014/main" id="{302E41C5-6554-9453-2DCA-B77CFF9BAAAC}"/>
+              </a:ext>
+            </a:extLst>
+          </p:cNvPr>
+          <p:cNvSpPr txBox="1"/>
+          <p:nvPr/>
+        </p:nvSpPr>
+        <p:spPr>
+          <a:xfrm>
+            <a:off x="5409935" y="1552858"/>
+            <a:ext cx="554960" cy="369332"/>
+          </a:xfrm>
+          <a:prstGeom prst="rect">
+            <a:avLst/>
+          </a:prstGeom>
+          <a:noFill/>
+        </p:spPr>
+        <p:txBody>
+          <a:bodyPr wrap="none" rtlCol="0">
+            <a:spAutoFit/>
+          </a:bodyPr>
+          <a:lstStyle/>
+          <a:p>
+            <a:r>
+              <a:rPr lang="el-GR" dirty="0"/>
+              <a:t>σ</a:t>
+            </a:r>
+            <a:r>
+              <a:rPr lang="en-US" dirty="0"/>
+              <a:t>(x)</a:t>
+            </a:r>
+            <a:endParaRPr lang="en-US" sz="1400" dirty="0"/>
+          </a:p>
+        </p:txBody>
+      </p:sp>
+      <p:sp>
+        <p:nvSpPr>
+          <p:cNvPr id="55" name="TextBox 54">
+            <a:extLst>
+              <a:ext uri="{FF2B5EF4-FFF2-40B4-BE49-F238E27FC236}">
+                <a16:creationId xmlns:a16="http://schemas.microsoft.com/office/drawing/2014/main" id="{62C0158A-9892-3551-334A-EB8F30FCF946}"/>
+              </a:ext>
+            </a:extLst>
+          </p:cNvPr>
+          <p:cNvSpPr txBox="1"/>
+          <p:nvPr/>
+        </p:nvSpPr>
+        <p:spPr>
+          <a:xfrm>
+            <a:off x="7247825" y="2033482"/>
+            <a:ext cx="1994457" cy="369332"/>
+          </a:xfrm>
+          <a:prstGeom prst="rect">
+            <a:avLst/>
+          </a:prstGeom>
+          <a:noFill/>
+        </p:spPr>
+        <p:txBody>
+          <a:bodyPr wrap="none" rtlCol="0">
+            <a:spAutoFit/>
+          </a:bodyPr>
+          <a:lstStyle/>
+          <a:p>
+            <a:r>
+              <a:rPr lang="el-GR" dirty="0"/>
+              <a:t>σ</a:t>
+            </a:r>
+            <a:r>
+              <a:rPr lang="en-US" dirty="0"/>
+              <a:t>(</a:t>
+            </a:r>
+            <a:r>
+              <a:rPr lang="el-GR" dirty="0"/>
+              <a:t>α</a:t>
+            </a:r>
+            <a:r>
+              <a:rPr lang="en-US" baseline="30000" dirty="0"/>
+              <a:t>i</a:t>
+            </a:r>
+            <a:r>
+              <a:rPr lang="en-US" dirty="0"/>
+              <a:t>) error position</a:t>
+            </a:r>
+            <a:endParaRPr lang="en-US" sz="1400" dirty="0"/>
+          </a:p>
+        </p:txBody>
+      </p:sp>
+      <p:sp>
+        <p:nvSpPr>
+          <p:cNvPr id="56" name="TextBox 55">
+            <a:extLst>
+              <a:ext uri="{FF2B5EF4-FFF2-40B4-BE49-F238E27FC236}">
+                <a16:creationId xmlns:a16="http://schemas.microsoft.com/office/drawing/2014/main" id="{A8B4BB0E-333B-0BE6-5166-6F23E09A18D3}"/>
+              </a:ext>
+            </a:extLst>
+          </p:cNvPr>
+          <p:cNvSpPr txBox="1"/>
+          <p:nvPr/>
+        </p:nvSpPr>
+        <p:spPr>
+          <a:xfrm>
+            <a:off x="7232715" y="2634570"/>
+            <a:ext cx="670376" cy="369332"/>
+          </a:xfrm>
+          <a:prstGeom prst="rect">
+            <a:avLst/>
+          </a:prstGeom>
+          <a:noFill/>
+        </p:spPr>
+        <p:txBody>
+          <a:bodyPr wrap="none" rtlCol="0">
+            <a:spAutoFit/>
+          </a:bodyPr>
+          <a:lstStyle/>
+          <a:p>
+            <a:r>
+              <a:rPr lang="el-GR" dirty="0"/>
+              <a:t>ω</a:t>
+            </a:r>
+            <a:r>
+              <a:rPr lang="en-US" dirty="0"/>
+              <a:t>(</a:t>
+            </a:r>
+            <a:r>
+              <a:rPr lang="el-GR" dirty="0"/>
+              <a:t>α</a:t>
+            </a:r>
+            <a:r>
+              <a:rPr lang="en-US" baseline="30000" dirty="0"/>
+              <a:t>i</a:t>
+            </a:r>
+            <a:r>
+              <a:rPr lang="en-US" dirty="0"/>
+              <a:t>)</a:t>
+            </a:r>
+            <a:endParaRPr lang="en-US" sz="1400" dirty="0"/>
+          </a:p>
+        </p:txBody>
+      </p:sp>
+      <mc:AlternateContent xmlns:mc="http://schemas.openxmlformats.org/markup-compatibility/2006">
+        <mc:Choice xmlns:a14="http://schemas.microsoft.com/office/drawing/2010/main" Requires="a14">
+          <p:sp>
+            <p:nvSpPr>
+              <p:cNvPr id="57" name="TextBox 56">
+                <a:extLst>
+                  <a:ext uri="{FF2B5EF4-FFF2-40B4-BE49-F238E27FC236}">
+                    <a16:creationId xmlns:a16="http://schemas.microsoft.com/office/drawing/2014/main" id="{EBD43C9F-4B95-7EA9-4C65-A965D1739C45}"/>
+                  </a:ext>
+                </a:extLst>
+              </p:cNvPr>
+              <p:cNvSpPr txBox="1"/>
+              <p:nvPr/>
+            </p:nvSpPr>
+            <p:spPr>
+              <a:xfrm>
+                <a:off x="7258914" y="3231788"/>
+                <a:ext cx="619080" cy="369332"/>
+              </a:xfrm>
+              <a:prstGeom prst="rect">
+                <a:avLst/>
+              </a:prstGeom>
+              <a:noFill/>
+            </p:spPr>
+            <p:txBody>
+              <a:bodyPr wrap="none" rtlCol="0">
+                <a:spAutoFit/>
+              </a:bodyPr>
+              <a:lstStyle/>
+              <a:p>
+                <a:r>
+                  <a:rPr lang="el-GR" dirty="0"/>
+                  <a:t>σ</a:t>
+                </a:r>
+                <a14:m>
+                  <m:oMath xmlns:m="http://schemas.openxmlformats.org/officeDocument/2006/math">
+                    <m:r>
+                      <a:rPr lang="el-GR" i="1" smtClean="0">
+                        <a:latin typeface="Cambria Math" panose="02040503050406030204" pitchFamily="18" charset="0"/>
+                      </a:rPr>
+                      <m:t>̀</m:t>
+                    </m:r>
+                  </m:oMath>
+                </a14:m>
+                <a:r>
+                  <a:rPr lang="en-US" dirty="0"/>
+                  <a:t>(</a:t>
+                </a:r>
+                <a:r>
+                  <a:rPr lang="el-GR" dirty="0"/>
+                  <a:t>α</a:t>
+                </a:r>
+                <a:r>
+                  <a:rPr lang="en-US" baseline="30000" dirty="0"/>
+                  <a:t>i</a:t>
+                </a:r>
+                <a:r>
+                  <a:rPr lang="en-US" dirty="0"/>
+                  <a:t>)</a:t>
+                </a:r>
+                <a:endParaRPr lang="en-US" sz="1400" dirty="0"/>
+              </a:p>
+            </p:txBody>
+          </p:sp>
+        </mc:Choice>
+        <mc:Fallback>
+          <p:sp>
+            <p:nvSpPr>
+              <p:cNvPr id="57" name="TextBox 56">
+                <a:extLst>
+                  <a:ext uri="{FF2B5EF4-FFF2-40B4-BE49-F238E27FC236}">
+                    <a16:creationId xmlns:a16="http://schemas.microsoft.com/office/drawing/2014/main" id="{EBD43C9F-4B95-7EA9-4C65-A965D1739C45}"/>
+                  </a:ext>
+                </a:extLst>
+              </p:cNvPr>
+              <p:cNvSpPr txBox="1">
+                <a:spLocks noRot="1" noChangeAspect="1" noMove="1" noResize="1" noEditPoints="1" noAdjustHandles="1" noChangeArrowheads="1" noChangeShapeType="1" noTextEdit="1"/>
+              </p:cNvSpPr>
+              <p:nvPr/>
+            </p:nvSpPr>
+            <p:spPr>
+              <a:xfrm>
+                <a:off x="7258914" y="3231788"/>
+                <a:ext cx="619080" cy="369332"/>
+              </a:xfrm>
+              <a:prstGeom prst="rect">
+                <a:avLst/>
+              </a:prstGeom>
+              <a:blipFill>
+                <a:blip r:embed="rId3"/>
+                <a:stretch>
+                  <a:fillRect l="-8911" t="-6557" r="-7921" b="-26230"/>
+                </a:stretch>
+              </a:blipFill>
+            </p:spPr>
+            <p:txBody>
+              <a:bodyPr/>
+              <a:lstStyle/>
+              <a:p>
+                <a:r>
+                  <a:rPr lang="en-US">
+                    <a:noFill/>
+                  </a:rPr>
+                  <a:t> </a:t>
+                </a:r>
+              </a:p>
+            </p:txBody>
+          </p:sp>
+        </mc:Fallback>
+      </mc:AlternateContent>
+      <p:sp>
+        <p:nvSpPr>
+          <p:cNvPr id="58" name="TextBox 57">
+            <a:extLst>
+              <a:ext uri="{FF2B5EF4-FFF2-40B4-BE49-F238E27FC236}">
+                <a16:creationId xmlns:a16="http://schemas.microsoft.com/office/drawing/2014/main" id="{D8E8F1D0-20AB-7D16-BD7C-FBC52FF091BE}"/>
+              </a:ext>
+            </a:extLst>
+          </p:cNvPr>
+          <p:cNvSpPr txBox="1"/>
+          <p:nvPr/>
+        </p:nvSpPr>
+        <p:spPr>
+          <a:xfrm>
+            <a:off x="6012699" y="2240099"/>
+            <a:ext cx="1136850" cy="1138773"/>
+          </a:xfrm>
+          <a:prstGeom prst="rect">
+            <a:avLst/>
+          </a:prstGeom>
+          <a:noFill/>
+        </p:spPr>
+        <p:txBody>
+          <a:bodyPr wrap="none" rtlCol="0">
+            <a:spAutoFit/>
+          </a:bodyPr>
+          <a:lstStyle/>
+          <a:p>
+            <a:r>
+              <a:rPr lang="en-US" sz="2000" dirty="0"/>
+              <a:t>Chien-</a:t>
+            </a:r>
+          </a:p>
+          <a:p>
+            <a:r>
+              <a:rPr lang="en-US" sz="2000" dirty="0"/>
+              <a:t>search</a:t>
+            </a:r>
+          </a:p>
+          <a:p>
+            <a:r>
+              <a:rPr lang="en-US" dirty="0"/>
+              <a:t>algorithm</a:t>
+            </a:r>
+          </a:p>
+          <a:p>
+            <a:r>
+              <a:rPr lang="en-US" sz="1050" dirty="0"/>
+              <a:t>(error location)</a:t>
+            </a:r>
+            <a:endParaRPr lang="en-US" sz="2000" dirty="0"/>
+          </a:p>
+        </p:txBody>
+      </p:sp>
+      <p:sp>
+        <p:nvSpPr>
+          <p:cNvPr id="59" name="TextBox 58">
+            <a:extLst>
+              <a:ext uri="{FF2B5EF4-FFF2-40B4-BE49-F238E27FC236}">
+                <a16:creationId xmlns:a16="http://schemas.microsoft.com/office/drawing/2014/main" id="{184652FB-1BBE-A9CE-2017-16BAFA3E9F7A}"/>
+              </a:ext>
+            </a:extLst>
+          </p:cNvPr>
+          <p:cNvSpPr txBox="1"/>
+          <p:nvPr/>
+        </p:nvSpPr>
+        <p:spPr>
+          <a:xfrm>
+            <a:off x="7889181" y="3077992"/>
+            <a:ext cx="1031051" cy="800219"/>
           </a:xfrm>
           <a:prstGeom prst="rect">
             <a:avLst/>
@@ -31570,24 +39378,21 @@
           </a:bodyPr>
           <a:lstStyle/>
           <a:p>
-            <a:pPr algn="ctr"/>
             <a:r>
-              <a:rPr lang="en-US" sz="2400" dirty="0"/>
-              <a:t>For pulse train</a:t>
+              <a:rPr lang="en-US" dirty="0"/>
+              <a:t>Forney</a:t>
             </a:r>
           </a:p>
           <a:p>
-            <a:pPr algn="ctr"/>
             <a:r>
-              <a:rPr lang="en-US" sz="2400" dirty="0"/>
-              <a:t> and </a:t>
+              <a:rPr lang="en-US" sz="1600" dirty="0"/>
+              <a:t>algorithm</a:t>
             </a:r>
           </a:p>
           <a:p>
-            <a:pPr algn="ctr"/>
             <a:r>
-              <a:rPr lang="en-US" sz="2400" dirty="0"/>
-              <a:t>control signal </a:t>
+              <a:rPr lang="en-US" sz="1200" dirty="0"/>
+              <a:t>(error value)</a:t>
             </a:r>
             <a:endParaRPr lang="en-US" dirty="0"/>
           </a:p>
@@ -31595,10 +39400,10 @@
       </p:sp>
       <p:sp>
         <p:nvSpPr>
-          <p:cNvPr id="13" name="TextBox 12">
-            <a:extLst>
-              <a:ext uri="{FF2B5EF4-FFF2-40B4-BE49-F238E27FC236}">
-                <a16:creationId xmlns:a16="http://schemas.microsoft.com/office/drawing/2014/main" id="{A2ABE84F-2C52-C6B0-51CF-977E4CE40535}"/>
+          <p:cNvPr id="60" name="TextBox 59">
+            <a:extLst>
+              <a:ext uri="{FF2B5EF4-FFF2-40B4-BE49-F238E27FC236}">
+                <a16:creationId xmlns:a16="http://schemas.microsoft.com/office/drawing/2014/main" id="{D1C2999D-A616-E157-7FCB-D16318C360B2}"/>
               </a:ext>
             </a:extLst>
           </p:cNvPr>
@@ -31607,8 +39412,85 @@
         </p:nvSpPr>
         <p:spPr>
           <a:xfrm>
-            <a:off x="7778744" y="4361641"/>
-            <a:ext cx="2365150" cy="1200329"/>
+            <a:off x="9416514" y="2406743"/>
+            <a:ext cx="1104790" cy="646331"/>
+          </a:xfrm>
+          <a:prstGeom prst="rect">
+            <a:avLst/>
+          </a:prstGeom>
+          <a:noFill/>
+        </p:spPr>
+        <p:txBody>
+          <a:bodyPr wrap="none" rtlCol="0">
+            <a:spAutoFit/>
+          </a:bodyPr>
+          <a:lstStyle/>
+          <a:p>
+            <a:r>
+              <a:rPr lang="en-US" dirty="0"/>
+              <a:t>Error</a:t>
+            </a:r>
+          </a:p>
+          <a:p>
+            <a:r>
+              <a:rPr lang="en-US" dirty="0"/>
+              <a:t>corrector</a:t>
+            </a:r>
+          </a:p>
+        </p:txBody>
+      </p:sp>
+      <p:sp>
+        <p:nvSpPr>
+          <p:cNvPr id="84" name="TextBox 83">
+            <a:extLst>
+              <a:ext uri="{FF2B5EF4-FFF2-40B4-BE49-F238E27FC236}">
+                <a16:creationId xmlns:a16="http://schemas.microsoft.com/office/drawing/2014/main" id="{66B2009F-7BBF-E399-78AC-B0A74A2F6409}"/>
+              </a:ext>
+            </a:extLst>
+          </p:cNvPr>
+          <p:cNvSpPr txBox="1"/>
+          <p:nvPr/>
+        </p:nvSpPr>
+        <p:spPr>
+          <a:xfrm>
+            <a:off x="10978190" y="2611687"/>
+            <a:ext cx="888385" cy="369332"/>
+          </a:xfrm>
+          <a:prstGeom prst="rect">
+            <a:avLst/>
+          </a:prstGeom>
+          <a:noFill/>
+        </p:spPr>
+        <p:txBody>
+          <a:bodyPr wrap="none" rtlCol="0">
+            <a:spAutoFit/>
+          </a:bodyPr>
+          <a:lstStyle/>
+          <a:p>
+            <a:r>
+              <a:rPr lang="en-US" dirty="0"/>
+              <a:t>Output</a:t>
+            </a:r>
+            <a:endParaRPr lang="en-US" sz="1400" dirty="0"/>
+          </a:p>
+        </p:txBody>
+      </p:sp>
+      <p:sp>
+        <p:nvSpPr>
+          <p:cNvPr id="85" name="TextBox 84">
+            <a:extLst>
+              <a:ext uri="{FF2B5EF4-FFF2-40B4-BE49-F238E27FC236}">
+                <a16:creationId xmlns:a16="http://schemas.microsoft.com/office/drawing/2014/main" id="{B8CD1153-15E0-40FB-5918-17FBD2984823}"/>
+              </a:ext>
+            </a:extLst>
+          </p:cNvPr>
+          <p:cNvSpPr txBox="1"/>
+          <p:nvPr/>
+        </p:nvSpPr>
+        <p:spPr>
+          <a:xfrm>
+            <a:off x="8891657" y="3224541"/>
+            <a:ext cx="646043" cy="523220"/>
           </a:xfrm>
           <a:prstGeom prst="rect">
             <a:avLst/>
@@ -31621,46 +39503,37 @@
           </a:bodyPr>
           <a:lstStyle/>
           <a:p>
-            <a:pPr algn="ctr"/>
             <a:r>
-              <a:rPr lang="en-US" sz="2400" dirty="0"/>
-              <a:t>For data</a:t>
+              <a:rPr lang="en-US" sz="1400" dirty="0"/>
+              <a:t>error</a:t>
             </a:r>
           </a:p>
           <a:p>
-            <a:pPr algn="ctr"/>
             <a:r>
-              <a:rPr lang="en-US" sz="2400" dirty="0"/>
-              <a:t> and </a:t>
+              <a:rPr lang="en-US" sz="1400" dirty="0"/>
+              <a:t>value</a:t>
             </a:r>
-          </a:p>
-          <a:p>
-            <a:pPr algn="ctr"/>
-            <a:r>
-              <a:rPr lang="en-US" sz="2400" dirty="0"/>
-              <a:t>CRC </a:t>
-            </a:r>
-            <a:endParaRPr lang="en-US" dirty="0"/>
+            <a:endParaRPr lang="en-US" sz="2000" dirty="0"/>
           </a:p>
         </p:txBody>
       </p:sp>
     </p:spTree>
     <p:extLst>
       <p:ext uri="{BB962C8B-B14F-4D97-AF65-F5344CB8AC3E}">
-        <p14:creationId xmlns:p14="http://schemas.microsoft.com/office/powerpoint/2010/main" val="5132717"/>
+        <p14:creationId xmlns:p14="http://schemas.microsoft.com/office/powerpoint/2010/main" val="3466501264"/>
       </p:ext>
     </p:extLst>
   </p:cSld>
   <p:clrMapOvr>
     <a:masterClrMapping/>
   </p:clrMapOvr>
-  <mc:AlternateContent xmlns:mc="http://schemas.openxmlformats.org/markup-compatibility/2006">
-    <mc:Choice xmlns:p159="http://schemas.microsoft.com/office/powerpoint/2015/09/main" Requires="p159">
+  <mc:AlternateContent xmlns:mc="http://schemas.openxmlformats.org/markup-compatibility/2006" xmlns:p159="http://schemas.microsoft.com/office/powerpoint/2015/09/main">
+    <mc:Choice Requires="p159">
       <p:transition spd="slow">
         <p159:morph option="byObject"/>
       </p:transition>
     </mc:Choice>
-    <mc:Fallback>
+    <mc:Fallback xmlns="">
       <p:transition spd="slow">
         <p:fade/>
       </p:transition>
